--- a/Last/LEC/03-1_ExpSmooth.pptx
+++ b/Last/LEC/03-1_ExpSmooth.pptx
@@ -5,34 +5,35 @@
     <p:sldMasterId id="2147483648" r:id="rId1"/>
   </p:sldMasterIdLst>
   <p:notesMasterIdLst>
-    <p:notesMasterId r:id="rId27"/>
+    <p:notesMasterId r:id="rId28"/>
   </p:notesMasterIdLst>
   <p:sldIdLst>
     <p:sldId id="256" r:id="rId2"/>
-    <p:sldId id="463" r:id="rId3"/>
-    <p:sldId id="464" r:id="rId4"/>
-    <p:sldId id="417" r:id="rId5"/>
-    <p:sldId id="453" r:id="rId6"/>
-    <p:sldId id="414" r:id="rId7"/>
-    <p:sldId id="431" r:id="rId8"/>
-    <p:sldId id="415" r:id="rId9"/>
-    <p:sldId id="418" r:id="rId10"/>
-    <p:sldId id="426" r:id="rId11"/>
-    <p:sldId id="416" r:id="rId12"/>
-    <p:sldId id="419" r:id="rId13"/>
-    <p:sldId id="421" r:id="rId14"/>
-    <p:sldId id="434" r:id="rId15"/>
-    <p:sldId id="422" r:id="rId16"/>
-    <p:sldId id="423" r:id="rId17"/>
-    <p:sldId id="425" r:id="rId18"/>
-    <p:sldId id="427" r:id="rId19"/>
-    <p:sldId id="424" r:id="rId20"/>
-    <p:sldId id="428" r:id="rId21"/>
-    <p:sldId id="429" r:id="rId22"/>
-    <p:sldId id="430" r:id="rId23"/>
-    <p:sldId id="456" r:id="rId24"/>
-    <p:sldId id="459" r:id="rId25"/>
-    <p:sldId id="461" r:id="rId26"/>
+    <p:sldId id="465" r:id="rId3"/>
+    <p:sldId id="463" r:id="rId4"/>
+    <p:sldId id="464" r:id="rId5"/>
+    <p:sldId id="417" r:id="rId6"/>
+    <p:sldId id="453" r:id="rId7"/>
+    <p:sldId id="414" r:id="rId8"/>
+    <p:sldId id="431" r:id="rId9"/>
+    <p:sldId id="415" r:id="rId10"/>
+    <p:sldId id="418" r:id="rId11"/>
+    <p:sldId id="426" r:id="rId12"/>
+    <p:sldId id="416" r:id="rId13"/>
+    <p:sldId id="419" r:id="rId14"/>
+    <p:sldId id="421" r:id="rId15"/>
+    <p:sldId id="434" r:id="rId16"/>
+    <p:sldId id="422" r:id="rId17"/>
+    <p:sldId id="423" r:id="rId18"/>
+    <p:sldId id="425" r:id="rId19"/>
+    <p:sldId id="427" r:id="rId20"/>
+    <p:sldId id="424" r:id="rId21"/>
+    <p:sldId id="428" r:id="rId22"/>
+    <p:sldId id="429" r:id="rId23"/>
+    <p:sldId id="430" r:id="rId24"/>
+    <p:sldId id="456" r:id="rId25"/>
+    <p:sldId id="459" r:id="rId26"/>
+    <p:sldId id="461" r:id="rId27"/>
   </p:sldIdLst>
   <p:sldSz cx="12192000" cy="6858000"/>
   <p:notesSz cx="6858000" cy="9144000"/>
@@ -137,6 +138,7 @@
         <p14:section name="Раздел по умолчанию" id="{201EE05C-F9E4-4BBB-A5C1-9C9F75E33B4A}">
           <p14:sldIdLst>
             <p14:sldId id="256"/>
+            <p14:sldId id="465"/>
             <p14:sldId id="463"/>
             <p14:sldId id="464"/>
             <p14:sldId id="417"/>
@@ -254,7 +256,7 @@
           <a:p>
             <a:fld id="{C730246F-5962-E14A-AAF2-985CCFDAC345}" type="datetimeFigureOut">
               <a:rPr lang="ru-RU" smtClean="0"/>
-              <a:t>04.05.2026</a:t>
+              <a:t>19.10.2026</a:t>
             </a:fld>
             <a:endParaRPr lang="ru-RU"/>
           </a:p>
@@ -586,7 +588,7 @@
           <a:p>
             <a:fld id="{1EA4F326-5F8D-6A4F-9B75-A3402553DF5F}" type="slidenum">
               <a:rPr lang="ru-RU" smtClean="0"/>
-              <a:t>4</a:t>
+              <a:t>5</a:t>
             </a:fld>
             <a:endParaRPr lang="ru-RU"/>
           </a:p>
@@ -670,7 +672,7 @@
           <a:p>
             <a:fld id="{1EA4F326-5F8D-6A4F-9B75-A3402553DF5F}" type="slidenum">
               <a:rPr lang="ru-RU" smtClean="0"/>
-              <a:t>5</a:t>
+              <a:t>6</a:t>
             </a:fld>
             <a:endParaRPr lang="ru-RU"/>
           </a:p>
@@ -754,7 +756,7 @@
           <a:p>
             <a:fld id="{1EA4F326-5F8D-6A4F-9B75-A3402553DF5F}" type="slidenum">
               <a:rPr lang="ru-RU" smtClean="0"/>
-              <a:t>6</a:t>
+              <a:t>7</a:t>
             </a:fld>
             <a:endParaRPr lang="ru-RU"/>
           </a:p>
@@ -838,7 +840,7 @@
           <a:p>
             <a:fld id="{1EA4F326-5F8D-6A4F-9B75-A3402553DF5F}" type="slidenum">
               <a:rPr lang="ru-RU" smtClean="0"/>
-              <a:t>7</a:t>
+              <a:t>8</a:t>
             </a:fld>
             <a:endParaRPr lang="ru-RU"/>
           </a:p>
@@ -922,7 +924,7 @@
           <a:p>
             <a:fld id="{1EA4F326-5F8D-6A4F-9B75-A3402553DF5F}" type="slidenum">
               <a:rPr lang="ru-RU" smtClean="0"/>
-              <a:t>8</a:t>
+              <a:t>9</a:t>
             </a:fld>
             <a:endParaRPr lang="ru-RU"/>
           </a:p>
@@ -1006,7 +1008,7 @@
           <a:p>
             <a:fld id="{1EA4F326-5F8D-6A4F-9B75-A3402553DF5F}" type="slidenum">
               <a:rPr lang="ru-RU" smtClean="0"/>
-              <a:t>9</a:t>
+              <a:t>10</a:t>
             </a:fld>
             <a:endParaRPr lang="ru-RU"/>
           </a:p>
@@ -1090,7 +1092,7 @@
           <a:p>
             <a:fld id="{1EA4F326-5F8D-6A4F-9B75-A3402553DF5F}" type="slidenum">
               <a:rPr lang="ru-RU" smtClean="0"/>
-              <a:t>10</a:t>
+              <a:t>11</a:t>
             </a:fld>
             <a:endParaRPr lang="ru-RU"/>
           </a:p>
@@ -1174,7 +1176,7 @@
           <a:p>
             <a:fld id="{1EA4F326-5F8D-6A4F-9B75-A3402553DF5F}" type="slidenum">
               <a:rPr lang="ru-RU" smtClean="0"/>
-              <a:t>11</a:t>
+              <a:t>12</a:t>
             </a:fld>
             <a:endParaRPr lang="ru-RU"/>
           </a:p>
@@ -1258,7 +1260,7 @@
           <a:p>
             <a:fld id="{1EA4F326-5F8D-6A4F-9B75-A3402553DF5F}" type="slidenum">
               <a:rPr lang="ru-RU" smtClean="0"/>
-              <a:t>12</a:t>
+              <a:t>13</a:t>
             </a:fld>
             <a:endParaRPr lang="ru-RU"/>
           </a:p>
@@ -1426,7 +1428,7 @@
           <a:p>
             <a:fld id="{44343DC6-30E4-4569-999A-C703F926F2AF}" type="datetimeFigureOut">
               <a:rPr lang="en-US" smtClean="0"/>
-              <a:t>5/4/2026</a:t>
+              <a:t>10/19/2026</a:t>
             </a:fld>
             <a:endParaRPr lang="en-US"/>
           </a:p>
@@ -1626,7 +1628,7 @@
           <a:p>
             <a:fld id="{44343DC6-30E4-4569-999A-C703F926F2AF}" type="datetimeFigureOut">
               <a:rPr lang="en-US" smtClean="0"/>
-              <a:t>5/4/2026</a:t>
+              <a:t>10/19/2026</a:t>
             </a:fld>
             <a:endParaRPr lang="en-US"/>
           </a:p>
@@ -1836,7 +1838,7 @@
           <a:p>
             <a:fld id="{44343DC6-30E4-4569-999A-C703F926F2AF}" type="datetimeFigureOut">
               <a:rPr lang="en-US" smtClean="0"/>
-              <a:t>5/4/2026</a:t>
+              <a:t>10/19/2026</a:t>
             </a:fld>
             <a:endParaRPr lang="en-US"/>
           </a:p>
@@ -2036,7 +2038,7 @@
           <a:p>
             <a:fld id="{44343DC6-30E4-4569-999A-C703F926F2AF}" type="datetimeFigureOut">
               <a:rPr lang="en-US" smtClean="0"/>
-              <a:t>5/4/2026</a:t>
+              <a:t>10/19/2026</a:t>
             </a:fld>
             <a:endParaRPr lang="en-US"/>
           </a:p>
@@ -2312,7 +2314,7 @@
           <a:p>
             <a:fld id="{44343DC6-30E4-4569-999A-C703F926F2AF}" type="datetimeFigureOut">
               <a:rPr lang="en-US" smtClean="0"/>
-              <a:t>5/4/2026</a:t>
+              <a:t>10/19/2026</a:t>
             </a:fld>
             <a:endParaRPr lang="en-US"/>
           </a:p>
@@ -2580,7 +2582,7 @@
           <a:p>
             <a:fld id="{44343DC6-30E4-4569-999A-C703F926F2AF}" type="datetimeFigureOut">
               <a:rPr lang="en-US" smtClean="0"/>
-              <a:t>5/4/2026</a:t>
+              <a:t>10/19/2026</a:t>
             </a:fld>
             <a:endParaRPr lang="en-US"/>
           </a:p>
@@ -2995,7 +2997,7 @@
           <a:p>
             <a:fld id="{44343DC6-30E4-4569-999A-C703F926F2AF}" type="datetimeFigureOut">
               <a:rPr lang="en-US" smtClean="0"/>
-              <a:t>5/4/2026</a:t>
+              <a:t>10/19/2026</a:t>
             </a:fld>
             <a:endParaRPr lang="en-US"/>
           </a:p>
@@ -3137,7 +3139,7 @@
           <a:p>
             <a:fld id="{44343DC6-30E4-4569-999A-C703F926F2AF}" type="datetimeFigureOut">
               <a:rPr lang="en-US" smtClean="0"/>
-              <a:t>5/4/2026</a:t>
+              <a:t>10/19/2026</a:t>
             </a:fld>
             <a:endParaRPr lang="en-US"/>
           </a:p>
@@ -3250,7 +3252,7 @@
           <a:p>
             <a:fld id="{44343DC6-30E4-4569-999A-C703F926F2AF}" type="datetimeFigureOut">
               <a:rPr lang="en-US" smtClean="0"/>
-              <a:t>5/4/2026</a:t>
+              <a:t>10/19/2026</a:t>
             </a:fld>
             <a:endParaRPr lang="en-US"/>
           </a:p>
@@ -3563,7 +3565,7 @@
           <a:p>
             <a:fld id="{44343DC6-30E4-4569-999A-C703F926F2AF}" type="datetimeFigureOut">
               <a:rPr lang="en-US" smtClean="0"/>
-              <a:t>5/4/2026</a:t>
+              <a:t>10/19/2026</a:t>
             </a:fld>
             <a:endParaRPr lang="en-US"/>
           </a:p>
@@ -3852,7 +3854,7 @@
           <a:p>
             <a:fld id="{44343DC6-30E4-4569-999A-C703F926F2AF}" type="datetimeFigureOut">
               <a:rPr lang="en-US" smtClean="0"/>
-              <a:t>5/4/2026</a:t>
+              <a:t>10/19/2026</a:t>
             </a:fld>
             <a:endParaRPr lang="en-US"/>
           </a:p>
@@ -4095,7 +4097,7 @@
           <a:p>
             <a:fld id="{44343DC6-30E4-4569-999A-C703F926F2AF}" type="datetimeFigureOut">
               <a:rPr lang="en-US" smtClean="0"/>
-              <a:t>5/4/2026</a:t>
+              <a:t>10/19/2026</a:t>
             </a:fld>
             <a:endParaRPr lang="en-US"/>
           </a:p>
@@ -4611,6 +4613,1331 @@
         </p:nvSpPr>
         <p:spPr>
           <a:xfrm>
+            <a:off x="226957" y="93605"/>
+            <a:ext cx="11802295" cy="933115"/>
+          </a:xfrm>
+        </p:spPr>
+        <p:txBody>
+          <a:bodyPr>
+            <a:normAutofit/>
+          </a:bodyPr>
+          <a:lstStyle/>
+          <a:p>
+            <a:pPr algn="ctr"/>
+            <a:r>
+              <a:rPr lang="ru-RU" sz="3200" b="1" dirty="0"/>
+              <a:t>Модель </a:t>
+            </a:r>
+            <a:r>
+              <a:rPr lang="en-US" sz="3200" b="1" dirty="0"/>
+              <a:t>Holt</a:t>
+            </a:r>
+            <a:r>
+              <a:rPr lang="ru-RU" sz="3200" b="1" dirty="0"/>
+              <a:t>-</a:t>
+            </a:r>
+            <a:r>
+              <a:rPr lang="en-US" sz="3200" b="1" dirty="0"/>
+              <a:t>Winters </a:t>
+            </a:r>
+            <a:r>
+              <a:rPr lang="ru-RU" sz="3200" b="1" dirty="0"/>
+              <a:t> - тройное экспоненциальное сглаживание</a:t>
+            </a:r>
+            <a:endParaRPr lang="ru-RU" sz="3600" b="1" dirty="0"/>
+          </a:p>
+        </p:txBody>
+      </p:sp>
+      <mc:AlternateContent xmlns:mc="http://schemas.openxmlformats.org/markup-compatibility/2006" xmlns:a14="http://schemas.microsoft.com/office/drawing/2010/main">
+        <mc:Choice Requires="a14">
+          <p:sp>
+            <p:nvSpPr>
+              <p:cNvPr id="3" name="Объект 2">
+                <a:extLst>
+                  <a:ext uri="{FF2B5EF4-FFF2-40B4-BE49-F238E27FC236}">
+                    <a16:creationId xmlns:a16="http://schemas.microsoft.com/office/drawing/2014/main" id="{9CFDC76D-90F0-4FD7-8BA6-954D6D2E6FFD}"/>
+                  </a:ext>
+                </a:extLst>
+              </p:cNvPr>
+              <p:cNvSpPr>
+                <a:spLocks noGrp="1"/>
+              </p:cNvSpPr>
+              <p:nvPr>
+                <p:ph idx="1"/>
+              </p:nvPr>
+            </p:nvSpPr>
+            <p:spPr>
+              <a:xfrm>
+                <a:off x="226957" y="817117"/>
+                <a:ext cx="11791949" cy="5502274"/>
+              </a:xfrm>
+            </p:spPr>
+            <p:txBody>
+              <a:bodyPr>
+                <a:normAutofit/>
+              </a:bodyPr>
+              <a:lstStyle/>
+              <a:p>
+                <a:pPr marL="0" indent="0">
+                  <a:buNone/>
+                </a:pPr>
+                <a:r>
+                  <a:rPr lang="ru-RU" sz="2200" dirty="0"/>
+                  <a:t>Пусть существуют быстрые изменения с известным периодом </a:t>
+                </a:r>
+                <a14:m>
+                  <m:oMath xmlns:m="http://schemas.openxmlformats.org/officeDocument/2006/math">
+                    <m:r>
+                      <a:rPr lang="en-US" sz="2200" b="0" i="1" dirty="0" smtClean="0">
+                        <a:latin typeface="Cambria Math" panose="02040503050406030204" pitchFamily="18" charset="0"/>
+                      </a:rPr>
+                      <m:t>𝑚</m:t>
+                    </m:r>
+                  </m:oMath>
+                </a14:m>
+                <a:r>
+                  <a:rPr lang="en-US" sz="2200" dirty="0"/>
+                  <a:t> </a:t>
+                </a:r>
+                <a:r>
+                  <a:rPr lang="ru-RU" sz="2200" dirty="0"/>
+                  <a:t>(сезонность). Тогда для точек одной фазы (удаленных на </a:t>
+                </a:r>
+                <a14:m>
+                  <m:oMath xmlns:m="http://schemas.openxmlformats.org/officeDocument/2006/math">
+                    <m:r>
+                      <a:rPr lang="en-US" sz="2200" b="0" i="1" dirty="0" smtClean="0">
+                        <a:latin typeface="Cambria Math" panose="02040503050406030204" pitchFamily="18" charset="0"/>
+                      </a:rPr>
+                      <m:t>𝑚</m:t>
+                    </m:r>
+                  </m:oMath>
+                </a14:m>
+                <a:r>
+                  <a:rPr lang="en-US" sz="2200" dirty="0"/>
+                  <a:t>) </a:t>
+                </a:r>
+                <a:r>
+                  <a:rPr lang="ru-RU" sz="2200" dirty="0"/>
+                  <a:t>введем компоненты сглаживания.</a:t>
+                </a:r>
+                <a:endParaRPr lang="en-US" sz="2200" dirty="0"/>
+              </a:p>
+              <a:p>
+                <a:pPr marL="0" indent="0">
+                  <a:buNone/>
+                </a:pPr>
+                <a14:m>
+                  <m:oMathPara xmlns:m="http://schemas.openxmlformats.org/officeDocument/2006/math">
+                    <m:oMathParaPr>
+                      <m:jc m:val="centerGroup"/>
+                    </m:oMathParaPr>
+                    <m:oMath xmlns:m="http://schemas.openxmlformats.org/officeDocument/2006/math">
+                      <m:d>
+                        <m:dPr>
+                          <m:begChr m:val="{"/>
+                          <m:endChr m:val=""/>
+                          <m:ctrlPr>
+                            <a:rPr lang="en-US" sz="2200" i="1" smtClean="0">
+                              <a:latin typeface="Cambria Math" panose="02040503050406030204" pitchFamily="18" charset="0"/>
+                            </a:rPr>
+                          </m:ctrlPr>
+                        </m:dPr>
+                        <m:e>
+                          <m:eqArr>
+                            <m:eqArrPr>
+                              <m:ctrlPr>
+                                <a:rPr lang="en-US" sz="2200" i="1" smtClean="0">
+                                  <a:latin typeface="Cambria Math" panose="02040503050406030204" pitchFamily="18" charset="0"/>
+                                </a:rPr>
+                              </m:ctrlPr>
+                            </m:eqArrPr>
+                            <m:e>
+                              <m:sSub>
+                                <m:sSubPr>
+                                  <m:ctrlPr>
+                                    <a:rPr lang="en-US" sz="2200" i="1">
+                                      <a:latin typeface="Cambria Math" panose="02040503050406030204" pitchFamily="18" charset="0"/>
+                                    </a:rPr>
+                                  </m:ctrlPr>
+                                </m:sSubPr>
+                                <m:e>
+                                  <m:acc>
+                                    <m:accPr>
+                                      <m:chr m:val="̂"/>
+                                      <m:ctrlPr>
+                                        <a:rPr lang="en-US" sz="2200" i="1">
+                                          <a:latin typeface="Cambria Math" panose="02040503050406030204" pitchFamily="18" charset="0"/>
+                                        </a:rPr>
+                                      </m:ctrlPr>
+                                    </m:accPr>
+                                    <m:e>
+                                      <m:r>
+                                        <a:rPr lang="en-US" sz="2200" i="1">
+                                          <a:latin typeface="Cambria Math" panose="02040503050406030204" pitchFamily="18" charset="0"/>
+                                        </a:rPr>
+                                        <m:t>𝑦</m:t>
+                                      </m:r>
+                                    </m:e>
+                                  </m:acc>
+                                </m:e>
+                                <m:sub>
+                                  <m:r>
+                                    <a:rPr lang="en-US" sz="2200" i="1">
+                                      <a:latin typeface="Cambria Math" panose="02040503050406030204" pitchFamily="18" charset="0"/>
+                                    </a:rPr>
+                                    <m:t>𝑛</m:t>
+                                  </m:r>
+                                  <m:r>
+                                    <a:rPr lang="en-US" sz="2200" i="1">
+                                      <a:latin typeface="Cambria Math" panose="02040503050406030204" pitchFamily="18" charset="0"/>
+                                    </a:rPr>
+                                    <m:t>+</m:t>
+                                  </m:r>
+                                  <m:r>
+                                    <a:rPr lang="en-US" sz="2200" b="0" i="1" smtClean="0">
+                                      <a:latin typeface="Cambria Math" panose="02040503050406030204" pitchFamily="18" charset="0"/>
+                                    </a:rPr>
+                                    <m:t>h</m:t>
+                                  </m:r>
+                                </m:sub>
+                              </m:sSub>
+                              <m:r>
+                                <a:rPr lang="en-US" sz="2200" i="1">
+                                  <a:latin typeface="Cambria Math" panose="02040503050406030204" pitchFamily="18" charset="0"/>
+                                </a:rPr>
+                                <m:t>=</m:t>
+                              </m:r>
+                              <m:sSub>
+                                <m:sSubPr>
+                                  <m:ctrlPr>
+                                    <a:rPr lang="en-US" sz="2200" i="1">
+                                      <a:latin typeface="Cambria Math" panose="02040503050406030204" pitchFamily="18" charset="0"/>
+                                    </a:rPr>
+                                  </m:ctrlPr>
+                                </m:sSubPr>
+                                <m:e>
+                                  <m:r>
+                                    <a:rPr lang="en-US" sz="2200" i="1">
+                                      <a:latin typeface="Cambria Math" panose="02040503050406030204" pitchFamily="18" charset="0"/>
+                                    </a:rPr>
+                                    <m:t>𝑙</m:t>
+                                  </m:r>
+                                </m:e>
+                                <m:sub>
+                                  <m:r>
+                                    <a:rPr lang="en-US" sz="2200" i="1">
+                                      <a:latin typeface="Cambria Math" panose="02040503050406030204" pitchFamily="18" charset="0"/>
+                                    </a:rPr>
+                                    <m:t>𝑛</m:t>
+                                  </m:r>
+                                </m:sub>
+                              </m:sSub>
+                              <m:r>
+                                <a:rPr lang="en-US" sz="2200" i="1">
+                                  <a:latin typeface="Cambria Math" panose="02040503050406030204" pitchFamily="18" charset="0"/>
+                                </a:rPr>
+                                <m:t>+</m:t>
+                              </m:r>
+                              <m:r>
+                                <a:rPr lang="en-US" sz="2200" b="0" i="1" smtClean="0">
+                                  <a:latin typeface="Cambria Math" panose="02040503050406030204" pitchFamily="18" charset="0"/>
+                                </a:rPr>
+                                <m:t>h</m:t>
+                              </m:r>
+                              <m:r>
+                                <a:rPr lang="en-US" sz="2200" b="0" i="1" smtClean="0">
+                                  <a:latin typeface="Cambria Math" panose="02040503050406030204" pitchFamily="18" charset="0"/>
+                                </a:rPr>
+                                <m:t>⋅</m:t>
+                              </m:r>
+                              <m:sSub>
+                                <m:sSubPr>
+                                  <m:ctrlPr>
+                                    <a:rPr lang="en-US" sz="2200" i="1">
+                                      <a:latin typeface="Cambria Math" panose="02040503050406030204" pitchFamily="18" charset="0"/>
+                                    </a:rPr>
+                                  </m:ctrlPr>
+                                </m:sSubPr>
+                                <m:e>
+                                  <m:r>
+                                    <a:rPr lang="en-US" sz="2200" i="1">
+                                      <a:latin typeface="Cambria Math" panose="02040503050406030204" pitchFamily="18" charset="0"/>
+                                    </a:rPr>
+                                    <m:t>𝑏</m:t>
+                                  </m:r>
+                                </m:e>
+                                <m:sub>
+                                  <m:r>
+                                    <a:rPr lang="en-US" sz="2200" i="1">
+                                      <a:latin typeface="Cambria Math" panose="02040503050406030204" pitchFamily="18" charset="0"/>
+                                    </a:rPr>
+                                    <m:t>𝑛</m:t>
+                                  </m:r>
+                                </m:sub>
+                              </m:sSub>
+                              <m:r>
+                                <a:rPr lang="ru-RU" sz="2200" b="0" i="1" smtClean="0">
+                                  <a:latin typeface="Cambria Math" panose="02040503050406030204" pitchFamily="18" charset="0"/>
+                                </a:rPr>
+                                <m:t>+</m:t>
+                              </m:r>
+                              <m:sSub>
+                                <m:sSubPr>
+                                  <m:ctrlPr>
+                                    <a:rPr lang="en-US" sz="2200" i="1">
+                                      <a:latin typeface="Cambria Math" panose="02040503050406030204" pitchFamily="18" charset="0"/>
+                                    </a:rPr>
+                                  </m:ctrlPr>
+                                </m:sSubPr>
+                                <m:e>
+                                  <m:r>
+                                    <a:rPr lang="en-US" sz="2200" i="1">
+                                      <a:latin typeface="Cambria Math" panose="02040503050406030204" pitchFamily="18" charset="0"/>
+                                    </a:rPr>
+                                    <m:t>𝑠</m:t>
+                                  </m:r>
+                                </m:e>
+                                <m:sub>
+                                  <m:r>
+                                    <a:rPr lang="en-US" sz="2200" i="1">
+                                      <a:latin typeface="Cambria Math" panose="02040503050406030204" pitchFamily="18" charset="0"/>
+                                    </a:rPr>
+                                    <m:t>𝑛</m:t>
+                                  </m:r>
+                                  <m:r>
+                                    <a:rPr lang="en-US" sz="2200" i="1">
+                                      <a:latin typeface="Cambria Math" panose="02040503050406030204" pitchFamily="18" charset="0"/>
+                                    </a:rPr>
+                                    <m:t>−</m:t>
+                                  </m:r>
+                                  <m:r>
+                                    <a:rPr lang="en-US" sz="2200" b="0" i="1" smtClean="0">
+                                      <a:latin typeface="Cambria Math" panose="02040503050406030204" pitchFamily="18" charset="0"/>
+                                    </a:rPr>
+                                    <m:t>𝑚</m:t>
+                                  </m:r>
+                                  <m:r>
+                                    <a:rPr lang="en-US" sz="2200" i="1">
+                                      <a:latin typeface="Cambria Math" panose="02040503050406030204" pitchFamily="18" charset="0"/>
+                                    </a:rPr>
+                                    <m:t>+</m:t>
+                                  </m:r>
+                                  <m:r>
+                                    <a:rPr lang="en-US" sz="2200" b="0" i="1" smtClean="0">
+                                      <a:latin typeface="Cambria Math" panose="02040503050406030204" pitchFamily="18" charset="0"/>
+                                    </a:rPr>
+                                    <m:t>∆</m:t>
+                                  </m:r>
+                                </m:sub>
+                              </m:sSub>
+                              <m:r>
+                                <a:rPr lang="en-US" sz="2200" i="1">
+                                  <a:latin typeface="Cambria Math" panose="02040503050406030204" pitchFamily="18" charset="0"/>
+                                </a:rPr>
+                                <m:t>;</m:t>
+                              </m:r>
+                              <m:r>
+                                <m:rPr>
+                                  <m:nor/>
+                                </m:rPr>
+                                <a:rPr lang="en-US" sz="2200" dirty="0"/>
+                                <m:t> </m:t>
+                              </m:r>
+                            </m:e>
+                            <m:e>
+                              <m:sSub>
+                                <m:sSubPr>
+                                  <m:ctrlPr>
+                                    <a:rPr lang="en-US" sz="2200" i="1">
+                                      <a:latin typeface="Cambria Math" panose="02040503050406030204" pitchFamily="18" charset="0"/>
+                                    </a:rPr>
+                                  </m:ctrlPr>
+                                </m:sSubPr>
+                                <m:e>
+                                  <m:r>
+                                    <a:rPr lang="en-US" sz="2200" i="1">
+                                      <a:latin typeface="Cambria Math" panose="02040503050406030204" pitchFamily="18" charset="0"/>
+                                    </a:rPr>
+                                    <m:t>𝑙</m:t>
+                                  </m:r>
+                                </m:e>
+                                <m:sub>
+                                  <m:r>
+                                    <a:rPr lang="en-US" sz="2200" i="1">
+                                      <a:latin typeface="Cambria Math" panose="02040503050406030204" pitchFamily="18" charset="0"/>
+                                    </a:rPr>
+                                    <m:t>𝑛</m:t>
+                                  </m:r>
+                                </m:sub>
+                              </m:sSub>
+                              <m:r>
+                                <a:rPr lang="en-US" sz="2200" i="1">
+                                  <a:latin typeface="Cambria Math" panose="02040503050406030204" pitchFamily="18" charset="0"/>
+                                </a:rPr>
+                                <m:t>=</m:t>
+                              </m:r>
+                              <m:r>
+                                <a:rPr lang="en-US" sz="2200" i="1">
+                                  <a:latin typeface="Cambria Math" panose="02040503050406030204" pitchFamily="18" charset="0"/>
+                                </a:rPr>
+                                <m:t>𝛼</m:t>
+                              </m:r>
+                              <m:sSub>
+                                <m:sSubPr>
+                                  <m:ctrlPr>
+                                    <a:rPr lang="en-US" sz="2200" i="1">
+                                      <a:latin typeface="Cambria Math" panose="02040503050406030204" pitchFamily="18" charset="0"/>
+                                    </a:rPr>
+                                  </m:ctrlPr>
+                                </m:sSubPr>
+                                <m:e>
+                                  <m:r>
+                                    <a:rPr lang="en-US" sz="2200" i="1">
+                                      <a:latin typeface="Cambria Math" panose="02040503050406030204" pitchFamily="18" charset="0"/>
+                                    </a:rPr>
+                                    <m:t>𝑦</m:t>
+                                  </m:r>
+                                </m:e>
+                                <m:sub>
+                                  <m:r>
+                                    <a:rPr lang="en-US" sz="2200" i="1">
+                                      <a:latin typeface="Cambria Math" panose="02040503050406030204" pitchFamily="18" charset="0"/>
+                                    </a:rPr>
+                                    <m:t>𝑛</m:t>
+                                  </m:r>
+                                </m:sub>
+                              </m:sSub>
+                              <m:r>
+                                <a:rPr lang="en-US" sz="2200" i="1">
+                                  <a:latin typeface="Cambria Math" panose="02040503050406030204" pitchFamily="18" charset="0"/>
+                                </a:rPr>
+                                <m:t>+</m:t>
+                              </m:r>
+                              <m:d>
+                                <m:dPr>
+                                  <m:ctrlPr>
+                                    <a:rPr lang="en-US" sz="2200" i="1">
+                                      <a:latin typeface="Cambria Math" panose="02040503050406030204" pitchFamily="18" charset="0"/>
+                                    </a:rPr>
+                                  </m:ctrlPr>
+                                </m:dPr>
+                                <m:e>
+                                  <m:r>
+                                    <a:rPr lang="en-US" sz="2200" i="1">
+                                      <a:latin typeface="Cambria Math" panose="02040503050406030204" pitchFamily="18" charset="0"/>
+                                    </a:rPr>
+                                    <m:t>1−</m:t>
+                                  </m:r>
+                                  <m:r>
+                                    <a:rPr lang="en-US" sz="2200" i="1">
+                                      <a:latin typeface="Cambria Math" panose="02040503050406030204" pitchFamily="18" charset="0"/>
+                                    </a:rPr>
+                                    <m:t>𝛼</m:t>
+                                  </m:r>
+                                </m:e>
+                              </m:d>
+                              <m:d>
+                                <m:dPr>
+                                  <m:ctrlPr>
+                                    <a:rPr lang="en-US" sz="2200" i="1">
+                                      <a:latin typeface="Cambria Math" panose="02040503050406030204" pitchFamily="18" charset="0"/>
+                                    </a:rPr>
+                                  </m:ctrlPr>
+                                </m:dPr>
+                                <m:e>
+                                  <m:sSub>
+                                    <m:sSubPr>
+                                      <m:ctrlPr>
+                                        <a:rPr lang="en-US" sz="2200" i="1">
+                                          <a:latin typeface="Cambria Math" panose="02040503050406030204" pitchFamily="18" charset="0"/>
+                                        </a:rPr>
+                                      </m:ctrlPr>
+                                    </m:sSubPr>
+                                    <m:e>
+                                      <m:r>
+                                        <a:rPr lang="en-US" sz="2200" i="1">
+                                          <a:latin typeface="Cambria Math" panose="02040503050406030204" pitchFamily="18" charset="0"/>
+                                        </a:rPr>
+                                        <m:t>𝑙</m:t>
+                                      </m:r>
+                                    </m:e>
+                                    <m:sub>
+                                      <m:r>
+                                        <a:rPr lang="en-US" sz="2200" i="1">
+                                          <a:latin typeface="Cambria Math" panose="02040503050406030204" pitchFamily="18" charset="0"/>
+                                        </a:rPr>
+                                        <m:t>𝑛</m:t>
+                                      </m:r>
+                                      <m:r>
+                                        <a:rPr lang="en-US" sz="2200" i="1">
+                                          <a:latin typeface="Cambria Math" panose="02040503050406030204" pitchFamily="18" charset="0"/>
+                                        </a:rPr>
+                                        <m:t>−1</m:t>
+                                      </m:r>
+                                    </m:sub>
+                                  </m:sSub>
+                                  <m:r>
+                                    <a:rPr lang="en-US" sz="2200" i="1">
+                                      <a:latin typeface="Cambria Math" panose="02040503050406030204" pitchFamily="18" charset="0"/>
+                                    </a:rPr>
+                                    <m:t>+</m:t>
+                                  </m:r>
+                                  <m:sSub>
+                                    <m:sSubPr>
+                                      <m:ctrlPr>
+                                        <a:rPr lang="en-US" sz="2200" i="1">
+                                          <a:latin typeface="Cambria Math" panose="02040503050406030204" pitchFamily="18" charset="0"/>
+                                        </a:rPr>
+                                      </m:ctrlPr>
+                                    </m:sSubPr>
+                                    <m:e>
+                                      <m:r>
+                                        <a:rPr lang="en-US" sz="2200" i="1">
+                                          <a:latin typeface="Cambria Math" panose="02040503050406030204" pitchFamily="18" charset="0"/>
+                                        </a:rPr>
+                                        <m:t>𝑏</m:t>
+                                      </m:r>
+                                    </m:e>
+                                    <m:sub>
+                                      <m:r>
+                                        <a:rPr lang="en-US" sz="2200" i="1">
+                                          <a:latin typeface="Cambria Math" panose="02040503050406030204" pitchFamily="18" charset="0"/>
+                                        </a:rPr>
+                                        <m:t>𝑛</m:t>
+                                      </m:r>
+                                      <m:r>
+                                        <a:rPr lang="en-US" sz="2200" i="1">
+                                          <a:latin typeface="Cambria Math" panose="02040503050406030204" pitchFamily="18" charset="0"/>
+                                        </a:rPr>
+                                        <m:t>−1</m:t>
+                                      </m:r>
+                                    </m:sub>
+                                  </m:sSub>
+                                </m:e>
+                              </m:d>
+                              <m:r>
+                                <a:rPr lang="ru-RU" sz="2200" b="0" i="1" smtClean="0">
+                                  <a:latin typeface="Cambria Math" panose="02040503050406030204" pitchFamily="18" charset="0"/>
+                                </a:rPr>
+                                <m:t>   (</m:t>
+                              </m:r>
+                              <m:r>
+                                <a:rPr lang="en-US" sz="2200" i="1">
+                                  <a:latin typeface="Cambria Math" panose="02040503050406030204" pitchFamily="18" charset="0"/>
+                                </a:rPr>
+                                <m:t>𝑙𝑒𝑣𝑒𝑙</m:t>
+                              </m:r>
+                              <m:r>
+                                <a:rPr lang="ru-RU" sz="2200" b="0" i="1" smtClean="0">
+                                  <a:latin typeface="Cambria Math" panose="02040503050406030204" pitchFamily="18" charset="0"/>
+                                </a:rPr>
+                                <m:t>)</m:t>
+                              </m:r>
+                            </m:e>
+                            <m:e>
+                              <m:sSub>
+                                <m:sSubPr>
+                                  <m:ctrlPr>
+                                    <a:rPr lang="en-US" sz="2200" i="1">
+                                      <a:latin typeface="Cambria Math" panose="02040503050406030204" pitchFamily="18" charset="0"/>
+                                    </a:rPr>
+                                  </m:ctrlPr>
+                                </m:sSubPr>
+                                <m:e>
+                                  <m:r>
+                                    <a:rPr lang="en-US" sz="2200" i="1">
+                                      <a:latin typeface="Cambria Math" panose="02040503050406030204" pitchFamily="18" charset="0"/>
+                                    </a:rPr>
+                                    <m:t>𝑏</m:t>
+                                  </m:r>
+                                </m:e>
+                                <m:sub>
+                                  <m:r>
+                                    <a:rPr lang="en-US" sz="2200" i="1">
+                                      <a:latin typeface="Cambria Math" panose="02040503050406030204" pitchFamily="18" charset="0"/>
+                                    </a:rPr>
+                                    <m:t>𝑛</m:t>
+                                  </m:r>
+                                </m:sub>
+                              </m:sSub>
+                              <m:r>
+                                <a:rPr lang="en-US" sz="2200" i="1">
+                                  <a:latin typeface="Cambria Math" panose="02040503050406030204" pitchFamily="18" charset="0"/>
+                                </a:rPr>
+                                <m:t>=</m:t>
+                              </m:r>
+                              <m:r>
+                                <a:rPr lang="en-US" sz="2200" i="1">
+                                  <a:latin typeface="Cambria Math" panose="02040503050406030204" pitchFamily="18" charset="0"/>
+                                </a:rPr>
+                                <m:t>𝛽</m:t>
+                              </m:r>
+                              <m:d>
+                                <m:dPr>
+                                  <m:ctrlPr>
+                                    <a:rPr lang="en-US" sz="2200" i="1">
+                                      <a:latin typeface="Cambria Math" panose="02040503050406030204" pitchFamily="18" charset="0"/>
+                                    </a:rPr>
+                                  </m:ctrlPr>
+                                </m:dPr>
+                                <m:e>
+                                  <m:sSub>
+                                    <m:sSubPr>
+                                      <m:ctrlPr>
+                                        <a:rPr lang="en-US" sz="2200" i="1">
+                                          <a:latin typeface="Cambria Math" panose="02040503050406030204" pitchFamily="18" charset="0"/>
+                                        </a:rPr>
+                                      </m:ctrlPr>
+                                    </m:sSubPr>
+                                    <m:e>
+                                      <m:r>
+                                        <a:rPr lang="en-US" sz="2200" i="1">
+                                          <a:latin typeface="Cambria Math" panose="02040503050406030204" pitchFamily="18" charset="0"/>
+                                        </a:rPr>
+                                        <m:t>𝑙</m:t>
+                                      </m:r>
+                                    </m:e>
+                                    <m:sub>
+                                      <m:r>
+                                        <a:rPr lang="en-US" sz="2200" i="1">
+                                          <a:latin typeface="Cambria Math" panose="02040503050406030204" pitchFamily="18" charset="0"/>
+                                        </a:rPr>
+                                        <m:t>𝑛</m:t>
+                                      </m:r>
+                                    </m:sub>
+                                  </m:sSub>
+                                  <m:r>
+                                    <a:rPr lang="en-US" sz="2200" i="1">
+                                      <a:latin typeface="Cambria Math" panose="02040503050406030204" pitchFamily="18" charset="0"/>
+                                    </a:rPr>
+                                    <m:t>−</m:t>
+                                  </m:r>
+                                  <m:sSub>
+                                    <m:sSubPr>
+                                      <m:ctrlPr>
+                                        <a:rPr lang="en-US" sz="2200" i="1">
+                                          <a:latin typeface="Cambria Math" panose="02040503050406030204" pitchFamily="18" charset="0"/>
+                                        </a:rPr>
+                                      </m:ctrlPr>
+                                    </m:sSubPr>
+                                    <m:e>
+                                      <m:r>
+                                        <a:rPr lang="en-US" sz="2200" i="1">
+                                          <a:latin typeface="Cambria Math" panose="02040503050406030204" pitchFamily="18" charset="0"/>
+                                        </a:rPr>
+                                        <m:t>𝑙</m:t>
+                                      </m:r>
+                                    </m:e>
+                                    <m:sub>
+                                      <m:r>
+                                        <a:rPr lang="en-US" sz="2200" i="1">
+                                          <a:latin typeface="Cambria Math" panose="02040503050406030204" pitchFamily="18" charset="0"/>
+                                        </a:rPr>
+                                        <m:t>𝑛</m:t>
+                                      </m:r>
+                                      <m:r>
+                                        <a:rPr lang="en-US" sz="2200" i="1">
+                                          <a:latin typeface="Cambria Math" panose="02040503050406030204" pitchFamily="18" charset="0"/>
+                                        </a:rPr>
+                                        <m:t>−1</m:t>
+                                      </m:r>
+                                    </m:sub>
+                                  </m:sSub>
+                                </m:e>
+                              </m:d>
+                              <m:r>
+                                <a:rPr lang="en-US" sz="2200" i="1">
+                                  <a:latin typeface="Cambria Math" panose="02040503050406030204" pitchFamily="18" charset="0"/>
+                                </a:rPr>
+                                <m:t>+</m:t>
+                              </m:r>
+                              <m:d>
+                                <m:dPr>
+                                  <m:ctrlPr>
+                                    <a:rPr lang="en-US" sz="2200" i="1">
+                                      <a:latin typeface="Cambria Math" panose="02040503050406030204" pitchFamily="18" charset="0"/>
+                                    </a:rPr>
+                                  </m:ctrlPr>
+                                </m:dPr>
+                                <m:e>
+                                  <m:r>
+                                    <a:rPr lang="en-US" sz="2200" i="1">
+                                      <a:latin typeface="Cambria Math" panose="02040503050406030204" pitchFamily="18" charset="0"/>
+                                    </a:rPr>
+                                    <m:t>1−</m:t>
+                                  </m:r>
+                                  <m:r>
+                                    <a:rPr lang="en-US" sz="2200" i="1">
+                                      <a:latin typeface="Cambria Math" panose="02040503050406030204" pitchFamily="18" charset="0"/>
+                                    </a:rPr>
+                                    <m:t>𝛽</m:t>
+                                  </m:r>
+                                </m:e>
+                              </m:d>
+                              <m:sSub>
+                                <m:sSubPr>
+                                  <m:ctrlPr>
+                                    <a:rPr lang="en-US" sz="2200" i="1">
+                                      <a:latin typeface="Cambria Math" panose="02040503050406030204" pitchFamily="18" charset="0"/>
+                                    </a:rPr>
+                                  </m:ctrlPr>
+                                </m:sSubPr>
+                                <m:e>
+                                  <m:r>
+                                    <a:rPr lang="en-US" sz="2200" i="1">
+                                      <a:latin typeface="Cambria Math" panose="02040503050406030204" pitchFamily="18" charset="0"/>
+                                    </a:rPr>
+                                    <m:t>𝑏</m:t>
+                                  </m:r>
+                                </m:e>
+                                <m:sub>
+                                  <m:r>
+                                    <a:rPr lang="en-US" sz="2200" i="1">
+                                      <a:latin typeface="Cambria Math" panose="02040503050406030204" pitchFamily="18" charset="0"/>
+                                    </a:rPr>
+                                    <m:t>𝑛</m:t>
+                                  </m:r>
+                                  <m:r>
+                                    <a:rPr lang="en-US" sz="2200" i="1">
+                                      <a:latin typeface="Cambria Math" panose="02040503050406030204" pitchFamily="18" charset="0"/>
+                                    </a:rPr>
+                                    <m:t>−1</m:t>
+                                  </m:r>
+                                </m:sub>
+                              </m:sSub>
+                              <m:r>
+                                <a:rPr lang="ru-RU" sz="2200" b="0" i="1" smtClean="0">
+                                  <a:latin typeface="Cambria Math" panose="02040503050406030204" pitchFamily="18" charset="0"/>
+                                </a:rPr>
+                                <m:t>  (</m:t>
+                              </m:r>
+                              <m:r>
+                                <a:rPr lang="en-US" sz="2200" i="1">
+                                  <a:latin typeface="Cambria Math" panose="02040503050406030204" pitchFamily="18" charset="0"/>
+                                </a:rPr>
+                                <m:t>𝑡𝑟𝑒𝑛𝑑</m:t>
+                              </m:r>
+                              <m:r>
+                                <a:rPr lang="ru-RU" sz="2200" b="0" i="1" smtClean="0">
+                                  <a:latin typeface="Cambria Math" panose="02040503050406030204" pitchFamily="18" charset="0"/>
+                                </a:rPr>
+                                <m:t>)</m:t>
+                              </m:r>
+                            </m:e>
+                            <m:e>
+                              <m:sSub>
+                                <m:sSubPr>
+                                  <m:ctrlPr>
+                                    <a:rPr lang="en-US" sz="2200" b="0" i="1" smtClean="0">
+                                      <a:latin typeface="Cambria Math" panose="02040503050406030204" pitchFamily="18" charset="0"/>
+                                    </a:rPr>
+                                  </m:ctrlPr>
+                                </m:sSubPr>
+                                <m:e>
+                                  <m:r>
+                                    <a:rPr lang="en-US" sz="2200" b="0" i="1" smtClean="0">
+                                      <a:latin typeface="Cambria Math" panose="02040503050406030204" pitchFamily="18" charset="0"/>
+                                    </a:rPr>
+                                    <m:t>𝑠</m:t>
+                                  </m:r>
+                                </m:e>
+                                <m:sub>
+                                  <m:r>
+                                    <a:rPr lang="en-US" sz="2200" b="0" i="1" smtClean="0">
+                                      <a:latin typeface="Cambria Math" panose="02040503050406030204" pitchFamily="18" charset="0"/>
+                                    </a:rPr>
+                                    <m:t>𝑛</m:t>
+                                  </m:r>
+                                </m:sub>
+                              </m:sSub>
+                              <m:r>
+                                <a:rPr lang="en-US" sz="2200" b="0" i="1" smtClean="0">
+                                  <a:latin typeface="Cambria Math" panose="02040503050406030204" pitchFamily="18" charset="0"/>
+                                </a:rPr>
+                                <m:t>=</m:t>
+                              </m:r>
+                              <m:r>
+                                <a:rPr lang="en-US" sz="2200" b="0" i="1" smtClean="0">
+                                  <a:latin typeface="Cambria Math" panose="02040503050406030204" pitchFamily="18" charset="0"/>
+                                </a:rPr>
+                                <m:t>𝛾</m:t>
+                              </m:r>
+                              <m:d>
+                                <m:dPr>
+                                  <m:ctrlPr>
+                                    <a:rPr lang="en-US" sz="2200" b="0" i="1" smtClean="0">
+                                      <a:latin typeface="Cambria Math" panose="02040503050406030204" pitchFamily="18" charset="0"/>
+                                    </a:rPr>
+                                  </m:ctrlPr>
+                                </m:dPr>
+                                <m:e>
+                                  <m:sSub>
+                                    <m:sSubPr>
+                                      <m:ctrlPr>
+                                        <a:rPr lang="en-US" sz="2200" b="0" i="1" smtClean="0">
+                                          <a:latin typeface="Cambria Math" panose="02040503050406030204" pitchFamily="18" charset="0"/>
+                                        </a:rPr>
+                                      </m:ctrlPr>
+                                    </m:sSubPr>
+                                    <m:e>
+                                      <m:r>
+                                        <a:rPr lang="en-US" sz="2200" b="0" i="1" smtClean="0">
+                                          <a:latin typeface="Cambria Math" panose="02040503050406030204" pitchFamily="18" charset="0"/>
+                                        </a:rPr>
+                                        <m:t>𝑦</m:t>
+                                      </m:r>
+                                    </m:e>
+                                    <m:sub>
+                                      <m:r>
+                                        <a:rPr lang="en-US" sz="2200" b="0" i="1" smtClean="0">
+                                          <a:latin typeface="Cambria Math" panose="02040503050406030204" pitchFamily="18" charset="0"/>
+                                        </a:rPr>
+                                        <m:t>𝑛</m:t>
+                                      </m:r>
+                                    </m:sub>
+                                  </m:sSub>
+                                  <m:r>
+                                    <a:rPr lang="en-US" sz="2200" b="0" i="1" smtClean="0">
+                                      <a:latin typeface="Cambria Math" panose="02040503050406030204" pitchFamily="18" charset="0"/>
+                                    </a:rPr>
+                                    <m:t>−</m:t>
+                                  </m:r>
+                                  <m:sSub>
+                                    <m:sSubPr>
+                                      <m:ctrlPr>
+                                        <a:rPr lang="en-US" sz="2200" b="0" i="1" smtClean="0">
+                                          <a:latin typeface="Cambria Math" panose="02040503050406030204" pitchFamily="18" charset="0"/>
+                                        </a:rPr>
+                                      </m:ctrlPr>
+                                    </m:sSubPr>
+                                    <m:e>
+                                      <m:r>
+                                        <a:rPr lang="en-US" sz="2200" b="0" i="1" smtClean="0">
+                                          <a:latin typeface="Cambria Math" panose="02040503050406030204" pitchFamily="18" charset="0"/>
+                                        </a:rPr>
+                                        <m:t>𝑙</m:t>
+                                      </m:r>
+                                    </m:e>
+                                    <m:sub>
+                                      <m:r>
+                                        <a:rPr lang="en-US" sz="2200" b="0" i="1" smtClean="0">
+                                          <a:latin typeface="Cambria Math" panose="02040503050406030204" pitchFamily="18" charset="0"/>
+                                        </a:rPr>
+                                        <m:t>𝑛</m:t>
+                                      </m:r>
+                                    </m:sub>
+                                  </m:sSub>
+                                </m:e>
+                              </m:d>
+                              <m:r>
+                                <a:rPr lang="en-US" sz="2200" b="0" i="1" smtClean="0">
+                                  <a:latin typeface="Cambria Math" panose="02040503050406030204" pitchFamily="18" charset="0"/>
+                                </a:rPr>
+                                <m:t>+</m:t>
+                              </m:r>
+                              <m:d>
+                                <m:dPr>
+                                  <m:ctrlPr>
+                                    <a:rPr lang="en-US" sz="2200" b="0" i="1" smtClean="0">
+                                      <a:latin typeface="Cambria Math" panose="02040503050406030204" pitchFamily="18" charset="0"/>
+                                    </a:rPr>
+                                  </m:ctrlPr>
+                                </m:dPr>
+                                <m:e>
+                                  <m:r>
+                                    <a:rPr lang="en-US" sz="2200" b="0" i="1" smtClean="0">
+                                      <a:latin typeface="Cambria Math" panose="02040503050406030204" pitchFamily="18" charset="0"/>
+                                    </a:rPr>
+                                    <m:t>1−</m:t>
+                                  </m:r>
+                                  <m:r>
+                                    <a:rPr lang="en-US" sz="2200" b="0" i="1" smtClean="0">
+                                      <a:latin typeface="Cambria Math" panose="02040503050406030204" pitchFamily="18" charset="0"/>
+                                    </a:rPr>
+                                    <m:t>𝛾</m:t>
+                                  </m:r>
+                                </m:e>
+                              </m:d>
+                              <m:sSub>
+                                <m:sSubPr>
+                                  <m:ctrlPr>
+                                    <a:rPr lang="en-US" sz="2200" b="0" i="1" smtClean="0">
+                                      <a:latin typeface="Cambria Math" panose="02040503050406030204" pitchFamily="18" charset="0"/>
+                                    </a:rPr>
+                                  </m:ctrlPr>
+                                </m:sSubPr>
+                                <m:e>
+                                  <m:r>
+                                    <a:rPr lang="en-US" sz="2200" b="0" i="1" smtClean="0">
+                                      <a:latin typeface="Cambria Math" panose="02040503050406030204" pitchFamily="18" charset="0"/>
+                                    </a:rPr>
+                                    <m:t>𝑠</m:t>
+                                  </m:r>
+                                </m:e>
+                                <m:sub>
+                                  <m:r>
+                                    <a:rPr lang="en-US" sz="2200" b="0" i="1" smtClean="0">
+                                      <a:latin typeface="Cambria Math" panose="02040503050406030204" pitchFamily="18" charset="0"/>
+                                    </a:rPr>
+                                    <m:t>𝑛</m:t>
+                                  </m:r>
+                                  <m:r>
+                                    <a:rPr lang="en-US" sz="2200" b="0" i="1" smtClean="0">
+                                      <a:latin typeface="Cambria Math" panose="02040503050406030204" pitchFamily="18" charset="0"/>
+                                    </a:rPr>
+                                    <m:t>−</m:t>
+                                  </m:r>
+                                  <m:r>
+                                    <a:rPr lang="en-US" sz="2200" b="0" i="1" smtClean="0">
+                                      <a:latin typeface="Cambria Math" panose="02040503050406030204" pitchFamily="18" charset="0"/>
+                                    </a:rPr>
+                                    <m:t>𝑚</m:t>
+                                  </m:r>
+                                </m:sub>
+                              </m:sSub>
+                            </m:e>
+                          </m:eqArr>
+                        </m:e>
+                      </m:d>
+                    </m:oMath>
+                  </m:oMathPara>
+                </a14:m>
+                <a:endParaRPr lang="en-US" sz="2200" dirty="0"/>
+              </a:p>
+              <a:p>
+                <a:pPr marL="0" indent="0">
+                  <a:buNone/>
+                </a:pPr>
+                <a:r>
+                  <a:rPr lang="ru-RU" sz="2000" dirty="0"/>
+                  <a:t>где </a:t>
+                </a:r>
+                <a14:m>
+                  <m:oMath xmlns:m="http://schemas.openxmlformats.org/officeDocument/2006/math">
+                    <m:r>
+                      <a:rPr lang="en-US" sz="2000" i="1">
+                        <a:latin typeface="Cambria Math" panose="02040503050406030204" pitchFamily="18" charset="0"/>
+                      </a:rPr>
+                      <m:t>𝛾</m:t>
+                    </m:r>
+                  </m:oMath>
+                </a14:m>
+                <a:r>
+                  <a:rPr lang="ru-RU" sz="2000" dirty="0"/>
+                  <a:t> – коэффициент сезонного сглаживания,</a:t>
+                </a:r>
+                <a:r>
+                  <a:rPr lang="en-US" sz="2000" dirty="0"/>
+                  <a:t> </a:t>
+                </a:r>
+                <a14:m>
+                  <m:oMath xmlns:m="http://schemas.openxmlformats.org/officeDocument/2006/math">
+                    <m:r>
+                      <a:rPr lang="en-US" sz="2000" i="1">
+                        <a:latin typeface="Cambria Math" panose="02040503050406030204" pitchFamily="18" charset="0"/>
+                      </a:rPr>
+                      <m:t>𝑚</m:t>
+                    </m:r>
+                  </m:oMath>
+                </a14:m>
+                <a:r>
+                  <a:rPr lang="en-US" sz="2000" dirty="0"/>
+                  <a:t> – </a:t>
+                </a:r>
+                <a:r>
+                  <a:rPr lang="ru-RU" sz="2000" dirty="0"/>
+                  <a:t>период сезонность,</a:t>
+                </a:r>
+                <a14:m>
+                  <m:oMath xmlns:m="http://schemas.openxmlformats.org/officeDocument/2006/math">
+                    <m:r>
+                      <a:rPr lang="en-US" sz="2000" i="1">
+                        <a:latin typeface="Cambria Math" panose="02040503050406030204" pitchFamily="18" charset="0"/>
+                      </a:rPr>
+                      <m:t>∆</m:t>
+                    </m:r>
+                    <m:r>
+                      <a:rPr lang="en-US" sz="2000" b="0" i="1" smtClean="0">
+                        <a:latin typeface="Cambria Math" panose="02040503050406030204" pitchFamily="18" charset="0"/>
+                      </a:rPr>
+                      <m:t>=</m:t>
+                    </m:r>
+                    <m:r>
+                      <a:rPr lang="en-US" sz="2000" i="1">
+                        <a:latin typeface="Cambria Math" panose="02040503050406030204" pitchFamily="18" charset="0"/>
+                      </a:rPr>
+                      <m:t>𝑑</m:t>
+                    </m:r>
+                    <m:r>
+                      <a:rPr lang="en-US" sz="2000" i="1">
+                        <a:latin typeface="Cambria Math" panose="02040503050406030204" pitchFamily="18" charset="0"/>
+                      </a:rPr>
+                      <m:t> </m:t>
+                    </m:r>
+                    <m:r>
+                      <a:rPr lang="en-US" sz="2000" i="1">
+                        <a:latin typeface="Cambria Math" panose="02040503050406030204" pitchFamily="18" charset="0"/>
+                      </a:rPr>
+                      <m:t>𝑚𝑜𝑑</m:t>
+                    </m:r>
+                    <m:r>
+                      <a:rPr lang="en-US" sz="2000" i="1">
+                        <a:latin typeface="Cambria Math" panose="02040503050406030204" pitchFamily="18" charset="0"/>
+                      </a:rPr>
+                      <m:t> </m:t>
+                    </m:r>
+                    <m:r>
+                      <a:rPr lang="en-US" sz="2000" i="1">
+                        <a:latin typeface="Cambria Math" panose="02040503050406030204" pitchFamily="18" charset="0"/>
+                      </a:rPr>
+                      <m:t>𝑚</m:t>
+                    </m:r>
+                  </m:oMath>
+                </a14:m>
+                <a:r>
+                  <a:rPr lang="ru-RU" sz="2000" dirty="0"/>
+                  <a:t> – смещение относительного последнего полного сезона в данных</a:t>
+                </a:r>
+                <a:endParaRPr lang="en-US" sz="2000" dirty="0"/>
+              </a:p>
+              <a:p>
+                <a:pPr marL="0" indent="0">
+                  <a:buNone/>
+                </a:pPr>
+                <a:endParaRPr lang="en-US" sz="2000" i="1" dirty="0">
+                  <a:latin typeface="Cambria Math" panose="02040503050406030204" pitchFamily="18" charset="0"/>
+                </a:endParaRPr>
+              </a:p>
+              <a:p>
+                <a:pPr marL="0" indent="0">
+                  <a:buNone/>
+                </a:pPr>
+                <a:endParaRPr lang="ru-RU" sz="2000" dirty="0"/>
+              </a:p>
+            </p:txBody>
+          </p:sp>
+        </mc:Choice>
+        <mc:Fallback xmlns="">
+          <p:sp>
+            <p:nvSpPr>
+              <p:cNvPr id="3" name="Объект 2">
+                <a:extLst>
+                  <a:ext uri="{FF2B5EF4-FFF2-40B4-BE49-F238E27FC236}">
+                    <a16:creationId xmlns:a16="http://schemas.microsoft.com/office/drawing/2014/main" id="{9CFDC76D-90F0-4FD7-8BA6-954D6D2E6FFD}"/>
+                  </a:ext>
+                </a:extLst>
+              </p:cNvPr>
+              <p:cNvSpPr>
+                <a:spLocks noGrp="1" noRot="1" noChangeAspect="1" noMove="1" noResize="1" noEditPoints="1" noAdjustHandles="1" noChangeArrowheads="1" noChangeShapeType="1" noTextEdit="1"/>
+              </p:cNvSpPr>
+              <p:nvPr>
+                <p:ph idx="1"/>
+              </p:nvPr>
+            </p:nvSpPr>
+            <p:spPr>
+              <a:xfrm>
+                <a:off x="226957" y="817117"/>
+                <a:ext cx="11791949" cy="5502274"/>
+              </a:xfrm>
+              <a:blipFill>
+                <a:blip r:embed="rId3"/>
+                <a:stretch>
+                  <a:fillRect l="-672" t="-1329"/>
+                </a:stretch>
+              </a:blipFill>
+            </p:spPr>
+            <p:txBody>
+              <a:bodyPr/>
+              <a:lstStyle/>
+              <a:p>
+                <a:r>
+                  <a:rPr lang="ru-RU">
+                    <a:noFill/>
+                  </a:rPr>
+                  <a:t> </a:t>
+                </a:r>
+              </a:p>
+            </p:txBody>
+          </p:sp>
+        </mc:Fallback>
+      </mc:AlternateContent>
+      <p:sp>
+        <p:nvSpPr>
+          <p:cNvPr id="5" name="Прямоугольник 4"/>
+          <p:cNvSpPr/>
+          <p:nvPr/>
+        </p:nvSpPr>
+        <p:spPr>
+          <a:xfrm>
+            <a:off x="504825" y="6488668"/>
+            <a:ext cx="9077325" cy="338554"/>
+          </a:xfrm>
+          <a:prstGeom prst="rect">
+            <a:avLst/>
+          </a:prstGeom>
+        </p:spPr>
+        <p:txBody>
+          <a:bodyPr wrap="square">
+            <a:spAutoFit/>
+          </a:bodyPr>
+          <a:lstStyle/>
+          <a:p>
+            <a:r>
+              <a:rPr lang="ru-RU" sz="1600" dirty="0"/>
+              <a:t>https://education.yandex.ru/handbook/ml/article/analitika-vremennyh-ryadov</a:t>
+            </a:r>
+          </a:p>
+        </p:txBody>
+      </p:sp>
+      <p:sp>
+        <p:nvSpPr>
+          <p:cNvPr id="6" name="Прямоугольник 5"/>
+          <p:cNvSpPr/>
+          <p:nvPr/>
+        </p:nvSpPr>
+        <p:spPr>
+          <a:xfrm>
+            <a:off x="7331127" y="6488668"/>
+            <a:ext cx="3727624" cy="338554"/>
+          </a:xfrm>
+          <a:prstGeom prst="rect">
+            <a:avLst/>
+          </a:prstGeom>
+        </p:spPr>
+        <p:txBody>
+          <a:bodyPr wrap="none">
+            <a:spAutoFit/>
+          </a:bodyPr>
+          <a:lstStyle/>
+          <a:p>
+            <a:r>
+              <a:rPr lang="ru-RU" sz="1600" dirty="0"/>
+              <a:t>https://otexts.com/fpp2/holt-winters.html</a:t>
+            </a:r>
+          </a:p>
+        </p:txBody>
+      </p:sp>
+      <p:sp>
+        <p:nvSpPr>
+          <p:cNvPr id="10" name="Прямоугольник 9"/>
+          <p:cNvSpPr/>
+          <p:nvPr/>
+        </p:nvSpPr>
+        <p:spPr>
+          <a:xfrm>
+            <a:off x="346840" y="3826401"/>
+            <a:ext cx="5666554" cy="2800767"/>
+          </a:xfrm>
+          <a:prstGeom prst="rect">
+            <a:avLst/>
+          </a:prstGeom>
+        </p:spPr>
+        <p:txBody>
+          <a:bodyPr wrap="square">
+            <a:spAutoFit/>
+          </a:bodyPr>
+          <a:lstStyle/>
+          <a:p>
+            <a:pPr algn="just"/>
+            <a:r>
+              <a:rPr lang="ru-RU" sz="2000" dirty="0"/>
+              <a:t>В модели Сезонная компонента – это текущее значение без уровня и предыдущая сезонная компонента</a:t>
+            </a:r>
+          </a:p>
+          <a:p>
+            <a:pPr marL="285750" indent="-285750" algn="just">
+              <a:buFont typeface="Arial" panose="020B0604020202020204" pitchFamily="34" charset="0"/>
+              <a:buChar char="•"/>
+            </a:pPr>
+            <a:r>
+              <a:rPr lang="ru-RU" sz="2000" dirty="0"/>
+              <a:t>Сезон – сравнительно быстрые изменения с одинаковым периодом!</a:t>
+            </a:r>
+            <a:endParaRPr lang="en-US" sz="2000" dirty="0"/>
+          </a:p>
+          <a:p>
+            <a:pPr marL="342900" indent="-342900" algn="just">
+              <a:buFont typeface="Arial" panose="020B0604020202020204" pitchFamily="34" charset="0"/>
+              <a:buChar char="•"/>
+            </a:pPr>
+            <a:r>
+              <a:rPr lang="ru-RU" sz="2000" dirty="0"/>
+              <a:t>Могут быть также мультипликативная и затухающая модели тренда и сезонности.</a:t>
+            </a:r>
+          </a:p>
+          <a:p>
+            <a:pPr algn="just"/>
+            <a:r>
+              <a:rPr lang="ru-RU" sz="2000" dirty="0"/>
+              <a:t>	напр. спрос на </a:t>
+            </a:r>
+            <a:r>
+              <a:rPr lang="ru-RU" sz="2000" dirty="0" err="1"/>
+              <a:t>электроэенерги</a:t>
+            </a:r>
+            <a:r>
+              <a:rPr lang="ru-RU" sz="2000" dirty="0"/>
+              <a:t>.</a:t>
+            </a:r>
+          </a:p>
+          <a:p>
+            <a:pPr algn="just"/>
+            <a:endParaRPr lang="ru-RU" sz="1600" b="0" i="1" dirty="0">
+              <a:solidFill>
+                <a:schemeClr val="tx1"/>
+              </a:solidFill>
+              <a:effectLst/>
+              <a:latin typeface="__YSText_8fb396"/>
+            </a:endParaRPr>
+          </a:p>
+        </p:txBody>
+      </p:sp>
+      <p:pic>
+        <p:nvPicPr>
+          <p:cNvPr id="14" name="Picture 2" descr="image.png">
+            <a:extLst>
+              <a:ext uri="{FF2B5EF4-FFF2-40B4-BE49-F238E27FC236}">
+                <a16:creationId xmlns:a16="http://schemas.microsoft.com/office/drawing/2014/main" id="{02A694C1-DCCF-4974-B57F-8BFBFBCC1DE6}"/>
+              </a:ext>
+            </a:extLst>
+          </p:cNvPr>
+          <p:cNvPicPr>
+            <a:picLocks noChangeAspect="1" noChangeArrowheads="1"/>
+          </p:cNvPicPr>
+          <p:nvPr/>
+        </p:nvPicPr>
+        <p:blipFill rotWithShape="1">
+          <a:blip r:embed="rId4">
+            <a:extLst>
+              <a:ext uri="{28A0092B-C50C-407E-A947-70E740481C1C}">
+                <a14:useLocalDpi xmlns:a14="http://schemas.microsoft.com/office/drawing/2010/main" val="0"/>
+              </a:ext>
+            </a:extLst>
+          </a:blip>
+          <a:srcRect l="8887" t="8532" r="8717" b="6336"/>
+          <a:stretch/>
+        </p:blipFill>
+        <p:spPr bwMode="auto">
+          <a:xfrm>
+            <a:off x="6133277" y="3416074"/>
+            <a:ext cx="5734050" cy="2962275"/>
+          </a:xfrm>
+          <a:prstGeom prst="rect">
+            <a:avLst/>
+          </a:prstGeom>
+          <a:noFill/>
+          <a:extLst>
+            <a:ext uri="{909E8E84-426E-40DD-AFC4-6F175D3DCCD1}">
+              <a14:hiddenFill xmlns:a14="http://schemas.microsoft.com/office/drawing/2010/main">
+                <a:solidFill>
+                  <a:srgbClr val="FFFFFF"/>
+                </a:solidFill>
+              </a14:hiddenFill>
+            </a:ext>
+          </a:extLst>
+        </p:spPr>
+      </p:pic>
+      <p:pic>
+        <p:nvPicPr>
+          <p:cNvPr id="8" name="Picture 2" descr="image.png">
+            <a:extLst>
+              <a:ext uri="{FF2B5EF4-FFF2-40B4-BE49-F238E27FC236}">
+                <a16:creationId xmlns:a16="http://schemas.microsoft.com/office/drawing/2014/main" id="{02A694C1-DCCF-4974-B57F-8BFBFBCC1DE6}"/>
+              </a:ext>
+            </a:extLst>
+          </p:cNvPr>
+          <p:cNvPicPr>
+            <a:picLocks noChangeAspect="1" noChangeArrowheads="1"/>
+          </p:cNvPicPr>
+          <p:nvPr/>
+        </p:nvPicPr>
+        <p:blipFill rotWithShape="1">
+          <a:blip r:embed="rId4">
+            <a:extLst>
+              <a:ext uri="{28A0092B-C50C-407E-A947-70E740481C1C}">
+                <a14:useLocalDpi xmlns:a14="http://schemas.microsoft.com/office/drawing/2010/main" val="0"/>
+              </a:ext>
+            </a:extLst>
+          </a:blip>
+          <a:srcRect l="78976" t="11915" r="10074" b="77683"/>
+          <a:stretch/>
+        </p:blipFill>
+        <p:spPr bwMode="auto">
+          <a:xfrm>
+            <a:off x="9284584" y="3416073"/>
+            <a:ext cx="2734322" cy="1298801"/>
+          </a:xfrm>
+          <a:prstGeom prst="rect">
+            <a:avLst/>
+          </a:prstGeom>
+          <a:noFill/>
+          <a:extLst>
+            <a:ext uri="{909E8E84-426E-40DD-AFC4-6F175D3DCCD1}">
+              <a14:hiddenFill xmlns:a14="http://schemas.microsoft.com/office/drawing/2010/main">
+                <a:solidFill>
+                  <a:srgbClr val="FFFFFF"/>
+                </a:solidFill>
+              </a14:hiddenFill>
+            </a:ext>
+          </a:extLst>
+        </p:spPr>
+      </p:pic>
+    </p:spTree>
+    <p:extLst>
+      <p:ext uri="{BB962C8B-B14F-4D97-AF65-F5344CB8AC3E}">
+        <p14:creationId xmlns:p14="http://schemas.microsoft.com/office/powerpoint/2010/main" val="1301338103"/>
+      </p:ext>
+    </p:extLst>
+  </p:cSld>
+  <p:clrMapOvr>
+    <a:masterClrMapping/>
+  </p:clrMapOvr>
+  <p:timing>
+    <p:tnLst>
+      <p:par>
+        <p:cTn id="1" dur="indefinite" restart="never" nodeType="tmRoot"/>
+      </p:par>
+    </p:tnLst>
+  </p:timing>
+</p:sld>
+</file>
+
+<file path=ppt/slides/slide11.xml><?xml version="1.0" encoding="utf-8"?>
+<p:sld xmlns:a="http://schemas.openxmlformats.org/drawingml/2006/main" xmlns:r="http://schemas.openxmlformats.org/officeDocument/2006/relationships" xmlns:p="http://schemas.openxmlformats.org/presentationml/2006/main">
+  <p:cSld>
+    <p:spTree>
+      <p:nvGrpSpPr>
+        <p:cNvPr id="1" name=""/>
+        <p:cNvGrpSpPr/>
+        <p:nvPr/>
+      </p:nvGrpSpPr>
+      <p:grpSpPr>
+        <a:xfrm>
+          <a:off x="0" y="0"/>
+          <a:ext cx="0" cy="0"/>
+          <a:chOff x="0" y="0"/>
+          <a:chExt cx="0" cy="0"/>
+        </a:xfrm>
+      </p:grpSpPr>
+      <p:sp>
+        <p:nvSpPr>
+          <p:cNvPr id="2" name="Заголовок 1">
+            <a:extLst>
+              <a:ext uri="{FF2B5EF4-FFF2-40B4-BE49-F238E27FC236}">
+                <a16:creationId xmlns:a16="http://schemas.microsoft.com/office/drawing/2014/main" id="{3FB6B433-AB20-4BD4-8E77-84B856A5D608}"/>
+              </a:ext>
+            </a:extLst>
+          </p:cNvPr>
+          <p:cNvSpPr>
+            <a:spLocks noGrp="1"/>
+          </p:cNvSpPr>
+          <p:nvPr>
+            <p:ph type="title"/>
+          </p:nvPr>
+        </p:nvSpPr>
+        <p:spPr>
+          <a:xfrm>
             <a:off x="226957" y="93606"/>
             <a:ext cx="11802295" cy="757854"/>
           </a:xfrm>
@@ -4852,7 +6179,7 @@
 </p:sld>
 </file>
 
-<file path=ppt/slides/slide11.xml><?xml version="1.0" encoding="utf-8"?>
+<file path=ppt/slides/slide12.xml><?xml version="1.0" encoding="utf-8"?>
 <p:sld xmlns:a="http://schemas.openxmlformats.org/drawingml/2006/main" xmlns:r="http://schemas.openxmlformats.org/officeDocument/2006/relationships" xmlns:p="http://schemas.openxmlformats.org/presentationml/2006/main">
   <p:cSld>
     <p:spTree>
@@ -6188,7 +7515,7 @@
 </p:sld>
 </file>
 
-<file path=ppt/slides/slide12.xml><?xml version="1.0" encoding="utf-8"?>
+<file path=ppt/slides/slide13.xml><?xml version="1.0" encoding="utf-8"?>
 <p:sld xmlns:a="http://schemas.openxmlformats.org/drawingml/2006/main" xmlns:r="http://schemas.openxmlformats.org/officeDocument/2006/relationships" xmlns:p="http://schemas.openxmlformats.org/presentationml/2006/main">
   <p:cSld>
     <p:spTree>
@@ -6504,7 +7831,7 @@
 </p:sld>
 </file>
 
-<file path=ppt/slides/slide13.xml><?xml version="1.0" encoding="utf-8"?>
+<file path=ppt/slides/slide14.xml><?xml version="1.0" encoding="utf-8"?>
 <p:sld xmlns:a="http://schemas.openxmlformats.org/drawingml/2006/main" xmlns:r="http://schemas.openxmlformats.org/officeDocument/2006/relationships" xmlns:p="http://schemas.openxmlformats.org/presentationml/2006/main">
   <p:cSld>
     <p:spTree>
@@ -7160,7 +8487,7 @@
 </p:sld>
 </file>
 
-<file path=ppt/slides/slide14.xml><?xml version="1.0" encoding="utf-8"?>
+<file path=ppt/slides/slide15.xml><?xml version="1.0" encoding="utf-8"?>
 <p:sld xmlns:a="http://schemas.openxmlformats.org/drawingml/2006/main" xmlns:r="http://schemas.openxmlformats.org/officeDocument/2006/relationships" xmlns:p="http://schemas.openxmlformats.org/presentationml/2006/main">
   <p:cSld>
     <p:spTree>
@@ -7575,7 +8902,7 @@
 </p:sld>
 </file>
 
-<file path=ppt/slides/slide15.xml><?xml version="1.0" encoding="utf-8"?>
+<file path=ppt/slides/slide16.xml><?xml version="1.0" encoding="utf-8"?>
 <p:sld xmlns:a="http://schemas.openxmlformats.org/drawingml/2006/main" xmlns:r="http://schemas.openxmlformats.org/officeDocument/2006/relationships" xmlns:p="http://schemas.openxmlformats.org/presentationml/2006/main">
   <p:cSld>
     <p:spTree>
@@ -8777,7 +10104,7 @@
 </p:sld>
 </file>
 
-<file path=ppt/slides/slide16.xml><?xml version="1.0" encoding="utf-8"?>
+<file path=ppt/slides/slide17.xml><?xml version="1.0" encoding="utf-8"?>
 <p:sld xmlns:a="http://schemas.openxmlformats.org/drawingml/2006/main" xmlns:r="http://schemas.openxmlformats.org/officeDocument/2006/relationships" xmlns:p="http://schemas.openxmlformats.org/presentationml/2006/main">
   <p:cSld>
     <p:spTree>
@@ -9002,7 +10329,7 @@
 </p:sld>
 </file>
 
-<file path=ppt/slides/slide17.xml><?xml version="1.0" encoding="utf-8"?>
+<file path=ppt/slides/slide18.xml><?xml version="1.0" encoding="utf-8"?>
 <p:sld xmlns:a="http://schemas.openxmlformats.org/drawingml/2006/main" xmlns:r="http://schemas.openxmlformats.org/officeDocument/2006/relationships" xmlns:p="http://schemas.openxmlformats.org/presentationml/2006/main">
   <p:cSld>
     <p:spTree>
@@ -10475,7 +11802,7 @@
 </p:sld>
 </file>
 
-<file path=ppt/slides/slide18.xml><?xml version="1.0" encoding="utf-8"?>
+<file path=ppt/slides/slide19.xml><?xml version="1.0" encoding="utf-8"?>
 <p:sld xmlns:a="http://schemas.openxmlformats.org/drawingml/2006/main" xmlns:r="http://schemas.openxmlformats.org/officeDocument/2006/relationships" xmlns:p="http://schemas.openxmlformats.org/presentationml/2006/main">
   <p:cSld>
     <p:spTree>
@@ -11338,8 +12665,449 @@
 </p:sld>
 </file>
 
-<file path=ppt/slides/slide19.xml><?xml version="1.0" encoding="utf-8"?>
+<file path=ppt/slides/slide2.xml><?xml version="1.0" encoding="utf-8"?>
 <p:sld xmlns:a="http://schemas.openxmlformats.org/drawingml/2006/main" xmlns:r="http://schemas.openxmlformats.org/officeDocument/2006/relationships" xmlns:p="http://schemas.openxmlformats.org/presentationml/2006/main">
+  <p:cSld>
+    <p:spTree>
+      <p:nvGrpSpPr>
+        <p:cNvPr id="1" name=""/>
+        <p:cNvGrpSpPr/>
+        <p:nvPr/>
+      </p:nvGrpSpPr>
+      <p:grpSpPr>
+        <a:xfrm>
+          <a:off x="0" y="0"/>
+          <a:ext cx="0" cy="0"/>
+          <a:chOff x="0" y="0"/>
+          <a:chExt cx="0" cy="0"/>
+        </a:xfrm>
+      </p:grpSpPr>
+      <p:sp>
+        <p:nvSpPr>
+          <p:cNvPr id="2" name="Заголовок 1"/>
+          <p:cNvSpPr>
+            <a:spLocks noGrp="1"/>
+          </p:cNvSpPr>
+          <p:nvPr>
+            <p:ph type="title"/>
+          </p:nvPr>
+        </p:nvSpPr>
+        <p:spPr>
+          <a:xfrm>
+            <a:off x="320040" y="258445"/>
+            <a:ext cx="11033760" cy="587375"/>
+          </a:xfrm>
+        </p:spPr>
+        <p:txBody>
+          <a:bodyPr>
+            <a:noAutofit/>
+          </a:bodyPr>
+          <a:lstStyle/>
+          <a:p>
+            <a:pPr algn="ctr"/>
+            <a:r>
+              <a:rPr lang="ru-RU" b="1" dirty="0"/>
+              <a:t>Статистические методы</a:t>
+            </a:r>
+          </a:p>
+        </p:txBody>
+      </p:sp>
+      <p:sp>
+        <p:nvSpPr>
+          <p:cNvPr id="3" name="Объект 2"/>
+          <p:cNvSpPr>
+            <a:spLocks noGrp="1"/>
+          </p:cNvSpPr>
+          <p:nvPr>
+            <p:ph idx="1"/>
+          </p:nvPr>
+        </p:nvSpPr>
+        <p:spPr>
+          <a:xfrm>
+            <a:off x="6197962" y="998715"/>
+            <a:ext cx="5545455" cy="1855471"/>
+          </a:xfrm>
+        </p:spPr>
+        <p:txBody>
+          <a:bodyPr>
+            <a:normAutofit/>
+          </a:bodyPr>
+          <a:lstStyle/>
+          <a:p>
+            <a:r>
+              <a:rPr lang="ru-RU" sz="2000" dirty="0"/>
+              <a:t>Точность на коротких горизонтах предсказания</a:t>
+            </a:r>
+          </a:p>
+          <a:p>
+            <a:r>
+              <a:rPr lang="ru-RU" sz="2000" dirty="0"/>
+              <a:t>Высокая скорость обучения и переобучения</a:t>
+            </a:r>
+          </a:p>
+          <a:p>
+            <a:r>
+              <a:rPr lang="ru-RU" sz="2000" dirty="0"/>
+              <a:t>Высокая интерпретируемость</a:t>
+            </a:r>
+            <a:endParaRPr lang="en-US" sz="2000" dirty="0"/>
+          </a:p>
+          <a:p>
+            <a:r>
+              <a:rPr lang="ru-RU" sz="2000" dirty="0"/>
+              <a:t>Важно соответствие данных модели </a:t>
+            </a:r>
+          </a:p>
+          <a:p>
+            <a:endParaRPr lang="ru-RU" sz="2000" dirty="0"/>
+          </a:p>
+        </p:txBody>
+      </p:sp>
+      <p:sp>
+        <p:nvSpPr>
+          <p:cNvPr id="5" name="Объект 2"/>
+          <p:cNvSpPr txBox="1">
+            <a:spLocks/>
+          </p:cNvSpPr>
+          <p:nvPr/>
+        </p:nvSpPr>
+        <p:spPr>
+          <a:xfrm>
+            <a:off x="6197962" y="2708929"/>
+            <a:ext cx="6174105" cy="2076450"/>
+          </a:xfrm>
+          <a:prstGeom prst="rect">
+            <a:avLst/>
+          </a:prstGeom>
+        </p:spPr>
+        <p:txBody>
+          <a:bodyPr vert="horz" lIns="91440" tIns="45720" rIns="91440" bIns="45720" rtlCol="0">
+            <a:normAutofit/>
+          </a:bodyPr>
+          <a:lstStyle>
+            <a:lvl1pPr marL="228600" indent="-228600" algn="l" defTabSz="914400" rtl="0" eaLnBrk="1" latinLnBrk="0" hangingPunct="1">
+              <a:lnSpc>
+                <a:spcPct val="90000"/>
+              </a:lnSpc>
+              <a:spcBef>
+                <a:spcPts val="1000"/>
+              </a:spcBef>
+              <a:buFont typeface="Arial" panose="020B0604020202020204" pitchFamily="34" charset="0"/>
+              <a:buChar char="•"/>
+              <a:defRPr sz="2800" kern="1200">
+                <a:solidFill>
+                  <a:schemeClr val="tx1"/>
+                </a:solidFill>
+                <a:latin typeface="+mn-lt"/>
+                <a:ea typeface="+mn-ea"/>
+                <a:cs typeface="+mn-cs"/>
+              </a:defRPr>
+            </a:lvl1pPr>
+            <a:lvl2pPr marL="685800" indent="-228600" algn="l" defTabSz="914400" rtl="0" eaLnBrk="1" latinLnBrk="0" hangingPunct="1">
+              <a:lnSpc>
+                <a:spcPct val="90000"/>
+              </a:lnSpc>
+              <a:spcBef>
+                <a:spcPts val="500"/>
+              </a:spcBef>
+              <a:buFont typeface="Arial" panose="020B0604020202020204" pitchFamily="34" charset="0"/>
+              <a:buChar char="•"/>
+              <a:defRPr sz="2400" kern="1200">
+                <a:solidFill>
+                  <a:schemeClr val="tx1"/>
+                </a:solidFill>
+                <a:latin typeface="+mn-lt"/>
+                <a:ea typeface="+mn-ea"/>
+                <a:cs typeface="+mn-cs"/>
+              </a:defRPr>
+            </a:lvl2pPr>
+            <a:lvl3pPr marL="1143000" indent="-228600" algn="l" defTabSz="914400" rtl="0" eaLnBrk="1" latinLnBrk="0" hangingPunct="1">
+              <a:lnSpc>
+                <a:spcPct val="90000"/>
+              </a:lnSpc>
+              <a:spcBef>
+                <a:spcPts val="500"/>
+              </a:spcBef>
+              <a:buFont typeface="Arial" panose="020B0604020202020204" pitchFamily="34" charset="0"/>
+              <a:buChar char="•"/>
+              <a:defRPr sz="2000" kern="1200">
+                <a:solidFill>
+                  <a:schemeClr val="tx1"/>
+                </a:solidFill>
+                <a:latin typeface="+mn-lt"/>
+                <a:ea typeface="+mn-ea"/>
+                <a:cs typeface="+mn-cs"/>
+              </a:defRPr>
+            </a:lvl3pPr>
+            <a:lvl4pPr marL="1600200" indent="-228600" algn="l" defTabSz="914400" rtl="0" eaLnBrk="1" latinLnBrk="0" hangingPunct="1">
+              <a:lnSpc>
+                <a:spcPct val="90000"/>
+              </a:lnSpc>
+              <a:spcBef>
+                <a:spcPts val="500"/>
+              </a:spcBef>
+              <a:buFont typeface="Arial" panose="020B0604020202020204" pitchFamily="34" charset="0"/>
+              <a:buChar char="•"/>
+              <a:defRPr sz="1800" kern="1200">
+                <a:solidFill>
+                  <a:schemeClr val="tx1"/>
+                </a:solidFill>
+                <a:latin typeface="+mn-lt"/>
+                <a:ea typeface="+mn-ea"/>
+                <a:cs typeface="+mn-cs"/>
+              </a:defRPr>
+            </a:lvl4pPr>
+            <a:lvl5pPr marL="2057400" indent="-228600" algn="l" defTabSz="914400" rtl="0" eaLnBrk="1" latinLnBrk="0" hangingPunct="1">
+              <a:lnSpc>
+                <a:spcPct val="90000"/>
+              </a:lnSpc>
+              <a:spcBef>
+                <a:spcPts val="500"/>
+              </a:spcBef>
+              <a:buFont typeface="Arial" panose="020B0604020202020204" pitchFamily="34" charset="0"/>
+              <a:buChar char="•"/>
+              <a:defRPr sz="1800" kern="1200">
+                <a:solidFill>
+                  <a:schemeClr val="tx1"/>
+                </a:solidFill>
+                <a:latin typeface="+mn-lt"/>
+                <a:ea typeface="+mn-ea"/>
+                <a:cs typeface="+mn-cs"/>
+              </a:defRPr>
+            </a:lvl5pPr>
+            <a:lvl6pPr marL="2514600" indent="-228600" algn="l" defTabSz="914400" rtl="0" eaLnBrk="1" latinLnBrk="0" hangingPunct="1">
+              <a:lnSpc>
+                <a:spcPct val="90000"/>
+              </a:lnSpc>
+              <a:spcBef>
+                <a:spcPts val="500"/>
+              </a:spcBef>
+              <a:buFont typeface="Arial" panose="020B0604020202020204" pitchFamily="34" charset="0"/>
+              <a:buChar char="•"/>
+              <a:defRPr sz="1800" kern="1200">
+                <a:solidFill>
+                  <a:schemeClr val="tx1"/>
+                </a:solidFill>
+                <a:latin typeface="+mn-lt"/>
+                <a:ea typeface="+mn-ea"/>
+                <a:cs typeface="+mn-cs"/>
+              </a:defRPr>
+            </a:lvl6pPr>
+            <a:lvl7pPr marL="2971800" indent="-228600" algn="l" defTabSz="914400" rtl="0" eaLnBrk="1" latinLnBrk="0" hangingPunct="1">
+              <a:lnSpc>
+                <a:spcPct val="90000"/>
+              </a:lnSpc>
+              <a:spcBef>
+                <a:spcPts val="500"/>
+              </a:spcBef>
+              <a:buFont typeface="Arial" panose="020B0604020202020204" pitchFamily="34" charset="0"/>
+              <a:buChar char="•"/>
+              <a:defRPr sz="1800" kern="1200">
+                <a:solidFill>
+                  <a:schemeClr val="tx1"/>
+                </a:solidFill>
+                <a:latin typeface="+mn-lt"/>
+                <a:ea typeface="+mn-ea"/>
+                <a:cs typeface="+mn-cs"/>
+              </a:defRPr>
+            </a:lvl7pPr>
+            <a:lvl8pPr marL="3429000" indent="-228600" algn="l" defTabSz="914400" rtl="0" eaLnBrk="1" latinLnBrk="0" hangingPunct="1">
+              <a:lnSpc>
+                <a:spcPct val="90000"/>
+              </a:lnSpc>
+              <a:spcBef>
+                <a:spcPts val="500"/>
+              </a:spcBef>
+              <a:buFont typeface="Arial" panose="020B0604020202020204" pitchFamily="34" charset="0"/>
+              <a:buChar char="•"/>
+              <a:defRPr sz="1800" kern="1200">
+                <a:solidFill>
+                  <a:schemeClr val="tx1"/>
+                </a:solidFill>
+                <a:latin typeface="+mn-lt"/>
+                <a:ea typeface="+mn-ea"/>
+                <a:cs typeface="+mn-cs"/>
+              </a:defRPr>
+            </a:lvl8pPr>
+            <a:lvl9pPr marL="3886200" indent="-228600" algn="l" defTabSz="914400" rtl="0" eaLnBrk="1" latinLnBrk="0" hangingPunct="1">
+              <a:lnSpc>
+                <a:spcPct val="90000"/>
+              </a:lnSpc>
+              <a:spcBef>
+                <a:spcPts val="500"/>
+              </a:spcBef>
+              <a:buFont typeface="Arial" panose="020B0604020202020204" pitchFamily="34" charset="0"/>
+              <a:buChar char="•"/>
+              <a:defRPr sz="1800" kern="1200">
+                <a:solidFill>
+                  <a:schemeClr val="tx1"/>
+                </a:solidFill>
+                <a:latin typeface="+mn-lt"/>
+                <a:ea typeface="+mn-ea"/>
+                <a:cs typeface="+mn-cs"/>
+              </a:defRPr>
+            </a:lvl9pPr>
+          </a:lstStyle>
+          <a:p>
+            <a:r>
+              <a:rPr lang="ru-RU" sz="2000" dirty="0"/>
+              <a:t>Требуется значительная предобработка данных</a:t>
+            </a:r>
+          </a:p>
+          <a:p>
+            <a:r>
+              <a:rPr lang="ru-RU" sz="2000" dirty="0"/>
+              <a:t>Очень важна настройка модели</a:t>
+            </a:r>
+          </a:p>
+          <a:p>
+            <a:r>
+              <a:rPr lang="ru-RU" sz="2000" dirty="0"/>
+              <a:t>Чувствительность к новизне, выбросам, пропускам и другим нерегулярностям данных</a:t>
+            </a:r>
+          </a:p>
+          <a:p>
+            <a:r>
+              <a:rPr lang="ru-RU" sz="2000" dirty="0"/>
+              <a:t> Частое обновление модели в процессе работы</a:t>
+            </a:r>
+          </a:p>
+          <a:p>
+            <a:endParaRPr lang="ru-RU" sz="2000" dirty="0"/>
+          </a:p>
+          <a:p>
+            <a:endParaRPr lang="ru-RU" sz="2000" dirty="0"/>
+          </a:p>
+        </p:txBody>
+      </p:sp>
+      <p:pic>
+        <p:nvPicPr>
+          <p:cNvPr id="6" name="Рисунок 5"/>
+          <p:cNvPicPr>
+            <a:picLocks noChangeAspect="1"/>
+          </p:cNvPicPr>
+          <p:nvPr/>
+        </p:nvPicPr>
+        <p:blipFill>
+          <a:blip r:embed="rId2" cstate="hqprint">
+            <a:extLst>
+              <a:ext uri="{28A0092B-C50C-407E-A947-70E740481C1C}">
+                <a14:useLocalDpi xmlns:a14="http://schemas.microsoft.com/office/drawing/2010/main" val="0"/>
+              </a:ext>
+            </a:extLst>
+          </a:blip>
+          <a:stretch>
+            <a:fillRect/>
+          </a:stretch>
+        </p:blipFill>
+        <p:spPr>
+          <a:xfrm>
+            <a:off x="320040" y="1189102"/>
+            <a:ext cx="5705475" cy="2845308"/>
+          </a:xfrm>
+          <a:prstGeom prst="rect">
+            <a:avLst/>
+          </a:prstGeom>
+        </p:spPr>
+      </p:pic>
+      <p:pic>
+        <p:nvPicPr>
+          <p:cNvPr id="4" name="Рисунок 3"/>
+          <p:cNvPicPr>
+            <a:picLocks noChangeAspect="1"/>
+          </p:cNvPicPr>
+          <p:nvPr/>
+        </p:nvPicPr>
+        <p:blipFill>
+          <a:blip r:embed="rId3"/>
+          <a:stretch>
+            <a:fillRect/>
+          </a:stretch>
+        </p:blipFill>
+        <p:spPr>
+          <a:xfrm>
+            <a:off x="4228370" y="4521982"/>
+            <a:ext cx="3594289" cy="1966686"/>
+          </a:xfrm>
+          <a:prstGeom prst="rect">
+            <a:avLst/>
+          </a:prstGeom>
+        </p:spPr>
+      </p:pic>
+      <p:sp>
+        <p:nvSpPr>
+          <p:cNvPr id="10" name="Прямоугольник 9"/>
+          <p:cNvSpPr/>
+          <p:nvPr/>
+        </p:nvSpPr>
+        <p:spPr>
+          <a:xfrm>
+            <a:off x="3383377" y="6488668"/>
+            <a:ext cx="5629170" cy="369332"/>
+          </a:xfrm>
+          <a:prstGeom prst="rect">
+            <a:avLst/>
+          </a:prstGeom>
+        </p:spPr>
+        <p:txBody>
+          <a:bodyPr wrap="none">
+            <a:spAutoFit/>
+          </a:bodyPr>
+          <a:lstStyle/>
+          <a:p>
+            <a:r>
+              <a:rPr lang="ru-RU" dirty="0"/>
+              <a:t>https://otexts.com/fpppy/08-exponential-smoothing.html</a:t>
+            </a:r>
+          </a:p>
+        </p:txBody>
+      </p:sp>
+      <p:pic>
+        <p:nvPicPr>
+          <p:cNvPr id="11" name="Рисунок 10"/>
+          <p:cNvPicPr>
+            <a:picLocks noChangeAspect="1"/>
+          </p:cNvPicPr>
+          <p:nvPr/>
+        </p:nvPicPr>
+        <p:blipFill>
+          <a:blip r:embed="rId4"/>
+          <a:stretch>
+            <a:fillRect/>
+          </a:stretch>
+        </p:blipFill>
+        <p:spPr>
+          <a:xfrm>
+            <a:off x="205285" y="4561243"/>
+            <a:ext cx="3626486" cy="1871861"/>
+          </a:xfrm>
+          <a:prstGeom prst="rect">
+            <a:avLst/>
+          </a:prstGeom>
+        </p:spPr>
+      </p:pic>
+    </p:spTree>
+    <p:extLst>
+      <p:ext uri="{BB962C8B-B14F-4D97-AF65-F5344CB8AC3E}">
+        <p14:creationId xmlns:p14="http://schemas.microsoft.com/office/powerpoint/2010/main" val="46648713"/>
+      </p:ext>
+    </p:extLst>
+  </p:cSld>
+  <p:clrMapOvr>
+    <a:masterClrMapping/>
+  </p:clrMapOvr>
+  <p:timing>
+    <p:tnLst>
+      <p:par>
+        <p:cTn id="1" dur="indefinite" restart="never" nodeType="tmRoot"/>
+      </p:par>
+    </p:tnLst>
+  </p:timing>
+</p:sld>
+</file>
+
+<file path=ppt/slides/slide20.xml><?xml version="1.0" encoding="utf-8"?>
+<p:sld xmlns:a="http://schemas.openxmlformats.org/drawingml/2006/main" xmlns:r="http://schemas.openxmlformats.org/officeDocument/2006/relationships" xmlns:p="http://schemas.openxmlformats.org/presentationml/2006/main" show="0">
   <p:cSld>
     <p:spTree>
       <p:nvGrpSpPr>
@@ -11491,30 +13259,6 @@
           </a:p>
         </p:txBody>
       </p:sp>
-      <p:pic>
-        <p:nvPicPr>
-          <p:cNvPr id="5" name="Рисунок 4"/>
-          <p:cNvPicPr>
-            <a:picLocks noChangeAspect="1"/>
-          </p:cNvPicPr>
-          <p:nvPr/>
-        </p:nvPicPr>
-        <p:blipFill>
-          <a:blip r:embed="rId2"/>
-          <a:stretch>
-            <a:fillRect/>
-          </a:stretch>
-        </p:blipFill>
-        <p:spPr>
-          <a:xfrm>
-            <a:off x="1121412" y="3612119"/>
-            <a:ext cx="9781970" cy="2876549"/>
-          </a:xfrm>
-          <a:prstGeom prst="rect">
-            <a:avLst/>
-          </a:prstGeom>
-        </p:spPr>
-      </p:pic>
       <p:sp>
         <p:nvSpPr>
           <p:cNvPr id="6" name="TextBox 5"/>
@@ -11554,6 +13298,14 @@
   <p:clrMapOvr>
     <a:masterClrMapping/>
   </p:clrMapOvr>
+  <mc:AlternateContent xmlns:mc="http://schemas.openxmlformats.org/markup-compatibility/2006">
+    <mc:Choice xmlns:p14="http://schemas.microsoft.com/office/powerpoint/2010/main" Requires="p14">
+      <p:transition spd="slow" p14:dur="2000"/>
+    </mc:Choice>
+    <mc:Fallback>
+      <p:transition spd="slow"/>
+    </mc:Fallback>
+  </mc:AlternateContent>
   <p:timing>
     <p:tnLst>
       <p:par>
@@ -11564,897 +13316,7 @@
 </p:sld>
 </file>
 
-<file path=ppt/slides/slide2.xml><?xml version="1.0" encoding="utf-8"?>
-<p:sld xmlns:a="http://schemas.openxmlformats.org/drawingml/2006/main" xmlns:r="http://schemas.openxmlformats.org/officeDocument/2006/relationships" xmlns:p="http://schemas.openxmlformats.org/presentationml/2006/main">
-  <p:cSld>
-    <p:spTree>
-      <p:nvGrpSpPr>
-        <p:cNvPr id="1" name=""/>
-        <p:cNvGrpSpPr/>
-        <p:nvPr/>
-      </p:nvGrpSpPr>
-      <p:grpSpPr>
-        <a:xfrm>
-          <a:off x="0" y="0"/>
-          <a:ext cx="0" cy="0"/>
-          <a:chOff x="0" y="0"/>
-          <a:chExt cx="0" cy="0"/>
-        </a:xfrm>
-      </p:grpSpPr>
-      <p:sp>
-        <p:nvSpPr>
-          <p:cNvPr id="2" name="Заголовок 1">
-            <a:extLst>
-              <a:ext uri="{FF2B5EF4-FFF2-40B4-BE49-F238E27FC236}">
-                <a16:creationId xmlns:a16="http://schemas.microsoft.com/office/drawing/2014/main" id="{79B0BEDB-9774-4E17-9A6B-DBCF6A1F528F}"/>
-              </a:ext>
-            </a:extLst>
-          </p:cNvPr>
-          <p:cNvSpPr>
-            <a:spLocks noGrp="1"/>
-          </p:cNvSpPr>
-          <p:nvPr>
-            <p:ph type="title"/>
-          </p:nvPr>
-        </p:nvSpPr>
-        <p:spPr>
-          <a:xfrm>
-            <a:off x="1576070" y="197786"/>
-            <a:ext cx="9849485" cy="1325563"/>
-          </a:xfrm>
-        </p:spPr>
-        <p:txBody>
-          <a:bodyPr>
-            <a:normAutofit/>
-          </a:bodyPr>
-          <a:lstStyle/>
-          <a:p>
-            <a:r>
-              <a:rPr lang="en-US" b="1" dirty="0" smtClean="0"/>
-              <a:t>TS-</a:t>
-            </a:r>
-            <a:r>
-              <a:rPr lang="ru-RU" b="1" dirty="0" smtClean="0"/>
-              <a:t>Модели </a:t>
-            </a:r>
-            <a:r>
-              <a:rPr lang="ru-RU" b="1" dirty="0"/>
-              <a:t>временных рядов</a:t>
-            </a:r>
-            <a:endParaRPr lang="en-US" b="1" dirty="0"/>
-          </a:p>
-        </p:txBody>
-      </p:sp>
-      <mc:AlternateContent xmlns:mc="http://schemas.openxmlformats.org/markup-compatibility/2006" xmlns:a14="http://schemas.microsoft.com/office/drawing/2010/main">
-        <mc:Choice Requires="a14">
-          <p:sp>
-            <p:nvSpPr>
-              <p:cNvPr id="3" name="Объект 2">
-                <a:extLst>
-                  <a:ext uri="{FF2B5EF4-FFF2-40B4-BE49-F238E27FC236}">
-                    <a16:creationId xmlns:a16="http://schemas.microsoft.com/office/drawing/2014/main" id="{4CDB8E57-5CA8-497C-990E-C304F4FBE710}"/>
-                  </a:ext>
-                </a:extLst>
-              </p:cNvPr>
-              <p:cNvSpPr>
-                <a:spLocks noGrp="1"/>
-              </p:cNvSpPr>
-              <p:nvPr>
-                <p:ph idx="1"/>
-              </p:nvPr>
-            </p:nvSpPr>
-            <p:spPr>
-              <a:xfrm>
-                <a:off x="209550" y="1114427"/>
-                <a:ext cx="11525249" cy="5545789"/>
-              </a:xfrm>
-            </p:spPr>
-            <p:txBody>
-              <a:bodyPr>
-                <a:normAutofit/>
-              </a:bodyPr>
-              <a:lstStyle/>
-              <a:p>
-                <a:pPr marL="0" indent="0" eaLnBrk="0" fontAlgn="base" hangingPunct="0">
-                  <a:lnSpc>
-                    <a:spcPct val="100000"/>
-                  </a:lnSpc>
-                  <a:spcBef>
-                    <a:spcPct val="0"/>
-                  </a:spcBef>
-                  <a:spcAft>
-                    <a:spcPct val="0"/>
-                  </a:spcAft>
-                  <a:buNone/>
-                </a:pPr>
-                <a:endParaRPr lang="ru-RU" altLang="en-US" sz="2200" i="1" dirty="0" smtClean="0"/>
-              </a:p>
-              <a:p>
-                <a:pPr marL="0" indent="0" eaLnBrk="0" fontAlgn="base" hangingPunct="0">
-                  <a:lnSpc>
-                    <a:spcPct val="100000"/>
-                  </a:lnSpc>
-                  <a:spcBef>
-                    <a:spcPct val="0"/>
-                  </a:spcBef>
-                  <a:spcAft>
-                    <a:spcPct val="0"/>
-                  </a:spcAft>
-                  <a:buNone/>
-                </a:pPr>
-                <a:r>
-                  <a:rPr lang="ru-RU" altLang="en-US" sz="2200" i="1" dirty="0"/>
-                  <a:t>Модель </a:t>
-                </a:r>
-                <a:r>
-                  <a:rPr lang="ru-RU" altLang="en-US" sz="2200" i="1" dirty="0" smtClean="0"/>
-                  <a:t>для которых явно можно выделить тренд, но также и другие составляющие</a:t>
-                </a:r>
-                <a:endParaRPr lang="ru-RU" altLang="en-US" sz="2200" i="1" dirty="0"/>
-              </a:p>
-              <a:p>
-                <a:pPr marL="0" indent="0" algn="ctr" eaLnBrk="0" fontAlgn="base" hangingPunct="0">
-                  <a:lnSpc>
-                    <a:spcPct val="100000"/>
-                  </a:lnSpc>
-                  <a:spcBef>
-                    <a:spcPct val="0"/>
-                  </a:spcBef>
-                  <a:spcAft>
-                    <a:spcPct val="0"/>
-                  </a:spcAft>
-                  <a:buNone/>
-                </a:pPr>
-                <a14:m>
-                  <m:oMathPara xmlns:m="http://schemas.openxmlformats.org/officeDocument/2006/math">
-                    <m:oMathParaPr>
-                      <m:jc m:val="centerGroup"/>
-                    </m:oMathParaPr>
-                    <m:oMath xmlns:m="http://schemas.openxmlformats.org/officeDocument/2006/math">
-                      <m:sSub>
-                        <m:sSubPr>
-                          <m:ctrlPr>
-                            <a:rPr lang="ru-RU" altLang="en-US" sz="2400" b="0" i="1" dirty="0" smtClean="0">
-                              <a:latin typeface="Cambria Math" panose="02040503050406030204" pitchFamily="18" charset="0"/>
-                            </a:rPr>
-                          </m:ctrlPr>
-                        </m:sSubPr>
-                        <m:e>
-                          <m:r>
-                            <m:rPr>
-                              <m:sty m:val="p"/>
-                            </m:rPr>
-                            <a:rPr lang="en-US" altLang="en-US" sz="2400" i="1" dirty="0">
-                              <a:latin typeface="Cambria Math" panose="02040503050406030204" pitchFamily="18" charset="0"/>
-                            </a:rPr>
-                            <m:t>y</m:t>
-                          </m:r>
-                        </m:e>
-                        <m:sub>
-                          <m:r>
-                            <a:rPr lang="en-US" altLang="en-US" sz="2400" b="0" i="1" dirty="0" smtClean="0">
-                              <a:latin typeface="Cambria Math" panose="02040503050406030204" pitchFamily="18" charset="0"/>
-                            </a:rPr>
-                            <m:t>𝑇𝑆</m:t>
-                          </m:r>
-                        </m:sub>
-                      </m:sSub>
-                      <m:r>
-                        <a:rPr lang="en-US" altLang="en-US" sz="2400" i="1" dirty="0">
-                          <a:latin typeface="Cambria Math" panose="02040503050406030204" pitchFamily="18" charset="0"/>
-                        </a:rPr>
-                        <m:t>(</m:t>
-                      </m:r>
-                      <m:r>
-                        <a:rPr lang="en-US" altLang="en-US" sz="2400" i="1" dirty="0">
-                          <a:latin typeface="Cambria Math" panose="02040503050406030204" pitchFamily="18" charset="0"/>
-                        </a:rPr>
-                        <m:t>𝑡</m:t>
-                      </m:r>
-                      <m:r>
-                        <a:rPr lang="en-US" altLang="en-US" sz="2400" i="1" dirty="0">
-                          <a:latin typeface="Cambria Math" panose="02040503050406030204" pitchFamily="18" charset="0"/>
-                        </a:rPr>
-                        <m:t>) = </m:t>
-                      </m:r>
-                      <m:r>
-                        <a:rPr lang="en-US" altLang="en-US" sz="2400" i="1" dirty="0">
-                          <a:latin typeface="Cambria Math" panose="02040503050406030204" pitchFamily="18" charset="0"/>
-                        </a:rPr>
-                        <m:t>𝑡𝑟𝑒𝑛𝑑</m:t>
-                      </m:r>
-                      <m:r>
-                        <a:rPr lang="en-US" altLang="en-US" sz="2400" i="1" dirty="0">
-                          <a:latin typeface="Cambria Math" panose="02040503050406030204" pitchFamily="18" charset="0"/>
-                        </a:rPr>
-                        <m:t>(</m:t>
-                      </m:r>
-                      <m:r>
-                        <a:rPr lang="en-US" altLang="en-US" sz="2400" i="1" dirty="0">
-                          <a:latin typeface="Cambria Math" panose="02040503050406030204" pitchFamily="18" charset="0"/>
-                        </a:rPr>
-                        <m:t>𝑡</m:t>
-                      </m:r>
-                      <m:r>
-                        <a:rPr lang="en-US" altLang="en-US" sz="2400" i="1" dirty="0">
-                          <a:latin typeface="Cambria Math" panose="02040503050406030204" pitchFamily="18" charset="0"/>
-                        </a:rPr>
-                        <m:t>)+</m:t>
-                      </m:r>
-                      <m:nary>
-                        <m:naryPr>
-                          <m:chr m:val="∑"/>
-                          <m:ctrlPr>
-                            <a:rPr lang="en-US" altLang="en-US" sz="2400" i="1" dirty="0">
-                              <a:latin typeface="Cambria Math" panose="02040503050406030204" pitchFamily="18" charset="0"/>
-                            </a:rPr>
-                          </m:ctrlPr>
-                        </m:naryPr>
-                        <m:sub>
-                          <m:r>
-                            <a:rPr lang="en-US" altLang="en-US" sz="2400" i="1" dirty="0" err="1">
-                              <a:latin typeface="Cambria Math" panose="02040503050406030204" pitchFamily="18" charset="0"/>
-                            </a:rPr>
-                            <m:t>𝑖</m:t>
-                          </m:r>
-                          <m:r>
-                            <a:rPr lang="en-US" altLang="en-US" sz="2400" i="1" dirty="0">
-                              <a:latin typeface="Cambria Math" panose="02040503050406030204" pitchFamily="18" charset="0"/>
-                            </a:rPr>
-                            <m:t>=0</m:t>
-                          </m:r>
-                        </m:sub>
-                        <m:sup>
-                          <m:r>
-                            <a:rPr lang="en-US" altLang="en-US" sz="2400" i="1" dirty="0">
-                              <a:latin typeface="Cambria Math" panose="02040503050406030204" pitchFamily="18" charset="0"/>
-                            </a:rPr>
-                            <m:t>𝑀</m:t>
-                          </m:r>
-                        </m:sup>
-                        <m:e>
-                          <m:r>
-                            <a:rPr lang="en-US" altLang="en-US" sz="2400" i="1" dirty="0">
-                              <a:latin typeface="Cambria Math" panose="02040503050406030204" pitchFamily="18" charset="0"/>
-                            </a:rPr>
-                            <m:t>𝑠𝑒𝑎𝑠𝑜𝑛𝑎𝑙</m:t>
-                          </m:r>
-                          <m:r>
-                            <a:rPr lang="en-US" altLang="en-US" sz="2400" i="1" dirty="0">
-                              <a:latin typeface="Cambria Math" panose="02040503050406030204" pitchFamily="18" charset="0"/>
-                            </a:rPr>
-                            <m:t>(</m:t>
-                          </m:r>
-                          <m:r>
-                            <a:rPr lang="en-US" altLang="en-US" sz="2400" i="1" dirty="0">
-                              <a:latin typeface="Cambria Math" panose="02040503050406030204" pitchFamily="18" charset="0"/>
-                            </a:rPr>
-                            <m:t>𝑡</m:t>
-                          </m:r>
-                          <m:r>
-                            <a:rPr lang="en-US" altLang="en-US" sz="2400" i="1" dirty="0">
-                              <a:latin typeface="Cambria Math" panose="02040503050406030204" pitchFamily="18" charset="0"/>
-                            </a:rPr>
-                            <m:t>)</m:t>
-                          </m:r>
-                        </m:e>
-                      </m:nary>
-                      <m:r>
-                        <a:rPr lang="en-US" altLang="en-US" sz="2400" i="1" dirty="0">
-                          <a:latin typeface="Cambria Math" panose="02040503050406030204" pitchFamily="18" charset="0"/>
-                        </a:rPr>
-                        <m:t> +</m:t>
-                      </m:r>
-                      <m:r>
-                        <a:rPr lang="en-US" altLang="en-US" sz="2400" b="0" i="1" dirty="0" smtClean="0">
-                          <a:latin typeface="Cambria Math" panose="02040503050406030204" pitchFamily="18" charset="0"/>
-                        </a:rPr>
-                        <m:t>𝑟𝑒𝑠𝑖𝑑𝑢𝑎𝑙</m:t>
-                      </m:r>
-                      <m:r>
-                        <a:rPr lang="en-US" altLang="en-US" sz="2400" i="1" dirty="0">
-                          <a:latin typeface="Cambria Math" panose="02040503050406030204" pitchFamily="18" charset="0"/>
-                        </a:rPr>
-                        <m:t>(</m:t>
-                      </m:r>
-                      <m:r>
-                        <a:rPr lang="en-US" altLang="en-US" sz="2400" i="1" dirty="0">
-                          <a:latin typeface="Cambria Math" panose="02040503050406030204" pitchFamily="18" charset="0"/>
-                        </a:rPr>
-                        <m:t>𝑡</m:t>
-                      </m:r>
-                      <m:r>
-                        <a:rPr lang="en-US" altLang="en-US" sz="2400" i="1" dirty="0">
-                          <a:latin typeface="Cambria Math" panose="02040503050406030204" pitchFamily="18" charset="0"/>
-                        </a:rPr>
-                        <m:t>)</m:t>
-                      </m:r>
-                    </m:oMath>
-                  </m:oMathPara>
-                </a14:m>
-                <a:endParaRPr lang="ru-RU" altLang="en-US" sz="2000" dirty="0">
-                  <a:latin typeface="Open Sans"/>
-                </a:endParaRPr>
-              </a:p>
-              <a:p>
-                <a:pPr marL="0" indent="0" eaLnBrk="0" fontAlgn="base" hangingPunct="0">
-                  <a:lnSpc>
-                    <a:spcPct val="100000"/>
-                  </a:lnSpc>
-                  <a:spcBef>
-                    <a:spcPct val="0"/>
-                  </a:spcBef>
-                  <a:spcAft>
-                    <a:spcPct val="0"/>
-                  </a:spcAft>
-                  <a:buNone/>
-                </a:pPr>
-                <a:r>
-                  <a:rPr lang="ru-RU" altLang="en-US" sz="2000" dirty="0">
-                    <a:latin typeface="Open Sans"/>
-                  </a:rPr>
-                  <a:t>Или </a:t>
-                </a:r>
-                <a:r>
-                  <a:rPr lang="ru-RU" altLang="en-US" sz="2000" dirty="0" smtClean="0">
-                    <a:latin typeface="Open Sans"/>
-                  </a:rPr>
-                  <a:t>мультипликативная модель</a:t>
-                </a:r>
-                <a:endParaRPr lang="ru-RU" altLang="en-US" sz="2000" dirty="0">
-                  <a:latin typeface="Open Sans"/>
-                </a:endParaRPr>
-              </a:p>
-              <a:p>
-                <a:pPr marL="0" indent="0" algn="ctr" eaLnBrk="0" fontAlgn="base" hangingPunct="0">
-                  <a:lnSpc>
-                    <a:spcPct val="100000"/>
-                  </a:lnSpc>
-                  <a:spcBef>
-                    <a:spcPct val="0"/>
-                  </a:spcBef>
-                  <a:spcAft>
-                    <a:spcPct val="0"/>
-                  </a:spcAft>
-                  <a:buNone/>
-                </a:pPr>
-                <a14:m>
-                  <m:oMath xmlns:m="http://schemas.openxmlformats.org/officeDocument/2006/math">
-                    <m:r>
-                      <a:rPr lang="en-US" altLang="en-US" sz="2000" i="1" dirty="0">
-                        <a:latin typeface="Cambria Math" panose="02040503050406030204" pitchFamily="18" charset="0"/>
-                      </a:rPr>
-                      <m:t>𝑦</m:t>
-                    </m:r>
-                    <m:d>
-                      <m:dPr>
-                        <m:ctrlPr>
-                          <a:rPr lang="en-US" altLang="en-US" sz="2000" i="1" dirty="0">
-                            <a:latin typeface="Cambria Math" panose="02040503050406030204" pitchFamily="18" charset="0"/>
-                          </a:rPr>
-                        </m:ctrlPr>
-                      </m:dPr>
-                      <m:e>
-                        <m:r>
-                          <a:rPr lang="en-US" altLang="en-US" sz="2000" i="1" dirty="0">
-                            <a:latin typeface="Cambria Math" panose="02040503050406030204" pitchFamily="18" charset="0"/>
-                          </a:rPr>
-                          <m:t>𝑡</m:t>
-                        </m:r>
-                      </m:e>
-                    </m:d>
-                    <m:r>
-                      <a:rPr lang="en-US" altLang="en-US" sz="2000" i="1" dirty="0">
-                        <a:latin typeface="Cambria Math" panose="02040503050406030204" pitchFamily="18" charset="0"/>
-                      </a:rPr>
-                      <m:t>= </m:t>
-                    </m:r>
-                    <m:r>
-                      <a:rPr lang="en-US" altLang="en-US" sz="2000" i="1" dirty="0">
-                        <a:latin typeface="Cambria Math" panose="02040503050406030204" pitchFamily="18" charset="0"/>
-                      </a:rPr>
-                      <m:t>𝑡𝑟𝑒𝑛𝑑</m:t>
-                    </m:r>
-                    <m:d>
-                      <m:dPr>
-                        <m:ctrlPr>
-                          <a:rPr lang="en-US" altLang="en-US" sz="2000" i="1" dirty="0">
-                            <a:latin typeface="Cambria Math" panose="02040503050406030204" pitchFamily="18" charset="0"/>
-                          </a:rPr>
-                        </m:ctrlPr>
-                      </m:dPr>
-                      <m:e>
-                        <m:r>
-                          <a:rPr lang="en-US" altLang="en-US" sz="2000" i="1" dirty="0">
-                            <a:latin typeface="Cambria Math" panose="02040503050406030204" pitchFamily="18" charset="0"/>
-                          </a:rPr>
-                          <m:t>𝑡</m:t>
-                        </m:r>
-                      </m:e>
-                    </m:d>
-                    <m:r>
-                      <a:rPr lang="en-US" altLang="en-US" sz="2000" i="1" dirty="0">
-                        <a:latin typeface="Cambria Math" panose="02040503050406030204" pitchFamily="18" charset="0"/>
-                      </a:rPr>
-                      <m:t>⋅</m:t>
-                    </m:r>
-                    <m:d>
-                      <m:dPr>
-                        <m:ctrlPr>
-                          <a:rPr lang="ru-RU" altLang="en-US" sz="2000" b="0" i="1" dirty="0" smtClean="0">
-                            <a:latin typeface="Cambria Math" panose="02040503050406030204" pitchFamily="18" charset="0"/>
-                          </a:rPr>
-                        </m:ctrlPr>
-                      </m:dPr>
-                      <m:e>
-                        <m:nary>
-                          <m:naryPr>
-                            <m:chr m:val="∑"/>
-                            <m:ctrlPr>
-                              <a:rPr lang="en-US" altLang="en-US" sz="2000" i="1" dirty="0">
-                                <a:latin typeface="Cambria Math" panose="02040503050406030204" pitchFamily="18" charset="0"/>
-                              </a:rPr>
-                            </m:ctrlPr>
-                          </m:naryPr>
-                          <m:sub>
-                            <m:r>
-                              <a:rPr lang="en-US" altLang="en-US" sz="2000" i="1" dirty="0" err="1">
-                                <a:latin typeface="Cambria Math" panose="02040503050406030204" pitchFamily="18" charset="0"/>
-                              </a:rPr>
-                              <m:t>𝑖</m:t>
-                            </m:r>
-                            <m:r>
-                              <a:rPr lang="en-US" altLang="en-US" sz="2000" i="1" dirty="0">
-                                <a:latin typeface="Cambria Math" panose="02040503050406030204" pitchFamily="18" charset="0"/>
-                              </a:rPr>
-                              <m:t>=0</m:t>
-                            </m:r>
-                          </m:sub>
-                          <m:sup>
-                            <m:r>
-                              <a:rPr lang="en-US" altLang="en-US" sz="2000" i="1" dirty="0">
-                                <a:latin typeface="Cambria Math" panose="02040503050406030204" pitchFamily="18" charset="0"/>
-                              </a:rPr>
-                              <m:t>𝑀</m:t>
-                            </m:r>
-                          </m:sup>
-                          <m:e>
-                            <m:r>
-                              <a:rPr lang="en-US" altLang="en-US" sz="2000" i="1" dirty="0">
-                                <a:latin typeface="Cambria Math" panose="02040503050406030204" pitchFamily="18" charset="0"/>
-                              </a:rPr>
-                              <m:t>𝑠𝑒𝑎𝑠𝑜𝑛𝑎𝑙</m:t>
-                            </m:r>
-                            <m:d>
-                              <m:dPr>
-                                <m:ctrlPr>
-                                  <a:rPr lang="en-US" altLang="en-US" sz="2000" i="1" dirty="0">
-                                    <a:latin typeface="Cambria Math" panose="02040503050406030204" pitchFamily="18" charset="0"/>
-                                  </a:rPr>
-                                </m:ctrlPr>
-                              </m:dPr>
-                              <m:e>
-                                <m:r>
-                                  <a:rPr lang="en-US" altLang="en-US" sz="2000" i="1" dirty="0">
-                                    <a:latin typeface="Cambria Math" panose="02040503050406030204" pitchFamily="18" charset="0"/>
-                                  </a:rPr>
-                                  <m:t>𝑡</m:t>
-                                </m:r>
-                              </m:e>
-                            </m:d>
-                          </m:e>
-                        </m:nary>
-                      </m:e>
-                    </m:d>
-                    <m:r>
-                      <a:rPr lang="en-US" altLang="en-US" sz="2000" b="0" i="1" dirty="0" smtClean="0">
-                        <a:latin typeface="Cambria Math" panose="02040503050406030204" pitchFamily="18" charset="0"/>
-                      </a:rPr>
-                      <m:t>⋅</m:t>
-                    </m:r>
-                    <m:r>
-                      <a:rPr lang="en-US" altLang="en-US" sz="2000" b="0" i="1" dirty="0" smtClean="0">
-                        <a:latin typeface="Cambria Math" panose="02040503050406030204" pitchFamily="18" charset="0"/>
-                      </a:rPr>
-                      <m:t>𝑟𝑒𝑠𝑖𝑑𝑢𝑎𝑙</m:t>
-                    </m:r>
-                    <m:r>
-                      <a:rPr lang="en-US" altLang="en-US" sz="2000" i="1" dirty="0">
-                        <a:latin typeface="Cambria Math" panose="02040503050406030204" pitchFamily="18" charset="0"/>
-                      </a:rPr>
-                      <m:t>(</m:t>
-                    </m:r>
-                    <m:r>
-                      <a:rPr lang="en-US" altLang="en-US" sz="2000" i="1" dirty="0">
-                        <a:latin typeface="Cambria Math" panose="02040503050406030204" pitchFamily="18" charset="0"/>
-                      </a:rPr>
-                      <m:t>𝑡</m:t>
-                    </m:r>
-                  </m:oMath>
-                </a14:m>
-                <a:r>
-                  <a:rPr lang="en-US" altLang="en-US" sz="2000" i="1" dirty="0"/>
-                  <a:t>). </a:t>
-                </a:r>
-                <a:endParaRPr lang="en-US" altLang="en-US" sz="2000" i="1" dirty="0" smtClean="0"/>
-              </a:p>
-              <a:p>
-                <a:pPr marL="0" indent="0" algn="ctr" eaLnBrk="0" fontAlgn="base" hangingPunct="0">
-                  <a:lnSpc>
-                    <a:spcPct val="100000"/>
-                  </a:lnSpc>
-                  <a:spcBef>
-                    <a:spcPct val="0"/>
-                  </a:spcBef>
-                  <a:spcAft>
-                    <a:spcPct val="0"/>
-                  </a:spcAft>
-                  <a:buNone/>
-                </a:pPr>
-                <a:r>
-                  <a:rPr lang="ru-RU" altLang="en-US" sz="2000" i="1" dirty="0" smtClean="0"/>
-                  <a:t>Могут быть и более сложные модели</a:t>
-                </a:r>
-                <a:endParaRPr lang="en-US" altLang="en-US" sz="2000" i="1" dirty="0"/>
-              </a:p>
-              <a:p>
-                <a:pPr eaLnBrk="0" fontAlgn="base" hangingPunct="0">
-                  <a:lnSpc>
-                    <a:spcPct val="100000"/>
-                  </a:lnSpc>
-                  <a:spcBef>
-                    <a:spcPct val="0"/>
-                  </a:spcBef>
-                  <a:spcAft>
-                    <a:spcPct val="0"/>
-                  </a:spcAft>
-                </a:pPr>
-                <a:endParaRPr lang="en-US" altLang="en-US" sz="2000" dirty="0">
-                  <a:latin typeface="Open Sans"/>
-                </a:endParaRPr>
-              </a:p>
-            </p:txBody>
-          </p:sp>
-        </mc:Choice>
-        <mc:Fallback xmlns="">
-          <p:sp>
-            <p:nvSpPr>
-              <p:cNvPr id="3" name="Объект 2">
-                <a:extLst>
-                  <a:ext uri="{FF2B5EF4-FFF2-40B4-BE49-F238E27FC236}">
-                    <a16:creationId xmlns:a16="http://schemas.microsoft.com/office/drawing/2014/main" id="{4CDB8E57-5CA8-497C-990E-C304F4FBE710}"/>
-                  </a:ext>
-                </a:extLst>
-              </p:cNvPr>
-              <p:cNvSpPr>
-                <a:spLocks noGrp="1" noRot="1" noChangeAspect="1" noMove="1" noResize="1" noEditPoints="1" noAdjustHandles="1" noChangeArrowheads="1" noChangeShapeType="1" noTextEdit="1"/>
-              </p:cNvSpPr>
-              <p:nvPr>
-                <p:ph idx="1"/>
-              </p:nvPr>
-            </p:nvSpPr>
-            <p:spPr>
-              <a:xfrm>
-                <a:off x="209550" y="1114427"/>
-                <a:ext cx="11525249" cy="5545789"/>
-              </a:xfrm>
-              <a:blipFill>
-                <a:blip r:embed="rId2"/>
-                <a:stretch>
-                  <a:fillRect l="-687"/>
-                </a:stretch>
-              </a:blipFill>
-            </p:spPr>
-            <p:txBody>
-              <a:bodyPr/>
-              <a:lstStyle/>
-              <a:p>
-                <a:r>
-                  <a:rPr lang="ru-RU">
-                    <a:noFill/>
-                  </a:rPr>
-                  <a:t> </a:t>
-                </a:r>
-              </a:p>
-            </p:txBody>
-          </p:sp>
-        </mc:Fallback>
-      </mc:AlternateContent>
-      <p:sp>
-        <p:nvSpPr>
-          <p:cNvPr id="7" name="Номер слайда 6">
-            <a:extLst>
-              <a:ext uri="{FF2B5EF4-FFF2-40B4-BE49-F238E27FC236}">
-                <a16:creationId xmlns:a16="http://schemas.microsoft.com/office/drawing/2014/main" id="{A07EF2B8-3D80-AB22-FA4B-F0655B9EAE6F}"/>
-              </a:ext>
-            </a:extLst>
-          </p:cNvPr>
-          <p:cNvSpPr>
-            <a:spLocks noGrp="1"/>
-          </p:cNvSpPr>
-          <p:nvPr>
-            <p:ph type="sldNum" sz="quarter" idx="12"/>
-          </p:nvPr>
-        </p:nvSpPr>
-        <p:spPr/>
-        <p:txBody>
-          <a:bodyPr/>
-          <a:lstStyle/>
-          <a:p>
-            <a:fld id="{45C3B737-A709-4ABC-AFE0-A6B067850C48}" type="slidenum">
-              <a:rPr lang="en-US" smtClean="0"/>
-              <a:t>2</a:t>
-            </a:fld>
-            <a:endParaRPr lang="en-US"/>
-          </a:p>
-        </p:txBody>
-      </p:sp>
-      <p:sp>
-        <p:nvSpPr>
-          <p:cNvPr id="5" name="Rectangle 231">
-            <a:extLst>
-              <a:ext uri="{FF2B5EF4-FFF2-40B4-BE49-F238E27FC236}">
-                <a16:creationId xmlns:a16="http://schemas.microsoft.com/office/drawing/2014/main" id="{57F50B8E-A23A-4154-9A0C-994DE115ACE6}"/>
-              </a:ext>
-            </a:extLst>
-          </p:cNvPr>
-          <p:cNvSpPr>
-            <a:spLocks noChangeArrowheads="1"/>
-          </p:cNvSpPr>
-          <p:nvPr/>
-        </p:nvSpPr>
-        <p:spPr bwMode="auto">
-          <a:xfrm>
-            <a:off x="6167756" y="4477386"/>
-            <a:ext cx="52071" cy="10795"/>
-          </a:xfrm>
-          <a:prstGeom prst="rect">
-            <a:avLst/>
-          </a:prstGeom>
-          <a:solidFill>
-            <a:srgbClr val="000000"/>
-          </a:solidFill>
-          <a:ln>
-            <a:noFill/>
-          </a:ln>
-          <a:extLst>
-            <a:ext uri="{91240B29-F687-4F45-9708-019B960494DF}">
-              <a14:hiddenLine xmlns:a14="http://schemas.microsoft.com/office/drawing/2010/main" w="9525">
-                <a:solidFill>
-                  <a:srgbClr val="000000"/>
-                </a:solidFill>
-                <a:miter lim="800000"/>
-                <a:headEnd/>
-                <a:tailEnd/>
-              </a14:hiddenLine>
-            </a:ext>
-          </a:extLst>
-        </p:spPr>
-        <p:txBody>
-          <a:bodyPr rot="0" vert="horz" wrap="square" lIns="91440" tIns="45720" rIns="91440" bIns="45720" anchor="t" anchorCtr="0" upright="1">
-            <a:noAutofit/>
-          </a:bodyPr>
-          <a:lstStyle/>
-          <a:p>
-            <a:endParaRPr lang="en-US" sz="1351"/>
-          </a:p>
-        </p:txBody>
-      </p:sp>
-      <p:sp>
-        <p:nvSpPr>
-          <p:cNvPr id="6" name="Rectangle 3">
-            <a:extLst>
-              <a:ext uri="{FF2B5EF4-FFF2-40B4-BE49-F238E27FC236}">
-                <a16:creationId xmlns:a16="http://schemas.microsoft.com/office/drawing/2014/main" id="{66C52228-8C94-4CF2-AD63-BA9617333BA2}"/>
-              </a:ext>
-            </a:extLst>
-          </p:cNvPr>
-          <p:cNvSpPr>
-            <a:spLocks noChangeArrowheads="1"/>
-          </p:cNvSpPr>
-          <p:nvPr/>
-        </p:nvSpPr>
-        <p:spPr bwMode="auto">
-          <a:xfrm>
-            <a:off x="-1523999" y="124999"/>
-            <a:ext cx="184731" cy="677108"/>
-          </a:xfrm>
-          <a:prstGeom prst="rect">
-            <a:avLst/>
-          </a:prstGeom>
-          <a:noFill/>
-          <a:ln>
-            <a:noFill/>
-          </a:ln>
-          <a:effectLst/>
-          <a:extLst>
-            <a:ext uri="{909E8E84-426E-40DD-AFC4-6F175D3DCCD1}">
-              <a14:hiddenFill xmlns:a14="http://schemas.microsoft.com/office/drawing/2010/main">
-                <a:solidFill>
-                  <a:schemeClr val="accent1"/>
-                </a:solidFill>
-              </a14:hiddenFill>
-            </a:ext>
-            <a:ext uri="{91240B29-F687-4F45-9708-019B960494DF}">
-              <a14:hiddenLine xmlns:a14="http://schemas.microsoft.com/office/drawing/2010/main" w="9525">
-                <a:solidFill>
-                  <a:schemeClr val="tx1"/>
-                </a:solidFill>
-                <a:miter lim="800000"/>
-                <a:headEnd/>
-                <a:tailEnd/>
-              </a14:hiddenLine>
-            </a:ext>
-            <a:ext uri="{AF507438-7753-43E0-B8FC-AC1667EBCBE1}">
-              <a14:hiddenEffects xmlns:a14="http://schemas.microsoft.com/office/drawing/2010/main">
-                <a:effectLst>
-                  <a:outerShdw dist="35921" dir="2700000" algn="ctr" rotWithShape="0">
-                    <a:schemeClr val="bg2"/>
-                  </a:outerShdw>
-                </a:effectLst>
-              </a14:hiddenEffects>
-            </a:ext>
-          </a:extLst>
-        </p:spPr>
-        <p:txBody>
-          <a:bodyPr vert="horz" wrap="none" lIns="91440" tIns="45720" rIns="91440" bIns="45720" numCol="1" anchor="ctr" anchorCtr="0" compatLnSpc="1">
-            <a:prstTxWarp prst="textNoShape">
-              <a:avLst/>
-            </a:prstTxWarp>
-            <a:spAutoFit/>
-          </a:bodyPr>
-          <a:lstStyle/>
-          <a:p>
-            <a:pPr eaLnBrk="0" fontAlgn="base" hangingPunct="0">
-              <a:spcBef>
-                <a:spcPct val="0"/>
-              </a:spcBef>
-              <a:spcAft>
-                <a:spcPct val="0"/>
-              </a:spcAft>
-            </a:pPr>
-            <a:r>
-              <a:rPr lang="en-US" altLang="en-US" sz="1400">
-                <a:latin typeface="Arial" panose="020B0604020202020204" pitchFamily="34" charset="0"/>
-                <a:ea typeface="Times New Roman" panose="02020603050405020304" pitchFamily="18" charset="0"/>
-              </a:rPr>
-              <a:t/>
-            </a:r>
-            <a:br>
-              <a:rPr lang="en-US" altLang="en-US" sz="1400">
-                <a:latin typeface="Arial" panose="020B0604020202020204" pitchFamily="34" charset="0"/>
-                <a:ea typeface="Times New Roman" panose="02020603050405020304" pitchFamily="18" charset="0"/>
-              </a:rPr>
-            </a:br>
-            <a:endParaRPr lang="en-US" altLang="en-US" sz="2400">
-              <a:latin typeface="Arial" panose="020B0604020202020204" pitchFamily="34" charset="0"/>
-            </a:endParaRPr>
-          </a:p>
-        </p:txBody>
-      </p:sp>
-      <p:sp>
-        <p:nvSpPr>
-          <p:cNvPr id="4" name="Rectangle 1">
-            <a:extLst>
-              <a:ext uri="{FF2B5EF4-FFF2-40B4-BE49-F238E27FC236}">
-                <a16:creationId xmlns:a16="http://schemas.microsoft.com/office/drawing/2014/main" id="{4ECA1DAD-475E-4D0B-A20A-17535DDD41A8}"/>
-              </a:ext>
-            </a:extLst>
-          </p:cNvPr>
-          <p:cNvSpPr>
-            <a:spLocks noChangeArrowheads="1"/>
-          </p:cNvSpPr>
-          <p:nvPr/>
-        </p:nvSpPr>
-        <p:spPr bwMode="auto">
-          <a:xfrm>
-            <a:off x="-1523999" y="43935"/>
-            <a:ext cx="65" cy="369332"/>
-          </a:xfrm>
-          <a:prstGeom prst="rect">
-            <a:avLst/>
-          </a:prstGeom>
-          <a:solidFill>
-            <a:srgbClr val="FFFFFF"/>
-          </a:solidFill>
-          <a:ln>
-            <a:noFill/>
-          </a:ln>
-          <a:effectLst/>
-          <a:extLst>
-            <a:ext uri="{91240B29-F687-4F45-9708-019B960494DF}">
-              <a14:hiddenLine xmlns:a14="http://schemas.microsoft.com/office/drawing/2010/main" w="9525">
-                <a:solidFill>
-                  <a:schemeClr val="tx1"/>
-                </a:solidFill>
-                <a:miter lim="800000"/>
-                <a:headEnd/>
-                <a:tailEnd/>
-              </a14:hiddenLine>
-            </a:ext>
-            <a:ext uri="{AF507438-7753-43E0-B8FC-AC1667EBCBE1}">
-              <a14:hiddenEffects xmlns:a14="http://schemas.microsoft.com/office/drawing/2010/main">
-                <a:effectLst>
-                  <a:outerShdw dist="35921" dir="2700000" algn="ctr" rotWithShape="0">
-                    <a:schemeClr val="bg2"/>
-                  </a:outerShdw>
-                </a:effectLst>
-              </a14:hiddenEffects>
-            </a:ext>
-          </a:extLst>
-        </p:spPr>
-        <p:txBody>
-          <a:bodyPr vert="horz" wrap="none" lIns="0" tIns="0" rIns="0" bIns="0" numCol="1" anchor="ctr" anchorCtr="0" compatLnSpc="1">
-            <a:prstTxWarp prst="textNoShape">
-              <a:avLst/>
-            </a:prstTxWarp>
-            <a:spAutoFit/>
-          </a:bodyPr>
-          <a:lstStyle/>
-          <a:p>
-            <a:pPr eaLnBrk="0" fontAlgn="base" hangingPunct="0">
-              <a:spcBef>
-                <a:spcPct val="0"/>
-              </a:spcBef>
-              <a:spcAft>
-                <a:spcPct val="0"/>
-              </a:spcAft>
-            </a:pPr>
-            <a:endParaRPr lang="en-US" altLang="en-US" sz="2400" dirty="0">
-              <a:latin typeface="Arial" panose="020B0604020202020204" pitchFamily="34" charset="0"/>
-            </a:endParaRPr>
-          </a:p>
-        </p:txBody>
-      </p:sp>
-      <p:sp>
-        <p:nvSpPr>
-          <p:cNvPr id="9" name="Прямоугольник 8"/>
-          <p:cNvSpPr/>
-          <p:nvPr/>
-        </p:nvSpPr>
-        <p:spPr>
-          <a:xfrm>
-            <a:off x="209550" y="6290884"/>
-            <a:ext cx="5065489" cy="369332"/>
-          </a:xfrm>
-          <a:prstGeom prst="rect">
-            <a:avLst/>
-          </a:prstGeom>
-        </p:spPr>
-        <p:txBody>
-          <a:bodyPr wrap="none">
-            <a:spAutoFit/>
-          </a:bodyPr>
-          <a:lstStyle/>
-          <a:p>
-            <a:r>
-              <a:rPr lang="ru-RU" dirty="0"/>
-              <a:t>https://openforecast.org/adam/tsComponents.html</a:t>
-            </a:r>
-          </a:p>
-        </p:txBody>
-      </p:sp>
-    </p:spTree>
-    <p:extLst>
-      <p:ext uri="{BB962C8B-B14F-4D97-AF65-F5344CB8AC3E}">
-        <p14:creationId xmlns:p14="http://schemas.microsoft.com/office/powerpoint/2010/main" val="2605955941"/>
-      </p:ext>
-    </p:extLst>
-  </p:cSld>
-  <p:clrMapOvr>
-    <a:masterClrMapping/>
-  </p:clrMapOvr>
-  <p:timing>
-    <p:tnLst>
-      <p:par>
-        <p:cTn id="1" dur="indefinite" restart="never" nodeType="tmRoot"/>
-      </p:par>
-    </p:tnLst>
-  </p:timing>
-</p:sld>
-</file>
-
-<file path=ppt/slides/slide20.xml><?xml version="1.0" encoding="utf-8"?>
+<file path=ppt/slides/slide21.xml><?xml version="1.0" encoding="utf-8"?>
 <p:sld xmlns:a="http://schemas.openxmlformats.org/drawingml/2006/main" xmlns:r="http://schemas.openxmlformats.org/officeDocument/2006/relationships" xmlns:p="http://schemas.openxmlformats.org/presentationml/2006/main">
   <p:cSld>
     <p:spTree>
@@ -13961,7 +14823,7 @@
 </p:sld>
 </file>
 
-<file path=ppt/slides/slide21.xml><?xml version="1.0" encoding="utf-8"?>
+<file path=ppt/slides/slide22.xml><?xml version="1.0" encoding="utf-8"?>
 <p:sld xmlns:a="http://schemas.openxmlformats.org/drawingml/2006/main" xmlns:r="http://schemas.openxmlformats.org/officeDocument/2006/relationships" xmlns:p="http://schemas.openxmlformats.org/presentationml/2006/main">
   <p:cSld>
     <p:spTree>
@@ -15153,7 +16015,7 @@
 </p:sld>
 </file>
 
-<file path=ppt/slides/slide22.xml><?xml version="1.0" encoding="utf-8"?>
+<file path=ppt/slides/slide23.xml><?xml version="1.0" encoding="utf-8"?>
 <p:sld xmlns:a="http://schemas.openxmlformats.org/drawingml/2006/main" xmlns:r="http://schemas.openxmlformats.org/officeDocument/2006/relationships" xmlns:p="http://schemas.openxmlformats.org/presentationml/2006/main">
   <p:cSld>
     <p:spTree>
@@ -15391,179 +16253,6 @@
 </p:sld>
 </file>
 
-<file path=ppt/slides/slide23.xml><?xml version="1.0" encoding="utf-8"?>
-<p:sld xmlns:a="http://schemas.openxmlformats.org/drawingml/2006/main" xmlns:r="http://schemas.openxmlformats.org/officeDocument/2006/relationships" xmlns:p="http://schemas.openxmlformats.org/presentationml/2006/main">
-  <p:cSld>
-    <p:spTree>
-      <p:nvGrpSpPr>
-        <p:cNvPr id="1" name=""/>
-        <p:cNvGrpSpPr/>
-        <p:nvPr/>
-      </p:nvGrpSpPr>
-      <p:grpSpPr>
-        <a:xfrm>
-          <a:off x="0" y="0"/>
-          <a:ext cx="0" cy="0"/>
-          <a:chOff x="0" y="0"/>
-          <a:chExt cx="0" cy="0"/>
-        </a:xfrm>
-      </p:grpSpPr>
-      <p:sp>
-        <p:nvSpPr>
-          <p:cNvPr id="2" name="Заголовок 1"/>
-          <p:cNvSpPr>
-            <a:spLocks noGrp="1"/>
-          </p:cNvSpPr>
-          <p:nvPr>
-            <p:ph type="title"/>
-          </p:nvPr>
-        </p:nvSpPr>
-        <p:spPr>
-          <a:xfrm>
-            <a:off x="1228434" y="281565"/>
-            <a:ext cx="10515600" cy="1325563"/>
-          </a:xfrm>
-        </p:spPr>
-        <p:txBody>
-          <a:bodyPr/>
-          <a:lstStyle/>
-          <a:p>
-            <a:r>
-              <a:rPr lang="ru-RU" dirty="0"/>
-              <a:t>Использование разложений</a:t>
-            </a:r>
-          </a:p>
-        </p:txBody>
-      </p:sp>
-      <p:sp>
-        <p:nvSpPr>
-          <p:cNvPr id="3" name="Объект 2"/>
-          <p:cNvSpPr>
-            <a:spLocks noGrp="1"/>
-          </p:cNvSpPr>
-          <p:nvPr>
-            <p:ph idx="1"/>
-          </p:nvPr>
-        </p:nvSpPr>
-        <p:spPr>
-          <a:xfrm>
-            <a:off x="595604" y="1237796"/>
-            <a:ext cx="10515600" cy="4351338"/>
-          </a:xfrm>
-        </p:spPr>
-        <p:txBody>
-          <a:bodyPr/>
-          <a:lstStyle/>
-          <a:p>
-            <a:r>
-              <a:rPr lang="ru-RU" dirty="0"/>
-              <a:t>Разложение может быть использовано вместе с предсказанием по составляющим.</a:t>
-            </a:r>
-          </a:p>
-          <a:p>
-            <a:r>
-              <a:rPr lang="ru-RU" dirty="0"/>
-              <a:t>Такой подход может быть меньше подвержен переобучению.</a:t>
-            </a:r>
-          </a:p>
-          <a:p>
-            <a:pPr lvl="1"/>
-            <a:r>
-              <a:rPr lang="ru-RU" dirty="0"/>
-              <a:t>Чем меньше параметров модели, тем устойчивей ее работа.</a:t>
-            </a:r>
-          </a:p>
-        </p:txBody>
-      </p:sp>
-      <p:pic>
-        <p:nvPicPr>
-          <p:cNvPr id="4" name="Рисунок 3"/>
-          <p:cNvPicPr>
-            <a:picLocks noChangeAspect="1"/>
-          </p:cNvPicPr>
-          <p:nvPr/>
-        </p:nvPicPr>
-        <p:blipFill>
-          <a:blip r:embed="rId2"/>
-          <a:stretch>
-            <a:fillRect/>
-          </a:stretch>
-        </p:blipFill>
-        <p:spPr>
-          <a:xfrm>
-            <a:off x="933159" y="3634954"/>
-            <a:ext cx="10810875" cy="3143250"/>
-          </a:xfrm>
-          <a:prstGeom prst="rect">
-            <a:avLst/>
-          </a:prstGeom>
-        </p:spPr>
-      </p:pic>
-      <p:sp>
-        <p:nvSpPr>
-          <p:cNvPr id="5" name="TextBox 4"/>
-          <p:cNvSpPr txBox="1"/>
-          <p:nvPr/>
-        </p:nvSpPr>
-        <p:spPr>
-          <a:xfrm>
-            <a:off x="4693298" y="3413465"/>
-            <a:ext cx="4032579" cy="369332"/>
-          </a:xfrm>
-          <a:prstGeom prst="rect">
-            <a:avLst/>
-          </a:prstGeom>
-          <a:noFill/>
-        </p:spPr>
-        <p:txBody>
-          <a:bodyPr wrap="none" rtlCol="0">
-            <a:spAutoFit/>
-          </a:bodyPr>
-          <a:lstStyle/>
-          <a:p>
-            <a:r>
-              <a:rPr lang="ru-RU" dirty="0"/>
-              <a:t>Пример: </a:t>
-            </a:r>
-            <a:r>
-              <a:rPr lang="en-US" dirty="0"/>
-              <a:t>STL </a:t>
-            </a:r>
-            <a:r>
-              <a:rPr lang="ru-RU" dirty="0"/>
-              <a:t>разложение + </a:t>
-            </a:r>
-            <a:r>
-              <a:rPr lang="en-US" dirty="0"/>
-              <a:t>SES </a:t>
-            </a:r>
-            <a:r>
-              <a:rPr lang="ru-RU" dirty="0"/>
-              <a:t>прогноз</a:t>
-            </a:r>
-          </a:p>
-        </p:txBody>
-      </p:sp>
-    </p:spTree>
-    <p:extLst>
-      <p:ext uri="{BB962C8B-B14F-4D97-AF65-F5344CB8AC3E}">
-        <p14:creationId xmlns:p14="http://schemas.microsoft.com/office/powerpoint/2010/main" val="862783598"/>
-      </p:ext>
-    </p:extLst>
-  </p:cSld>
-  <p:clrMapOvr>
-    <a:masterClrMapping/>
-  </p:clrMapOvr>
-  <p:timing>
-    <p:tnLst>
-      <p:par>
-        <p:cTn id="1" dur="indefinite" restart="never" nodeType="tmRoot"/>
-      </p:par>
-    </p:tnLst>
-  </p:timing>
-</p:sld>
-</file>
-
 <file path=ppt/slides/slide24.xml><?xml version="1.0" encoding="utf-8"?>
 <p:sld xmlns:a="http://schemas.openxmlformats.org/drawingml/2006/main" xmlns:r="http://schemas.openxmlformats.org/officeDocument/2006/relationships" xmlns:p="http://schemas.openxmlformats.org/presentationml/2006/main">
   <p:cSld>
@@ -15593,19 +16282,17 @@
         </p:nvSpPr>
         <p:spPr>
           <a:xfrm>
-            <a:off x="228600" y="182505"/>
-            <a:ext cx="10799154" cy="678555"/>
+            <a:off x="1228434" y="-87767"/>
+            <a:ext cx="10515600" cy="1325563"/>
           </a:xfrm>
         </p:spPr>
         <p:txBody>
-          <a:bodyPr>
-            <a:normAutofit fontScale="90000"/>
-          </a:bodyPr>
+          <a:bodyPr/>
           <a:lstStyle/>
           <a:p>
             <a:r>
               <a:rPr lang="ru-RU" dirty="0"/>
-              <a:t>Использование Модели ВР</a:t>
+              <a:t>Использование разложений</a:t>
             </a:r>
           </a:p>
         </p:txBody>
@@ -15622,334 +16309,126 @@
         </p:nvSpPr>
         <p:spPr>
           <a:xfrm>
-            <a:off x="228600" y="784860"/>
-            <a:ext cx="11963400" cy="5951220"/>
+            <a:off x="537547" y="1074289"/>
+            <a:ext cx="10515600" cy="4351338"/>
           </a:xfrm>
         </p:spPr>
         <p:txBody>
-          <a:bodyPr>
-            <a:noAutofit/>
+          <a:bodyPr/>
+          <a:lstStyle/>
+          <a:p>
+            <a:r>
+              <a:rPr lang="ru-RU" dirty="0"/>
+              <a:t>Разложение может быть использовано вместе с предсказанием по составляющим</a:t>
+            </a:r>
+            <a:r>
+              <a:rPr lang="ru-RU" dirty="0" smtClean="0"/>
+              <a:t>.</a:t>
+            </a:r>
+          </a:p>
+          <a:p>
+            <a:r>
+              <a:rPr lang="ru-RU" dirty="0" smtClean="0"/>
+              <a:t>Проще на практике чем использовать </a:t>
+            </a:r>
+            <a:r>
+              <a:rPr lang="en-US" dirty="0" smtClean="0"/>
+              <a:t>TBATS</a:t>
+            </a:r>
+            <a:r>
+              <a:rPr lang="ru-RU" dirty="0" smtClean="0"/>
+              <a:t> провести разложение и преобразование модели </a:t>
+            </a:r>
+            <a:endParaRPr lang="ru-RU" dirty="0"/>
+          </a:p>
+          <a:p>
+            <a:r>
+              <a:rPr lang="ru-RU" dirty="0"/>
+              <a:t>Такой подход может быть меньше подвержен переобучению.</a:t>
+            </a:r>
+          </a:p>
+          <a:p>
+            <a:pPr lvl="1"/>
+            <a:r>
+              <a:rPr lang="ru-RU" dirty="0"/>
+              <a:t>Чем меньше параметров модели, тем устойчивей ее работа.</a:t>
+            </a:r>
+          </a:p>
+        </p:txBody>
+      </p:sp>
+      <p:pic>
+        <p:nvPicPr>
+          <p:cNvPr id="4" name="Рисунок 3"/>
+          <p:cNvPicPr>
+            <a:picLocks noChangeAspect="1"/>
+          </p:cNvPicPr>
+          <p:nvPr/>
+        </p:nvPicPr>
+        <p:blipFill>
+          <a:blip r:embed="rId2"/>
+          <a:stretch>
+            <a:fillRect/>
+          </a:stretch>
+        </p:blipFill>
+        <p:spPr>
+          <a:xfrm>
+            <a:off x="933159" y="3993254"/>
+            <a:ext cx="10810875" cy="2864746"/>
+          </a:xfrm>
+          <a:prstGeom prst="rect">
+            <a:avLst/>
+          </a:prstGeom>
+        </p:spPr>
+      </p:pic>
+      <p:sp>
+        <p:nvSpPr>
+          <p:cNvPr id="5" name="TextBox 4"/>
+          <p:cNvSpPr txBox="1"/>
+          <p:nvPr/>
+        </p:nvSpPr>
+        <p:spPr>
+          <a:xfrm>
+            <a:off x="4751355" y="3787429"/>
+            <a:ext cx="4032579" cy="369332"/>
+          </a:xfrm>
+          <a:prstGeom prst="rect">
+            <a:avLst/>
+          </a:prstGeom>
+          <a:noFill/>
+        </p:spPr>
+        <p:txBody>
+          <a:bodyPr wrap="none" rtlCol="0">
+            <a:spAutoFit/>
           </a:bodyPr>
           <a:lstStyle/>
           <a:p>
-            <a:pPr marL="0" indent="0">
-              <a:lnSpc>
-                <a:spcPct val="100000"/>
-              </a:lnSpc>
-              <a:spcBef>
-                <a:spcPts val="0"/>
-              </a:spcBef>
-              <a:buNone/>
-            </a:pPr>
-            <a:r>
-              <a:rPr lang="ru-RU" sz="2000" b="1" dirty="0"/>
-              <a:t>Если ВР имеет сложный тренд со структурными изменениями </a:t>
-            </a:r>
-            <a:r>
-              <a:rPr lang="ru-RU" sz="1800" b="1" dirty="0"/>
-              <a:t>(новизна, точки перегиба, выбросы и пропуски)</a:t>
-            </a:r>
-          </a:p>
-          <a:p>
-            <a:pPr marL="0" indent="0">
-              <a:lnSpc>
-                <a:spcPct val="100000"/>
-              </a:lnSpc>
-              <a:spcBef>
-                <a:spcPts val="0"/>
-              </a:spcBef>
-              <a:buNone/>
-            </a:pPr>
-            <a:r>
-              <a:rPr lang="ru-RU" sz="2000" b="1" dirty="0"/>
-              <a:t>ВР требует обучения долгосрочной выборке и необходим длинный горизонт предсказания</a:t>
-            </a:r>
-          </a:p>
-          <a:p>
-            <a:pPr lvl="1">
-              <a:lnSpc>
-                <a:spcPct val="100000"/>
-              </a:lnSpc>
-              <a:spcBef>
-                <a:spcPts val="0"/>
-              </a:spcBef>
-            </a:pPr>
-            <a:r>
-              <a:rPr lang="en-US" sz="1800" dirty="0"/>
-              <a:t>STL – </a:t>
-            </a:r>
-            <a:r>
-              <a:rPr lang="ru-RU" sz="1800" dirty="0"/>
-              <a:t>сложность разложения зависит от объема выборки, работает преимущественно </a:t>
-            </a:r>
-            <a:r>
-              <a:rPr lang="en-US" sz="1800" dirty="0"/>
-              <a:t>offline</a:t>
-            </a:r>
-            <a:r>
-              <a:rPr lang="ru-RU" sz="1800" dirty="0"/>
-              <a:t>.</a:t>
-            </a:r>
-          </a:p>
-          <a:p>
-            <a:pPr lvl="1">
-              <a:lnSpc>
-                <a:spcPct val="100000"/>
-              </a:lnSpc>
-              <a:spcBef>
-                <a:spcPts val="0"/>
-              </a:spcBef>
-            </a:pPr>
-            <a:r>
-              <a:rPr lang="en-US" sz="1800" dirty="0"/>
-              <a:t>ETS, TBATS</a:t>
-            </a:r>
-            <a:r>
-              <a:rPr lang="ru-RU" sz="1800" dirty="0"/>
-              <a:t>, </a:t>
-            </a:r>
-            <a:r>
-              <a:rPr lang="en-US" sz="1800" dirty="0"/>
-              <a:t>Theta – </a:t>
-            </a:r>
-            <a:r>
-              <a:rPr lang="ru-RU" sz="1800" dirty="0"/>
-              <a:t>работают для относительно простых трендов (коротких выборок)</a:t>
-            </a:r>
-          </a:p>
-          <a:p>
-            <a:pPr marL="0" indent="0">
-              <a:lnSpc>
-                <a:spcPct val="100000"/>
-              </a:lnSpc>
-              <a:spcBef>
-                <a:spcPts val="0"/>
-              </a:spcBef>
-              <a:buNone/>
-            </a:pPr>
-            <a:r>
-              <a:rPr lang="ru-RU" sz="2000" b="1" dirty="0"/>
-              <a:t>Сложная множественная сезонность</a:t>
-            </a:r>
-          </a:p>
-          <a:p>
-            <a:pPr lvl="1">
-              <a:lnSpc>
-                <a:spcPct val="100000"/>
-              </a:lnSpc>
-              <a:spcBef>
-                <a:spcPts val="0"/>
-              </a:spcBef>
-            </a:pPr>
-            <a:r>
-              <a:rPr lang="ru-RU" sz="1800" dirty="0"/>
-              <a:t>Сезонность Может быть связна с внешними факторами (продаже зонтов от того насколько дождливый год)</a:t>
-            </a:r>
-          </a:p>
-          <a:p>
-            <a:pPr lvl="1">
-              <a:lnSpc>
-                <a:spcPct val="100000"/>
-              </a:lnSpc>
-              <a:spcBef>
-                <a:spcPts val="0"/>
-              </a:spcBef>
-            </a:pPr>
-            <a:r>
-              <a:rPr lang="en-US" sz="1800" dirty="0"/>
-              <a:t>STL, ETS, Theta – </a:t>
-            </a:r>
-            <a:r>
-              <a:rPr lang="ru-RU" sz="1800" dirty="0"/>
-              <a:t>простая сезонность 1-2 компоненты. На длинном горизонте может не работать</a:t>
-            </a:r>
-          </a:p>
-          <a:p>
-            <a:pPr lvl="1">
-              <a:lnSpc>
-                <a:spcPct val="100000"/>
-              </a:lnSpc>
-              <a:spcBef>
-                <a:spcPts val="0"/>
-              </a:spcBef>
-            </a:pPr>
-            <a:r>
-              <a:rPr lang="en-US" sz="1800" dirty="0"/>
-              <a:t>TBATS – </a:t>
-            </a:r>
-            <a:r>
-              <a:rPr lang="ru-RU" sz="1800" dirty="0"/>
-              <a:t>для простых трендов</a:t>
-            </a:r>
-          </a:p>
-          <a:p>
-            <a:pPr marL="0" indent="0">
-              <a:lnSpc>
-                <a:spcPct val="100000"/>
-              </a:lnSpc>
-              <a:spcBef>
-                <a:spcPts val="0"/>
-              </a:spcBef>
-              <a:buNone/>
-            </a:pPr>
-            <a:r>
-              <a:rPr lang="ru-RU" sz="2000" b="1" dirty="0"/>
-              <a:t>Можно напрямую формализовать модель со сложным поведением</a:t>
-            </a:r>
-            <a:r>
-              <a:rPr lang="ru-RU" sz="2000" dirty="0"/>
-              <a:t>. </a:t>
-            </a:r>
-          </a:p>
-          <a:p>
-            <a:pPr lvl="1">
-              <a:lnSpc>
-                <a:spcPct val="100000"/>
-              </a:lnSpc>
-              <a:spcBef>
-                <a:spcPts val="0"/>
-              </a:spcBef>
-            </a:pPr>
-            <a:r>
-              <a:rPr lang="ru-RU" sz="1800" dirty="0"/>
-              <a:t>Требует аналитики для правильно формализации модели</a:t>
-            </a:r>
-          </a:p>
-          <a:p>
-            <a:pPr lvl="1">
-              <a:lnSpc>
-                <a:spcPct val="100000"/>
-              </a:lnSpc>
-              <a:spcBef>
-                <a:spcPts val="0"/>
-              </a:spcBef>
-            </a:pPr>
-            <a:r>
-              <a:rPr lang="ru-RU" sz="1800" dirty="0"/>
-              <a:t>Можно заложить нестандартные паттерны (напр. праздничные дни, мигрирующие от года к году)</a:t>
-            </a:r>
-          </a:p>
-          <a:p>
-            <a:pPr lvl="1">
-              <a:lnSpc>
-                <a:spcPct val="100000"/>
-              </a:lnSpc>
-              <a:spcBef>
-                <a:spcPts val="0"/>
-              </a:spcBef>
-            </a:pPr>
-            <a:r>
-              <a:rPr lang="ru-RU" sz="1800" dirty="0"/>
-              <a:t>Можно заложить объясняющие переменные (демография – продажа памперсов)</a:t>
-            </a:r>
-          </a:p>
-          <a:p>
-            <a:pPr lvl="1">
-              <a:lnSpc>
-                <a:spcPct val="100000"/>
-              </a:lnSpc>
-              <a:spcBef>
-                <a:spcPts val="0"/>
-              </a:spcBef>
-            </a:pPr>
-            <a:r>
-              <a:rPr lang="ru-RU" sz="1800" dirty="0"/>
-              <a:t>Подход устойчив к нарушениям структурны (выбросы, пропуски, аномалии)</a:t>
-            </a:r>
-          </a:p>
-          <a:p>
-            <a:pPr lvl="1">
-              <a:lnSpc>
-                <a:spcPct val="100000"/>
-              </a:lnSpc>
-              <a:spcBef>
-                <a:spcPts val="0"/>
-              </a:spcBef>
-            </a:pPr>
-            <a:r>
-              <a:rPr lang="ru-RU" sz="1800" dirty="0"/>
-              <a:t>Модель работает онлайн</a:t>
-            </a:r>
-          </a:p>
-          <a:p>
-            <a:pPr lvl="1">
-              <a:lnSpc>
-                <a:spcPct val="100000"/>
-              </a:lnSpc>
-              <a:spcBef>
-                <a:spcPts val="0"/>
-              </a:spcBef>
-            </a:pPr>
-            <a:r>
-              <a:rPr lang="ru-RU" sz="1800" dirty="0"/>
-              <a:t>Результаты зависит то того на сколько модель соответствует жизни </a:t>
-            </a:r>
-          </a:p>
-          <a:p>
-            <a:pPr lvl="2">
-              <a:lnSpc>
-                <a:spcPct val="100000"/>
-              </a:lnSpc>
-              <a:spcBef>
-                <a:spcPts val="0"/>
-              </a:spcBef>
-            </a:pPr>
-            <a:r>
-              <a:rPr lang="ru-RU" sz="1800" dirty="0"/>
-              <a:t>Нарушение модельных условий сильно влияет на </a:t>
-            </a:r>
-            <a:r>
-              <a:rPr lang="ru-RU" sz="1800" dirty="0" err="1"/>
-              <a:t>результа</a:t>
-            </a:r>
-            <a:endParaRPr lang="ru-RU" sz="1800" dirty="0"/>
-          </a:p>
-          <a:p>
-            <a:pPr marL="0" indent="0">
-              <a:lnSpc>
-                <a:spcPct val="100000"/>
-              </a:lnSpc>
-              <a:spcBef>
-                <a:spcPts val="0"/>
-              </a:spcBef>
-              <a:buNone/>
-            </a:pPr>
-            <a:r>
-              <a:rPr lang="ru-RU" sz="2000" b="1" dirty="0" err="1"/>
-              <a:t>Generalized</a:t>
-            </a:r>
-            <a:r>
-              <a:rPr lang="ru-RU" sz="2000" b="1" dirty="0"/>
-              <a:t> </a:t>
-            </a:r>
-            <a:r>
-              <a:rPr lang="ru-RU" sz="2000" b="1" dirty="0" err="1"/>
-              <a:t>Adaptive</a:t>
-            </a:r>
-            <a:r>
-              <a:rPr lang="ru-RU" sz="2000" b="1" dirty="0"/>
-              <a:t> </a:t>
-            </a:r>
-            <a:r>
-              <a:rPr lang="ru-RU" sz="2000" b="1" dirty="0" err="1"/>
-              <a:t>Regression</a:t>
-            </a:r>
-            <a:r>
-              <a:rPr lang="ru-RU" sz="2000" b="1" dirty="0"/>
-              <a:t> (GAR) </a:t>
-            </a:r>
-            <a:r>
-              <a:rPr lang="ru-RU" sz="2000" dirty="0"/>
-              <a:t>— это класс моделей регрессии, которые адаптируются к изменяющимся условиям данных, особенно полезны при работе с нестационарными и сезонными временными рядами, GAR-методы позволяют гибко учитывать сложные зависимости, </a:t>
-            </a:r>
-            <a:endParaRPr lang="ru-RU" sz="1800" dirty="0"/>
+            <a:r>
+              <a:rPr lang="ru-RU" dirty="0"/>
+              <a:t>Пример: </a:t>
+            </a:r>
+            <a:r>
+              <a:rPr lang="en-US" dirty="0"/>
+              <a:t>STL </a:t>
+            </a:r>
+            <a:r>
+              <a:rPr lang="ru-RU" dirty="0"/>
+              <a:t>разложение + </a:t>
+            </a:r>
+            <a:r>
+              <a:rPr lang="en-US" dirty="0"/>
+              <a:t>SES </a:t>
+            </a:r>
+            <a:r>
+              <a:rPr lang="ru-RU" dirty="0"/>
+              <a:t>прогноз</a:t>
+            </a:r>
           </a:p>
         </p:txBody>
       </p:sp>
     </p:spTree>
     <p:extLst>
       <p:ext uri="{BB962C8B-B14F-4D97-AF65-F5344CB8AC3E}">
-        <p14:creationId xmlns:p14="http://schemas.microsoft.com/office/powerpoint/2010/main" val="2928553255"/>
+        <p14:creationId xmlns:p14="http://schemas.microsoft.com/office/powerpoint/2010/main" val="862783598"/>
       </p:ext>
     </p:extLst>
   </p:cSld>
@@ -15995,6 +16474,435 @@
         </p:nvSpPr>
         <p:spPr>
           <a:xfrm>
+            <a:off x="228600" y="182505"/>
+            <a:ext cx="10799154" cy="678555"/>
+          </a:xfrm>
+        </p:spPr>
+        <p:txBody>
+          <a:bodyPr>
+            <a:normAutofit fontScale="90000"/>
+          </a:bodyPr>
+          <a:lstStyle/>
+          <a:p>
+            <a:r>
+              <a:rPr lang="ru-RU" dirty="0"/>
+              <a:t>Использование Модели ВР</a:t>
+            </a:r>
+          </a:p>
+        </p:txBody>
+      </p:sp>
+      <p:sp>
+        <p:nvSpPr>
+          <p:cNvPr id="3" name="Объект 2"/>
+          <p:cNvSpPr>
+            <a:spLocks noGrp="1"/>
+          </p:cNvSpPr>
+          <p:nvPr>
+            <p:ph idx="1"/>
+          </p:nvPr>
+        </p:nvSpPr>
+        <p:spPr>
+          <a:xfrm>
+            <a:off x="228600" y="784860"/>
+            <a:ext cx="11963400" cy="5951220"/>
+          </a:xfrm>
+        </p:spPr>
+        <p:txBody>
+          <a:bodyPr>
+            <a:noAutofit/>
+          </a:bodyPr>
+          <a:lstStyle/>
+          <a:p>
+            <a:pPr marL="0" indent="0">
+              <a:lnSpc>
+                <a:spcPct val="100000"/>
+              </a:lnSpc>
+              <a:spcBef>
+                <a:spcPts val="0"/>
+              </a:spcBef>
+              <a:buNone/>
+            </a:pPr>
+            <a:r>
+              <a:rPr lang="ru-RU" sz="2000" b="1" dirty="0"/>
+              <a:t>Если ВР имеет сложный тренд со структурными изменениями </a:t>
+            </a:r>
+            <a:r>
+              <a:rPr lang="ru-RU" sz="1800" b="1" dirty="0"/>
+              <a:t>(новизна, точки перегиба, выбросы и пропуски)</a:t>
+            </a:r>
+          </a:p>
+          <a:p>
+            <a:pPr marL="0" indent="0">
+              <a:lnSpc>
+                <a:spcPct val="100000"/>
+              </a:lnSpc>
+              <a:spcBef>
+                <a:spcPts val="0"/>
+              </a:spcBef>
+              <a:buNone/>
+            </a:pPr>
+            <a:r>
+              <a:rPr lang="ru-RU" sz="2000" b="1" dirty="0"/>
+              <a:t>ВР требует обучения долгосрочной выборке и необходим длинный горизонт предсказания</a:t>
+            </a:r>
+          </a:p>
+          <a:p>
+            <a:pPr lvl="1">
+              <a:lnSpc>
+                <a:spcPct val="100000"/>
+              </a:lnSpc>
+              <a:spcBef>
+                <a:spcPts val="0"/>
+              </a:spcBef>
+            </a:pPr>
+            <a:r>
+              <a:rPr lang="en-US" sz="1800" dirty="0"/>
+              <a:t>STL – </a:t>
+            </a:r>
+            <a:r>
+              <a:rPr lang="ru-RU" sz="1800" dirty="0"/>
+              <a:t>сложность разложения зависит от объема выборки, работает преимущественно </a:t>
+            </a:r>
+            <a:r>
+              <a:rPr lang="en-US" sz="1800" dirty="0"/>
+              <a:t>offline</a:t>
+            </a:r>
+            <a:r>
+              <a:rPr lang="ru-RU" sz="1800" dirty="0"/>
+              <a:t>.</a:t>
+            </a:r>
+          </a:p>
+          <a:p>
+            <a:pPr lvl="1">
+              <a:lnSpc>
+                <a:spcPct val="100000"/>
+              </a:lnSpc>
+              <a:spcBef>
+                <a:spcPts val="0"/>
+              </a:spcBef>
+            </a:pPr>
+            <a:r>
+              <a:rPr lang="en-US" sz="1800" dirty="0"/>
+              <a:t>ETS, TBATS</a:t>
+            </a:r>
+            <a:r>
+              <a:rPr lang="ru-RU" sz="1800" dirty="0"/>
+              <a:t>, </a:t>
+            </a:r>
+            <a:r>
+              <a:rPr lang="en-US" sz="1800" dirty="0"/>
+              <a:t>Theta – </a:t>
+            </a:r>
+            <a:r>
+              <a:rPr lang="ru-RU" sz="1800" dirty="0"/>
+              <a:t>работают для относительно простых трендов (коротких выборок)</a:t>
+            </a:r>
+          </a:p>
+          <a:p>
+            <a:pPr marL="0" indent="0">
+              <a:lnSpc>
+                <a:spcPct val="100000"/>
+              </a:lnSpc>
+              <a:spcBef>
+                <a:spcPts val="0"/>
+              </a:spcBef>
+              <a:buNone/>
+            </a:pPr>
+            <a:r>
+              <a:rPr lang="ru-RU" sz="2000" b="1" dirty="0"/>
+              <a:t>Сложная множественная сезонность</a:t>
+            </a:r>
+          </a:p>
+          <a:p>
+            <a:pPr lvl="1">
+              <a:lnSpc>
+                <a:spcPct val="100000"/>
+              </a:lnSpc>
+              <a:spcBef>
+                <a:spcPts val="0"/>
+              </a:spcBef>
+            </a:pPr>
+            <a:r>
+              <a:rPr lang="ru-RU" sz="1800" dirty="0"/>
+              <a:t>Сезонность Может быть связна с внешними факторами (продаже зонтов от того насколько дождливый год)</a:t>
+            </a:r>
+          </a:p>
+          <a:p>
+            <a:pPr lvl="1">
+              <a:lnSpc>
+                <a:spcPct val="100000"/>
+              </a:lnSpc>
+              <a:spcBef>
+                <a:spcPts val="0"/>
+              </a:spcBef>
+            </a:pPr>
+            <a:r>
+              <a:rPr lang="en-US" sz="1800" dirty="0"/>
+              <a:t>STL, ETS, Theta – </a:t>
+            </a:r>
+            <a:r>
+              <a:rPr lang="ru-RU" sz="1800" dirty="0"/>
+              <a:t>простая сезонность 1-2 компоненты. На длинном горизонте может не работать</a:t>
+            </a:r>
+          </a:p>
+          <a:p>
+            <a:pPr lvl="1">
+              <a:lnSpc>
+                <a:spcPct val="100000"/>
+              </a:lnSpc>
+              <a:spcBef>
+                <a:spcPts val="0"/>
+              </a:spcBef>
+            </a:pPr>
+            <a:r>
+              <a:rPr lang="en-US" sz="1800" dirty="0"/>
+              <a:t>TBATS – </a:t>
+            </a:r>
+            <a:r>
+              <a:rPr lang="ru-RU" sz="1800" dirty="0"/>
+              <a:t>для простых трендов</a:t>
+            </a:r>
+          </a:p>
+          <a:p>
+            <a:pPr marL="0" indent="0">
+              <a:lnSpc>
+                <a:spcPct val="100000"/>
+              </a:lnSpc>
+              <a:spcBef>
+                <a:spcPts val="0"/>
+              </a:spcBef>
+              <a:buNone/>
+            </a:pPr>
+            <a:r>
+              <a:rPr lang="ru-RU" sz="2000" b="1" dirty="0"/>
+              <a:t>Можно напрямую формализовать модель со сложным поведением</a:t>
+            </a:r>
+            <a:r>
+              <a:rPr lang="ru-RU" sz="2000" dirty="0"/>
+              <a:t>. </a:t>
+            </a:r>
+          </a:p>
+          <a:p>
+            <a:pPr lvl="1">
+              <a:lnSpc>
+                <a:spcPct val="100000"/>
+              </a:lnSpc>
+              <a:spcBef>
+                <a:spcPts val="0"/>
+              </a:spcBef>
+            </a:pPr>
+            <a:r>
+              <a:rPr lang="ru-RU" sz="1800" dirty="0"/>
+              <a:t>Требует аналитики для правильно формализации модели</a:t>
+            </a:r>
+          </a:p>
+          <a:p>
+            <a:pPr lvl="1">
+              <a:lnSpc>
+                <a:spcPct val="100000"/>
+              </a:lnSpc>
+              <a:spcBef>
+                <a:spcPts val="0"/>
+              </a:spcBef>
+            </a:pPr>
+            <a:r>
+              <a:rPr lang="ru-RU" sz="1800" dirty="0"/>
+              <a:t>Можно заложить нестандартные паттерны (напр. праздничные дни, мигрирующие от года к году)</a:t>
+            </a:r>
+          </a:p>
+          <a:p>
+            <a:pPr lvl="1">
+              <a:lnSpc>
+                <a:spcPct val="100000"/>
+              </a:lnSpc>
+              <a:spcBef>
+                <a:spcPts val="0"/>
+              </a:spcBef>
+            </a:pPr>
+            <a:r>
+              <a:rPr lang="ru-RU" sz="1800" dirty="0"/>
+              <a:t>Можно заложить объясняющие переменные (демография – продажа памперсов)</a:t>
+            </a:r>
+          </a:p>
+          <a:p>
+            <a:pPr lvl="1">
+              <a:lnSpc>
+                <a:spcPct val="100000"/>
+              </a:lnSpc>
+              <a:spcBef>
+                <a:spcPts val="0"/>
+              </a:spcBef>
+            </a:pPr>
+            <a:r>
+              <a:rPr lang="ru-RU" sz="1800" dirty="0"/>
+              <a:t>Подход устойчив к нарушениям структурны (выбросы, пропуски, аномалии)</a:t>
+            </a:r>
+          </a:p>
+          <a:p>
+            <a:pPr lvl="1">
+              <a:lnSpc>
+                <a:spcPct val="100000"/>
+              </a:lnSpc>
+              <a:spcBef>
+                <a:spcPts val="0"/>
+              </a:spcBef>
+            </a:pPr>
+            <a:r>
+              <a:rPr lang="ru-RU" sz="1800" dirty="0"/>
+              <a:t>Модель работает онлайн</a:t>
+            </a:r>
+          </a:p>
+          <a:p>
+            <a:pPr lvl="1">
+              <a:lnSpc>
+                <a:spcPct val="100000"/>
+              </a:lnSpc>
+              <a:spcBef>
+                <a:spcPts val="0"/>
+              </a:spcBef>
+            </a:pPr>
+            <a:r>
+              <a:rPr lang="ru-RU" sz="1800" dirty="0"/>
+              <a:t>Результаты зависит то того на сколько модель соответствует жизни </a:t>
+            </a:r>
+          </a:p>
+          <a:p>
+            <a:pPr lvl="2">
+              <a:lnSpc>
+                <a:spcPct val="100000"/>
+              </a:lnSpc>
+              <a:spcBef>
+                <a:spcPts val="0"/>
+              </a:spcBef>
+            </a:pPr>
+            <a:r>
+              <a:rPr lang="ru-RU" sz="1800" dirty="0"/>
+              <a:t>Нарушение модельных условий сильно влияет на </a:t>
+            </a:r>
+            <a:r>
+              <a:rPr lang="ru-RU" sz="1800" dirty="0" err="1"/>
+              <a:t>результа</a:t>
+            </a:r>
+            <a:endParaRPr lang="ru-RU" sz="1800" dirty="0"/>
+          </a:p>
+          <a:p>
+            <a:pPr marL="0" indent="0">
+              <a:lnSpc>
+                <a:spcPct val="100000"/>
+              </a:lnSpc>
+              <a:spcBef>
+                <a:spcPts val="0"/>
+              </a:spcBef>
+              <a:buNone/>
+            </a:pPr>
+            <a:r>
+              <a:rPr lang="ru-RU" sz="2000" b="1" dirty="0" err="1"/>
+              <a:t>Generalized</a:t>
+            </a:r>
+            <a:r>
+              <a:rPr lang="ru-RU" sz="2000" b="1" dirty="0"/>
+              <a:t> </a:t>
+            </a:r>
+            <a:r>
+              <a:rPr lang="ru-RU" sz="2000" b="1" dirty="0" err="1"/>
+              <a:t>Adaptive</a:t>
+            </a:r>
+            <a:r>
+              <a:rPr lang="ru-RU" sz="2000" b="1" dirty="0"/>
+              <a:t> </a:t>
+            </a:r>
+            <a:r>
+              <a:rPr lang="ru-RU" sz="2000" b="1" dirty="0" err="1"/>
+              <a:t>Regression</a:t>
+            </a:r>
+            <a:r>
+              <a:rPr lang="ru-RU" sz="2000" b="1" dirty="0"/>
+              <a:t> (GAR) </a:t>
+            </a:r>
+            <a:r>
+              <a:rPr lang="ru-RU" sz="2000" dirty="0"/>
+              <a:t>— это класс моделей регрессии, которые адаптируются к изменяющимся условиям данных, особенно полезны при работе с нестационарными и сезонными временными рядами, GAR-методы позволяют гибко учитывать сложные </a:t>
+            </a:r>
+            <a:r>
+              <a:rPr lang="ru-RU" sz="2000" dirty="0" smtClean="0"/>
+              <a:t>зависимости</a:t>
+            </a:r>
+            <a:br>
+              <a:rPr lang="ru-RU" sz="2000" dirty="0" smtClean="0"/>
+            </a:br>
+            <a:r>
+              <a:rPr lang="ru-RU" sz="2000" dirty="0" smtClean="0"/>
+              <a:t> (см. </a:t>
+            </a:r>
+            <a:r>
+              <a:rPr lang="en-US" sz="2000" dirty="0" smtClean="0"/>
+              <a:t>MCMC </a:t>
+            </a:r>
+            <a:r>
+              <a:rPr lang="ru-RU" sz="2000" dirty="0" smtClean="0"/>
+              <a:t>и другие методы Байесовского вывода для </a:t>
+            </a:r>
+            <a:r>
+              <a:rPr lang="en-US" sz="2000" dirty="0" smtClean="0"/>
+              <a:t>GAR</a:t>
+            </a:r>
+            <a:r>
+              <a:rPr lang="ru-RU" sz="2000" dirty="0" smtClean="0"/>
+              <a:t> моделей).</a:t>
+            </a:r>
+            <a:endParaRPr lang="ru-RU" sz="1800" dirty="0"/>
+          </a:p>
+        </p:txBody>
+      </p:sp>
+    </p:spTree>
+    <p:extLst>
+      <p:ext uri="{BB962C8B-B14F-4D97-AF65-F5344CB8AC3E}">
+        <p14:creationId xmlns:p14="http://schemas.microsoft.com/office/powerpoint/2010/main" val="2928553255"/>
+      </p:ext>
+    </p:extLst>
+  </p:cSld>
+  <p:clrMapOvr>
+    <a:masterClrMapping/>
+  </p:clrMapOvr>
+  <p:timing>
+    <p:tnLst>
+      <p:par>
+        <p:cTn id="1" dur="indefinite" restart="never" nodeType="tmRoot"/>
+      </p:par>
+    </p:tnLst>
+  </p:timing>
+</p:sld>
+</file>
+
+<file path=ppt/slides/slide26.xml><?xml version="1.0" encoding="utf-8"?>
+<p:sld xmlns:a="http://schemas.openxmlformats.org/drawingml/2006/main" xmlns:r="http://schemas.openxmlformats.org/officeDocument/2006/relationships" xmlns:p="http://schemas.openxmlformats.org/presentationml/2006/main">
+  <p:cSld>
+    <p:spTree>
+      <p:nvGrpSpPr>
+        <p:cNvPr id="1" name=""/>
+        <p:cNvGrpSpPr/>
+        <p:nvPr/>
+      </p:nvGrpSpPr>
+      <p:grpSpPr>
+        <a:xfrm>
+          <a:off x="0" y="0"/>
+          <a:ext cx="0" cy="0"/>
+          <a:chOff x="0" y="0"/>
+          <a:chExt cx="0" cy="0"/>
+        </a:xfrm>
+      </p:grpSpPr>
+      <p:sp>
+        <p:nvSpPr>
+          <p:cNvPr id="2" name="Заголовок 1"/>
+          <p:cNvSpPr>
+            <a:spLocks noGrp="1"/>
+          </p:cNvSpPr>
+          <p:nvPr>
+            <p:ph type="title"/>
+          </p:nvPr>
+        </p:nvSpPr>
+        <p:spPr>
+          <a:xfrm>
             <a:off x="299103" y="365125"/>
             <a:ext cx="11054697" cy="549275"/>
           </a:xfrm>
@@ -16137,11 +17045,7 @@
             </a:r>
             <a:r>
               <a:rPr lang="ru-RU" dirty="0" smtClean="0"/>
-              <a:t>, в чем их особенность</a:t>
-            </a:r>
-            <a:r>
-              <a:rPr lang="ru-RU" dirty="0" smtClean="0"/>
-              <a:t>.</a:t>
+              <a:t>, в чем их особенность.</a:t>
             </a:r>
             <a:endParaRPr lang="en-US" dirty="0" smtClean="0"/>
           </a:p>
@@ -16168,7 +17072,7 @@
 </file>
 
 <file path=ppt/slides/slide3.xml><?xml version="1.0" encoding="utf-8"?>
-<p:sld xmlns:a="http://schemas.openxmlformats.org/drawingml/2006/main" xmlns:r="http://schemas.openxmlformats.org/officeDocument/2006/relationships" xmlns:p="http://schemas.openxmlformats.org/presentationml/2006/main" show="0">
+<p:sld xmlns:a="http://schemas.openxmlformats.org/drawingml/2006/main" xmlns:r="http://schemas.openxmlformats.org/officeDocument/2006/relationships" xmlns:p="http://schemas.openxmlformats.org/presentationml/2006/main">
   <p:cSld>
     <p:spTree>
       <p:nvGrpSpPr>
@@ -16222,286 +17126,651 @@
             </a:r>
             <a:r>
               <a:rPr lang="ru-RU" b="1" dirty="0"/>
-              <a:t>временных </a:t>
-            </a:r>
-            <a:r>
-              <a:rPr lang="ru-RU" b="1" dirty="0" smtClean="0"/>
-              <a:t>рядов </a:t>
-            </a:r>
-            <a:r>
-              <a:rPr lang="en-US" b="1" dirty="0" smtClean="0"/>
-              <a:t>Mixing</a:t>
+              <a:t>временных рядов</a:t>
             </a:r>
             <a:endParaRPr lang="en-US" b="1" dirty="0"/>
           </a:p>
         </p:txBody>
       </p:sp>
-      <p:sp>
-        <p:nvSpPr>
-          <p:cNvPr id="3" name="Объект 2">
-            <a:extLst>
-              <a:ext uri="{FF2B5EF4-FFF2-40B4-BE49-F238E27FC236}">
-                <a16:creationId xmlns:a16="http://schemas.microsoft.com/office/drawing/2014/main" id="{4CDB8E57-5CA8-497C-990E-C304F4FBE710}"/>
-              </a:ext>
-            </a:extLst>
-          </p:cNvPr>
-          <p:cNvSpPr>
-            <a:spLocks noGrp="1"/>
-          </p:cNvSpPr>
-          <p:nvPr>
-            <p:ph idx="1"/>
-          </p:nvPr>
-        </p:nvSpPr>
-        <p:spPr>
-          <a:xfrm>
-            <a:off x="209550" y="1114427"/>
-            <a:ext cx="11525249" cy="5545789"/>
-          </a:xfrm>
-        </p:spPr>
-        <p:txBody>
-          <a:bodyPr>
-            <a:normAutofit/>
-          </a:bodyPr>
-          <a:lstStyle/>
-          <a:p>
-            <a:pPr marL="0" indent="0" eaLnBrk="0" fontAlgn="base" hangingPunct="0">
-              <a:lnSpc>
-                <a:spcPct val="100000"/>
-              </a:lnSpc>
-              <a:spcBef>
-                <a:spcPct val="0"/>
-              </a:spcBef>
-              <a:spcAft>
-                <a:spcPct val="0"/>
-              </a:spcAft>
-              <a:buNone/>
-            </a:pPr>
-            <a:r>
-              <a:rPr lang="ru-RU" sz="2400" dirty="0" smtClean="0"/>
-              <a:t>ВР - </a:t>
-            </a:r>
-            <a:r>
-              <a:rPr lang="ru-RU" sz="2400" dirty="0"/>
-              <a:t>наблюдения не независимы (не </a:t>
-            </a:r>
-            <a:r>
-              <a:rPr lang="ru-RU" sz="2400" dirty="0" err="1"/>
-              <a:t>i.i.d</a:t>
-            </a:r>
-            <a:r>
-              <a:rPr lang="ru-RU" sz="2400" dirty="0"/>
-              <a:t>.). </a:t>
-            </a:r>
-            <a:endParaRPr lang="ru-RU" sz="2400" dirty="0" smtClean="0"/>
-          </a:p>
-          <a:p>
-            <a:pPr marL="0" indent="0" eaLnBrk="0" fontAlgn="base" hangingPunct="0">
-              <a:lnSpc>
-                <a:spcPct val="100000"/>
-              </a:lnSpc>
-              <a:spcBef>
-                <a:spcPct val="0"/>
-              </a:spcBef>
-              <a:spcAft>
-                <a:spcPct val="0"/>
-              </a:spcAft>
-              <a:buNone/>
-            </a:pPr>
-            <a:r>
-              <a:rPr lang="ru-RU" sz="2400" dirty="0"/>
-              <a:t>	</a:t>
-            </a:r>
-            <a:r>
-              <a:rPr lang="ru-RU" sz="2400" dirty="0" smtClean="0"/>
-              <a:t>Между </a:t>
-            </a:r>
-            <a:r>
-              <a:rPr lang="ru-RU" sz="2400" dirty="0"/>
-              <a:t>близкими по времени точками существует сильная зависимость. </a:t>
-            </a:r>
-            <a:endParaRPr lang="ru-RU" sz="2400" dirty="0" smtClean="0"/>
-          </a:p>
-          <a:p>
-            <a:pPr marL="0" indent="0" eaLnBrk="0" fontAlgn="base" hangingPunct="0">
-              <a:lnSpc>
-                <a:spcPct val="100000"/>
-              </a:lnSpc>
-              <a:spcBef>
-                <a:spcPct val="0"/>
-              </a:spcBef>
-              <a:spcAft>
-                <a:spcPct val="0"/>
-              </a:spcAft>
-              <a:buNone/>
-            </a:pPr>
-            <a:r>
-              <a:rPr lang="ru-RU" sz="2400" dirty="0" smtClean="0"/>
-              <a:t>Классическая </a:t>
-            </a:r>
-            <a:r>
-              <a:rPr lang="ru-RU" sz="2400" dirty="0"/>
-              <a:t>статистическая теория обучения </a:t>
-            </a:r>
-            <a:r>
-              <a:rPr lang="ru-RU" sz="2400" dirty="0" smtClean="0"/>
-              <a:t>для </a:t>
-            </a:r>
-            <a:r>
-              <a:rPr lang="en-US" sz="2400" dirty="0" smtClean="0"/>
-              <a:t>TS </a:t>
-            </a:r>
-            <a:r>
-              <a:rPr lang="ru-RU" sz="2400" dirty="0" smtClean="0"/>
-              <a:t>моделей часто </a:t>
-            </a:r>
-            <a:r>
-              <a:rPr lang="ru-RU" sz="2400" dirty="0"/>
-              <a:t>требует независимости, поэтому для зависимых данных вводят условия перемешивания (</a:t>
-            </a:r>
-            <a:r>
-              <a:rPr lang="ru-RU" sz="2400" dirty="0" err="1"/>
-              <a:t>mixing</a:t>
-            </a:r>
-            <a:r>
-              <a:rPr lang="ru-RU" sz="2400" dirty="0"/>
-              <a:t> </a:t>
-            </a:r>
-            <a:r>
-              <a:rPr lang="ru-RU" sz="2400" dirty="0" err="1"/>
-              <a:t>conditions</a:t>
-            </a:r>
-            <a:r>
-              <a:rPr lang="ru-RU" sz="2400" dirty="0"/>
-              <a:t>). </a:t>
-            </a:r>
-            <a:endParaRPr lang="ru-RU" sz="2400" dirty="0" smtClean="0"/>
-          </a:p>
-          <a:p>
-            <a:pPr marL="0" indent="0" eaLnBrk="0" fontAlgn="base" hangingPunct="0">
-              <a:lnSpc>
-                <a:spcPct val="100000"/>
-              </a:lnSpc>
-              <a:spcBef>
-                <a:spcPct val="0"/>
-              </a:spcBef>
-              <a:spcAft>
-                <a:spcPct val="0"/>
-              </a:spcAft>
-              <a:buNone/>
-            </a:pPr>
-            <a:r>
-              <a:rPr lang="ru-RU" sz="2400" dirty="0" smtClean="0"/>
-              <a:t>Они </a:t>
-            </a:r>
-            <a:r>
-              <a:rPr lang="ru-RU" sz="2400" dirty="0"/>
-              <a:t>измеряют, насколько быстро зависимость между прошлым и будущим ослабевает со временем.</a:t>
-            </a:r>
-          </a:p>
-          <a:p>
-            <a:pPr marL="0" indent="0" eaLnBrk="0" fontAlgn="base" hangingPunct="0">
-              <a:lnSpc>
-                <a:spcPct val="100000"/>
-              </a:lnSpc>
-              <a:spcBef>
-                <a:spcPct val="0"/>
-              </a:spcBef>
-              <a:spcAft>
-                <a:spcPct val="0"/>
-              </a:spcAft>
-              <a:buNone/>
-            </a:pPr>
-            <a:r>
-              <a:rPr lang="el-GR" sz="2400" b="1" dirty="0"/>
-              <a:t>α-</a:t>
-            </a:r>
-            <a:r>
-              <a:rPr lang="en-US" sz="2400" b="1" dirty="0" smtClean="0"/>
-              <a:t>mixing</a:t>
-            </a:r>
-            <a:r>
-              <a:rPr lang="ru-RU" sz="2400" b="1" dirty="0" smtClean="0"/>
-              <a:t> – быстрое затухание по экспоненциальном или полиномиальному закону (большинство наших процессов, полином на очень длинном горизонте)</a:t>
-            </a:r>
-            <a:r>
-              <a:rPr lang="ru-RU" sz="2400" dirty="0" smtClean="0"/>
-              <a:t/>
-            </a:r>
-            <a:br>
-              <a:rPr lang="ru-RU" sz="2400" dirty="0" smtClean="0"/>
-            </a:br>
-            <a:r>
-              <a:rPr lang="el-GR" sz="2400" dirty="0"/>
-              <a:t>β-</a:t>
-            </a:r>
-            <a:r>
-              <a:rPr lang="en-US" sz="2400" dirty="0" smtClean="0"/>
-              <a:t>mixing</a:t>
-            </a:r>
-            <a:r>
-              <a:rPr lang="ru-RU" sz="2400" dirty="0" smtClean="0"/>
-              <a:t> – текстовые данные (Марковские цепи, линейное затухание)</a:t>
-            </a:r>
-          </a:p>
-          <a:p>
-            <a:pPr marL="0" indent="0" eaLnBrk="0" fontAlgn="base" hangingPunct="0">
-              <a:lnSpc>
-                <a:spcPct val="100000"/>
-              </a:lnSpc>
-              <a:spcBef>
-                <a:spcPct val="0"/>
-              </a:spcBef>
-              <a:spcAft>
-                <a:spcPct val="0"/>
-              </a:spcAft>
-              <a:buNone/>
-            </a:pPr>
-            <a:r>
-              <a:rPr lang="el-GR" sz="2400" dirty="0"/>
-              <a:t>φ-</a:t>
-            </a:r>
-            <a:r>
-              <a:rPr lang="en-US" sz="2400" dirty="0" smtClean="0"/>
-              <a:t>mixing</a:t>
-            </a:r>
-            <a:r>
-              <a:rPr lang="ru-RU" sz="2400" dirty="0" smtClean="0"/>
-              <a:t> – без </a:t>
-            </a:r>
-            <a:r>
-              <a:rPr lang="en-US" sz="2400" dirty="0" smtClean="0"/>
-              <a:t> </a:t>
-            </a:r>
-            <a:r>
-              <a:rPr lang="ru-RU" sz="2400" dirty="0" smtClean="0"/>
-              <a:t>затухания (таблицы, изображения)</a:t>
-            </a:r>
-            <a:endParaRPr lang="en-US" sz="2400" dirty="0"/>
-          </a:p>
-          <a:p>
-            <a:pPr marL="0" indent="0" eaLnBrk="0" fontAlgn="base" hangingPunct="0">
-              <a:lnSpc>
-                <a:spcPct val="100000"/>
-              </a:lnSpc>
-              <a:spcBef>
-                <a:spcPct val="0"/>
-              </a:spcBef>
-              <a:spcAft>
-                <a:spcPct val="0"/>
-              </a:spcAft>
-              <a:buNone/>
-            </a:pPr>
-            <a:r>
-              <a:rPr lang="ru-RU" sz="2400" dirty="0" smtClean="0"/>
-              <a:t/>
-            </a:r>
-            <a:br>
-              <a:rPr lang="ru-RU" sz="2400" dirty="0" smtClean="0"/>
-            </a:br>
-            <a:endParaRPr lang="ru-RU" altLang="en-US" sz="2200" i="1" dirty="0" smtClean="0"/>
-          </a:p>
-        </p:txBody>
-      </p:sp>
+      <mc:AlternateContent xmlns:mc="http://schemas.openxmlformats.org/markup-compatibility/2006">
+        <mc:Choice xmlns:a14="http://schemas.microsoft.com/office/drawing/2010/main" Requires="a14">
+          <p:sp>
+            <p:nvSpPr>
+              <p:cNvPr id="3" name="Объект 2">
+                <a:extLst>
+                  <a:ext uri="{FF2B5EF4-FFF2-40B4-BE49-F238E27FC236}">
+                    <a16:creationId xmlns:a16="http://schemas.microsoft.com/office/drawing/2014/main" id="{4CDB8E57-5CA8-497C-990E-C304F4FBE710}"/>
+                  </a:ext>
+                </a:extLst>
+              </p:cNvPr>
+              <p:cNvSpPr>
+                <a:spLocks noGrp="1"/>
+              </p:cNvSpPr>
+              <p:nvPr>
+                <p:ph idx="1"/>
+              </p:nvPr>
+            </p:nvSpPr>
+            <p:spPr>
+              <a:xfrm>
+                <a:off x="209550" y="1114427"/>
+                <a:ext cx="11525249" cy="5545789"/>
+              </a:xfrm>
+            </p:spPr>
+            <p:txBody>
+              <a:bodyPr>
+                <a:normAutofit/>
+              </a:bodyPr>
+              <a:lstStyle/>
+              <a:p>
+                <a:pPr marL="0" indent="0" eaLnBrk="0" fontAlgn="base" hangingPunct="0">
+                  <a:lnSpc>
+                    <a:spcPct val="100000"/>
+                  </a:lnSpc>
+                  <a:spcBef>
+                    <a:spcPct val="0"/>
+                  </a:spcBef>
+                  <a:spcAft>
+                    <a:spcPct val="0"/>
+                  </a:spcAft>
+                  <a:buNone/>
+                </a:pPr>
+                <a:endParaRPr lang="ru-RU" altLang="en-US" sz="2200" i="1" dirty="0" smtClean="0"/>
+              </a:p>
+              <a:p>
+                <a:pPr marL="0" indent="0" eaLnBrk="0" fontAlgn="base" hangingPunct="0">
+                  <a:lnSpc>
+                    <a:spcPct val="100000"/>
+                  </a:lnSpc>
+                  <a:spcBef>
+                    <a:spcPct val="0"/>
+                  </a:spcBef>
+                  <a:spcAft>
+                    <a:spcPct val="0"/>
+                  </a:spcAft>
+                  <a:buNone/>
+                </a:pPr>
+                <a:r>
+                  <a:rPr lang="ru-RU" altLang="en-US" sz="2200" i="1" dirty="0"/>
+                  <a:t>Модель </a:t>
+                </a:r>
+                <a:r>
+                  <a:rPr lang="ru-RU" altLang="en-US" sz="2200" i="1" dirty="0" smtClean="0"/>
+                  <a:t>для которых явно можно выделить тренд, но также и другие составляющие</a:t>
+                </a:r>
+                <a:endParaRPr lang="ru-RU" altLang="en-US" sz="2200" i="1" dirty="0"/>
+              </a:p>
+              <a:p>
+                <a:pPr marL="0" indent="0" algn="ctr" eaLnBrk="0" fontAlgn="base" hangingPunct="0">
+                  <a:lnSpc>
+                    <a:spcPct val="100000"/>
+                  </a:lnSpc>
+                  <a:spcBef>
+                    <a:spcPct val="0"/>
+                  </a:spcBef>
+                  <a:spcAft>
+                    <a:spcPct val="0"/>
+                  </a:spcAft>
+                  <a:buNone/>
+                </a:pPr>
+                <a14:m>
+                  <m:oMathPara xmlns:m="http://schemas.openxmlformats.org/officeDocument/2006/math">
+                    <m:oMathParaPr>
+                      <m:jc m:val="centerGroup"/>
+                    </m:oMathParaPr>
+                    <m:oMath xmlns:m="http://schemas.openxmlformats.org/officeDocument/2006/math">
+                      <m:sSub>
+                        <m:sSubPr>
+                          <m:ctrlPr>
+                            <a:rPr lang="ru-RU" altLang="en-US" sz="2400" b="0" i="1" dirty="0" smtClean="0">
+                              <a:latin typeface="Cambria Math" panose="02040503050406030204" pitchFamily="18" charset="0"/>
+                            </a:rPr>
+                          </m:ctrlPr>
+                        </m:sSubPr>
+                        <m:e>
+                          <m:r>
+                            <m:rPr>
+                              <m:sty m:val="p"/>
+                            </m:rPr>
+                            <a:rPr lang="en-US" altLang="en-US" sz="2400" i="1" dirty="0">
+                              <a:latin typeface="Cambria Math" panose="02040503050406030204" pitchFamily="18" charset="0"/>
+                            </a:rPr>
+                            <m:t>y</m:t>
+                          </m:r>
+                        </m:e>
+                        <m:sub>
+                          <m:r>
+                            <a:rPr lang="en-US" altLang="en-US" sz="2400" b="0" i="1" dirty="0" smtClean="0">
+                              <a:latin typeface="Cambria Math" panose="02040503050406030204" pitchFamily="18" charset="0"/>
+                            </a:rPr>
+                            <m:t>𝑇𝑆</m:t>
+                          </m:r>
+                        </m:sub>
+                      </m:sSub>
+                      <m:r>
+                        <a:rPr lang="en-US" altLang="en-US" sz="2400" i="1" dirty="0">
+                          <a:latin typeface="Cambria Math" panose="02040503050406030204" pitchFamily="18" charset="0"/>
+                        </a:rPr>
+                        <m:t>(</m:t>
+                      </m:r>
+                      <m:r>
+                        <a:rPr lang="en-US" altLang="en-US" sz="2400" i="1" dirty="0">
+                          <a:latin typeface="Cambria Math" panose="02040503050406030204" pitchFamily="18" charset="0"/>
+                        </a:rPr>
+                        <m:t>𝑡</m:t>
+                      </m:r>
+                      <m:r>
+                        <a:rPr lang="en-US" altLang="en-US" sz="2400" i="1" dirty="0">
+                          <a:latin typeface="Cambria Math" panose="02040503050406030204" pitchFamily="18" charset="0"/>
+                        </a:rPr>
+                        <m:t>) = </m:t>
+                      </m:r>
+                      <m:r>
+                        <a:rPr lang="en-US" altLang="en-US" sz="2400" i="1" dirty="0">
+                          <a:latin typeface="Cambria Math" panose="02040503050406030204" pitchFamily="18" charset="0"/>
+                        </a:rPr>
+                        <m:t>𝑡𝑟𝑒𝑛𝑑</m:t>
+                      </m:r>
+                      <m:r>
+                        <a:rPr lang="en-US" altLang="en-US" sz="2400" i="1" dirty="0">
+                          <a:latin typeface="Cambria Math" panose="02040503050406030204" pitchFamily="18" charset="0"/>
+                        </a:rPr>
+                        <m:t>(</m:t>
+                      </m:r>
+                      <m:r>
+                        <a:rPr lang="en-US" altLang="en-US" sz="2400" i="1" dirty="0">
+                          <a:latin typeface="Cambria Math" panose="02040503050406030204" pitchFamily="18" charset="0"/>
+                        </a:rPr>
+                        <m:t>𝑡</m:t>
+                      </m:r>
+                      <m:r>
+                        <a:rPr lang="en-US" altLang="en-US" sz="2400" i="1" dirty="0">
+                          <a:latin typeface="Cambria Math" panose="02040503050406030204" pitchFamily="18" charset="0"/>
+                        </a:rPr>
+                        <m:t>)+</m:t>
+                      </m:r>
+                      <m:nary>
+                        <m:naryPr>
+                          <m:chr m:val="∑"/>
+                          <m:ctrlPr>
+                            <a:rPr lang="en-US" altLang="en-US" sz="2400" i="1" dirty="0">
+                              <a:latin typeface="Cambria Math" panose="02040503050406030204" pitchFamily="18" charset="0"/>
+                            </a:rPr>
+                          </m:ctrlPr>
+                        </m:naryPr>
+                        <m:sub>
+                          <m:r>
+                            <a:rPr lang="en-US" altLang="en-US" sz="2400" i="1" dirty="0" err="1">
+                              <a:latin typeface="Cambria Math" panose="02040503050406030204" pitchFamily="18" charset="0"/>
+                            </a:rPr>
+                            <m:t>𝑖</m:t>
+                          </m:r>
+                          <m:r>
+                            <a:rPr lang="en-US" altLang="en-US" sz="2400" i="1" dirty="0">
+                              <a:latin typeface="Cambria Math" panose="02040503050406030204" pitchFamily="18" charset="0"/>
+                            </a:rPr>
+                            <m:t>=0</m:t>
+                          </m:r>
+                        </m:sub>
+                        <m:sup>
+                          <m:r>
+                            <a:rPr lang="en-US" altLang="en-US" sz="2400" i="1" dirty="0">
+                              <a:latin typeface="Cambria Math" panose="02040503050406030204" pitchFamily="18" charset="0"/>
+                            </a:rPr>
+                            <m:t>𝑀</m:t>
+                          </m:r>
+                        </m:sup>
+                        <m:e>
+                          <m:r>
+                            <a:rPr lang="en-US" altLang="en-US" sz="2400" i="1" dirty="0">
+                              <a:latin typeface="Cambria Math" panose="02040503050406030204" pitchFamily="18" charset="0"/>
+                            </a:rPr>
+                            <m:t>𝑠𝑒𝑎𝑠𝑜𝑛𝑎𝑙</m:t>
+                          </m:r>
+                          <m:r>
+                            <a:rPr lang="en-US" altLang="en-US" sz="2400" i="1" dirty="0">
+                              <a:latin typeface="Cambria Math" panose="02040503050406030204" pitchFamily="18" charset="0"/>
+                            </a:rPr>
+                            <m:t>(</m:t>
+                          </m:r>
+                          <m:r>
+                            <a:rPr lang="en-US" altLang="en-US" sz="2400" i="1" dirty="0">
+                              <a:latin typeface="Cambria Math" panose="02040503050406030204" pitchFamily="18" charset="0"/>
+                            </a:rPr>
+                            <m:t>𝑡</m:t>
+                          </m:r>
+                          <m:r>
+                            <a:rPr lang="en-US" altLang="en-US" sz="2400" i="1" dirty="0">
+                              <a:latin typeface="Cambria Math" panose="02040503050406030204" pitchFamily="18" charset="0"/>
+                            </a:rPr>
+                            <m:t>)</m:t>
+                          </m:r>
+                        </m:e>
+                      </m:nary>
+                      <m:r>
+                        <a:rPr lang="en-US" altLang="en-US" sz="2400" i="1" dirty="0">
+                          <a:latin typeface="Cambria Math" panose="02040503050406030204" pitchFamily="18" charset="0"/>
+                        </a:rPr>
+                        <m:t> +</m:t>
+                      </m:r>
+                      <m:r>
+                        <a:rPr lang="en-US" altLang="en-US" sz="2400" b="0" i="1" dirty="0" smtClean="0">
+                          <a:latin typeface="Cambria Math" panose="02040503050406030204" pitchFamily="18" charset="0"/>
+                        </a:rPr>
+                        <m:t>𝑟𝑒𝑠𝑖𝑑𝑢𝑎𝑙</m:t>
+                      </m:r>
+                      <m:r>
+                        <a:rPr lang="en-US" altLang="en-US" sz="2400" i="1" dirty="0">
+                          <a:latin typeface="Cambria Math" panose="02040503050406030204" pitchFamily="18" charset="0"/>
+                        </a:rPr>
+                        <m:t>(</m:t>
+                      </m:r>
+                      <m:r>
+                        <a:rPr lang="en-US" altLang="en-US" sz="2400" i="1" dirty="0">
+                          <a:latin typeface="Cambria Math" panose="02040503050406030204" pitchFamily="18" charset="0"/>
+                        </a:rPr>
+                        <m:t>𝑡</m:t>
+                      </m:r>
+                      <m:r>
+                        <a:rPr lang="en-US" altLang="en-US" sz="2400" i="1" dirty="0">
+                          <a:latin typeface="Cambria Math" panose="02040503050406030204" pitchFamily="18" charset="0"/>
+                        </a:rPr>
+                        <m:t>)</m:t>
+                      </m:r>
+                    </m:oMath>
+                  </m:oMathPara>
+                </a14:m>
+                <a:endParaRPr lang="ru-RU" altLang="en-US" sz="2000" dirty="0">
+                  <a:latin typeface="Open Sans"/>
+                </a:endParaRPr>
+              </a:p>
+              <a:p>
+                <a:pPr marL="0" indent="0" eaLnBrk="0" fontAlgn="base" hangingPunct="0">
+                  <a:lnSpc>
+                    <a:spcPct val="100000"/>
+                  </a:lnSpc>
+                  <a:spcBef>
+                    <a:spcPct val="0"/>
+                  </a:spcBef>
+                  <a:spcAft>
+                    <a:spcPct val="0"/>
+                  </a:spcAft>
+                  <a:buNone/>
+                </a:pPr>
+                <a:r>
+                  <a:rPr lang="ru-RU" altLang="en-US" sz="2000" dirty="0">
+                    <a:latin typeface="Open Sans"/>
+                  </a:rPr>
+                  <a:t>Или </a:t>
+                </a:r>
+                <a:r>
+                  <a:rPr lang="ru-RU" altLang="en-US" sz="2000" dirty="0" smtClean="0">
+                    <a:latin typeface="Open Sans"/>
+                  </a:rPr>
+                  <a:t>мультипликативная модель</a:t>
+                </a:r>
+                <a:endParaRPr lang="ru-RU" altLang="en-US" sz="2000" dirty="0">
+                  <a:latin typeface="Open Sans"/>
+                </a:endParaRPr>
+              </a:p>
+              <a:p>
+                <a:pPr marL="0" indent="0" algn="ctr" eaLnBrk="0" fontAlgn="base" hangingPunct="0">
+                  <a:lnSpc>
+                    <a:spcPct val="100000"/>
+                  </a:lnSpc>
+                  <a:spcBef>
+                    <a:spcPct val="0"/>
+                  </a:spcBef>
+                  <a:spcAft>
+                    <a:spcPct val="0"/>
+                  </a:spcAft>
+                  <a:buNone/>
+                </a:pPr>
+                <a14:m>
+                  <m:oMath xmlns:m="http://schemas.openxmlformats.org/officeDocument/2006/math">
+                    <m:r>
+                      <a:rPr lang="en-US" altLang="en-US" sz="2000" i="1" dirty="0">
+                        <a:latin typeface="Cambria Math" panose="02040503050406030204" pitchFamily="18" charset="0"/>
+                      </a:rPr>
+                      <m:t>𝑦</m:t>
+                    </m:r>
+                    <m:d>
+                      <m:dPr>
+                        <m:ctrlPr>
+                          <a:rPr lang="en-US" altLang="en-US" sz="2000" i="1" dirty="0">
+                            <a:latin typeface="Cambria Math" panose="02040503050406030204" pitchFamily="18" charset="0"/>
+                          </a:rPr>
+                        </m:ctrlPr>
+                      </m:dPr>
+                      <m:e>
+                        <m:r>
+                          <a:rPr lang="en-US" altLang="en-US" sz="2000" i="1" dirty="0">
+                            <a:latin typeface="Cambria Math" panose="02040503050406030204" pitchFamily="18" charset="0"/>
+                          </a:rPr>
+                          <m:t>𝑡</m:t>
+                        </m:r>
+                      </m:e>
+                    </m:d>
+                    <m:r>
+                      <a:rPr lang="en-US" altLang="en-US" sz="2000" i="1" dirty="0">
+                        <a:latin typeface="Cambria Math" panose="02040503050406030204" pitchFamily="18" charset="0"/>
+                      </a:rPr>
+                      <m:t>= </m:t>
+                    </m:r>
+                    <m:r>
+                      <a:rPr lang="en-US" altLang="en-US" sz="2000" i="1" dirty="0">
+                        <a:latin typeface="Cambria Math" panose="02040503050406030204" pitchFamily="18" charset="0"/>
+                      </a:rPr>
+                      <m:t>𝑡𝑟𝑒𝑛𝑑</m:t>
+                    </m:r>
+                    <m:d>
+                      <m:dPr>
+                        <m:ctrlPr>
+                          <a:rPr lang="en-US" altLang="en-US" sz="2000" i="1" dirty="0">
+                            <a:latin typeface="Cambria Math" panose="02040503050406030204" pitchFamily="18" charset="0"/>
+                          </a:rPr>
+                        </m:ctrlPr>
+                      </m:dPr>
+                      <m:e>
+                        <m:r>
+                          <a:rPr lang="en-US" altLang="en-US" sz="2000" i="1" dirty="0">
+                            <a:latin typeface="Cambria Math" panose="02040503050406030204" pitchFamily="18" charset="0"/>
+                          </a:rPr>
+                          <m:t>𝑡</m:t>
+                        </m:r>
+                      </m:e>
+                    </m:d>
+                    <m:r>
+                      <a:rPr lang="en-US" altLang="en-US" sz="2000" i="1" dirty="0">
+                        <a:latin typeface="Cambria Math" panose="02040503050406030204" pitchFamily="18" charset="0"/>
+                      </a:rPr>
+                      <m:t>⋅</m:t>
+                    </m:r>
+                    <m:d>
+                      <m:dPr>
+                        <m:ctrlPr>
+                          <a:rPr lang="ru-RU" altLang="en-US" sz="2000" b="0" i="1" dirty="0" smtClean="0">
+                            <a:latin typeface="Cambria Math" panose="02040503050406030204" pitchFamily="18" charset="0"/>
+                          </a:rPr>
+                        </m:ctrlPr>
+                      </m:dPr>
+                      <m:e>
+                        <m:nary>
+                          <m:naryPr>
+                            <m:chr m:val="∑"/>
+                            <m:ctrlPr>
+                              <a:rPr lang="en-US" altLang="en-US" sz="2000" i="1" dirty="0">
+                                <a:latin typeface="Cambria Math" panose="02040503050406030204" pitchFamily="18" charset="0"/>
+                              </a:rPr>
+                            </m:ctrlPr>
+                          </m:naryPr>
+                          <m:sub>
+                            <m:r>
+                              <a:rPr lang="en-US" altLang="en-US" sz="2000" i="1" dirty="0" err="1">
+                                <a:latin typeface="Cambria Math" panose="02040503050406030204" pitchFamily="18" charset="0"/>
+                              </a:rPr>
+                              <m:t>𝑖</m:t>
+                            </m:r>
+                            <m:r>
+                              <a:rPr lang="en-US" altLang="en-US" sz="2000" i="1" dirty="0">
+                                <a:latin typeface="Cambria Math" panose="02040503050406030204" pitchFamily="18" charset="0"/>
+                              </a:rPr>
+                              <m:t>=0</m:t>
+                            </m:r>
+                          </m:sub>
+                          <m:sup>
+                            <m:r>
+                              <a:rPr lang="en-US" altLang="en-US" sz="2000" i="1" dirty="0">
+                                <a:latin typeface="Cambria Math" panose="02040503050406030204" pitchFamily="18" charset="0"/>
+                              </a:rPr>
+                              <m:t>𝑀</m:t>
+                            </m:r>
+                          </m:sup>
+                          <m:e>
+                            <m:r>
+                              <a:rPr lang="en-US" altLang="en-US" sz="2000" i="1" dirty="0">
+                                <a:latin typeface="Cambria Math" panose="02040503050406030204" pitchFamily="18" charset="0"/>
+                              </a:rPr>
+                              <m:t>𝑠𝑒𝑎𝑠𝑜𝑛𝑎𝑙</m:t>
+                            </m:r>
+                            <m:d>
+                              <m:dPr>
+                                <m:ctrlPr>
+                                  <a:rPr lang="en-US" altLang="en-US" sz="2000" i="1" dirty="0">
+                                    <a:latin typeface="Cambria Math" panose="02040503050406030204" pitchFamily="18" charset="0"/>
+                                  </a:rPr>
+                                </m:ctrlPr>
+                              </m:dPr>
+                              <m:e>
+                                <m:r>
+                                  <a:rPr lang="en-US" altLang="en-US" sz="2000" i="1" dirty="0">
+                                    <a:latin typeface="Cambria Math" panose="02040503050406030204" pitchFamily="18" charset="0"/>
+                                  </a:rPr>
+                                  <m:t>𝑡</m:t>
+                                </m:r>
+                              </m:e>
+                            </m:d>
+                          </m:e>
+                        </m:nary>
+                      </m:e>
+                    </m:d>
+                    <m:r>
+                      <a:rPr lang="en-US" altLang="en-US" sz="2000" b="0" i="1" dirty="0" smtClean="0">
+                        <a:latin typeface="Cambria Math" panose="02040503050406030204" pitchFamily="18" charset="0"/>
+                      </a:rPr>
+                      <m:t>⋅</m:t>
+                    </m:r>
+                    <m:r>
+                      <a:rPr lang="en-US" altLang="en-US" sz="2000" b="0" i="1" dirty="0" smtClean="0">
+                        <a:latin typeface="Cambria Math" panose="02040503050406030204" pitchFamily="18" charset="0"/>
+                      </a:rPr>
+                      <m:t>𝑟𝑒𝑠𝑖𝑑𝑢𝑎𝑙</m:t>
+                    </m:r>
+                    <m:r>
+                      <a:rPr lang="en-US" altLang="en-US" sz="2000" i="1" dirty="0">
+                        <a:latin typeface="Cambria Math" panose="02040503050406030204" pitchFamily="18" charset="0"/>
+                      </a:rPr>
+                      <m:t>(</m:t>
+                    </m:r>
+                    <m:r>
+                      <a:rPr lang="en-US" altLang="en-US" sz="2000" i="1" dirty="0">
+                        <a:latin typeface="Cambria Math" panose="02040503050406030204" pitchFamily="18" charset="0"/>
+                      </a:rPr>
+                      <m:t>𝑡</m:t>
+                    </m:r>
+                  </m:oMath>
+                </a14:m>
+                <a:r>
+                  <a:rPr lang="en-US" altLang="en-US" sz="2000" i="1" dirty="0"/>
+                  <a:t>). </a:t>
+                </a:r>
+                <a:endParaRPr lang="en-US" altLang="en-US" sz="2000" i="1" dirty="0" smtClean="0"/>
+              </a:p>
+              <a:p>
+                <a:pPr marL="0" indent="0" algn="ctr" eaLnBrk="0" fontAlgn="base" hangingPunct="0">
+                  <a:lnSpc>
+                    <a:spcPct val="100000"/>
+                  </a:lnSpc>
+                  <a:spcBef>
+                    <a:spcPct val="0"/>
+                  </a:spcBef>
+                  <a:spcAft>
+                    <a:spcPct val="0"/>
+                  </a:spcAft>
+                  <a:buNone/>
+                </a:pPr>
+                <a:r>
+                  <a:rPr lang="ru-RU" altLang="en-US" sz="2000" i="1" dirty="0" smtClean="0"/>
+                  <a:t>Могут быть и более сложные модели</a:t>
+                </a:r>
+                <a:endParaRPr lang="en-US" altLang="en-US" sz="2000" i="1" dirty="0"/>
+              </a:p>
+              <a:p>
+                <a:pPr eaLnBrk="0" fontAlgn="base" hangingPunct="0">
+                  <a:lnSpc>
+                    <a:spcPct val="100000"/>
+                  </a:lnSpc>
+                  <a:spcBef>
+                    <a:spcPct val="0"/>
+                  </a:spcBef>
+                  <a:spcAft>
+                    <a:spcPct val="0"/>
+                  </a:spcAft>
+                </a:pPr>
+                <a:endParaRPr lang="ru-RU" altLang="en-US" sz="2000" dirty="0" smtClean="0">
+                  <a:latin typeface="Open Sans"/>
+                </a:endParaRPr>
+              </a:p>
+              <a:p>
+                <a:pPr eaLnBrk="0" fontAlgn="base" hangingPunct="0">
+                  <a:lnSpc>
+                    <a:spcPct val="100000"/>
+                  </a:lnSpc>
+                  <a:spcBef>
+                    <a:spcPct val="0"/>
+                  </a:spcBef>
+                  <a:spcAft>
+                    <a:spcPct val="0"/>
+                  </a:spcAft>
+                </a:pPr>
+                <a:endParaRPr lang="ru-RU" altLang="en-US" sz="2000" dirty="0">
+                  <a:latin typeface="Open Sans"/>
+                </a:endParaRPr>
+              </a:p>
+              <a:p>
+                <a:pPr eaLnBrk="0" fontAlgn="base" hangingPunct="0">
+                  <a:lnSpc>
+                    <a:spcPct val="100000"/>
+                  </a:lnSpc>
+                  <a:spcBef>
+                    <a:spcPct val="0"/>
+                  </a:spcBef>
+                  <a:spcAft>
+                    <a:spcPct val="0"/>
+                  </a:spcAft>
+                </a:pPr>
+                <a:endParaRPr lang="ru-RU" altLang="en-US" sz="2000" dirty="0" smtClean="0">
+                  <a:latin typeface="Open Sans"/>
+                </a:endParaRPr>
+              </a:p>
+              <a:p>
+                <a:pPr eaLnBrk="0" fontAlgn="base" hangingPunct="0">
+                  <a:lnSpc>
+                    <a:spcPct val="100000"/>
+                  </a:lnSpc>
+                  <a:spcBef>
+                    <a:spcPct val="0"/>
+                  </a:spcBef>
+                  <a:spcAft>
+                    <a:spcPct val="0"/>
+                  </a:spcAft>
+                </a:pPr>
+                <a:endParaRPr lang="ru-RU" altLang="en-US" sz="2000" dirty="0">
+                  <a:latin typeface="Open Sans"/>
+                </a:endParaRPr>
+              </a:p>
+              <a:p>
+                <a:pPr eaLnBrk="0" fontAlgn="base" hangingPunct="0">
+                  <a:lnSpc>
+                    <a:spcPct val="100000"/>
+                  </a:lnSpc>
+                  <a:spcBef>
+                    <a:spcPct val="0"/>
+                  </a:spcBef>
+                  <a:spcAft>
+                    <a:spcPct val="0"/>
+                  </a:spcAft>
+                </a:pPr>
+                <a:endParaRPr lang="ru-RU" altLang="en-US" sz="2000" dirty="0" smtClean="0">
+                  <a:latin typeface="Open Sans"/>
+                </a:endParaRPr>
+              </a:p>
+              <a:p>
+                <a:pPr eaLnBrk="0" fontAlgn="base" hangingPunct="0">
+                  <a:lnSpc>
+                    <a:spcPct val="100000"/>
+                  </a:lnSpc>
+                  <a:spcBef>
+                    <a:spcPct val="0"/>
+                  </a:spcBef>
+                  <a:spcAft>
+                    <a:spcPct val="0"/>
+                  </a:spcAft>
+                </a:pPr>
+                <a:r>
+                  <a:rPr lang="ru-RU" altLang="en-US" sz="2000" dirty="0" smtClean="0">
+                    <a:latin typeface="Open Sans"/>
+                  </a:rPr>
+                  <a:t>Другие типы моделей: </a:t>
+                </a:r>
+                <a:r>
+                  <a:rPr lang="en-US" altLang="en-US" sz="2000" dirty="0" smtClean="0">
+                    <a:latin typeface="Open Sans"/>
+                  </a:rPr>
+                  <a:t>DS </a:t>
+                </a:r>
+                <a:r>
+                  <a:rPr lang="ru-RU" altLang="en-US" sz="2000" dirty="0" smtClean="0">
+                    <a:latin typeface="Open Sans"/>
+                  </a:rPr>
+                  <a:t>модели: </a:t>
+                </a:r>
+                <a:r>
+                  <a:rPr lang="en-US" altLang="en-US" sz="2000" dirty="0" smtClean="0">
+                    <a:latin typeface="Open Sans"/>
+                  </a:rPr>
+                  <a:t>y(t)=a_0y(t-1)+a_1y(t-2) + … </a:t>
+                </a:r>
+                <a:endParaRPr lang="en-US" altLang="en-US" sz="2000" dirty="0">
+                  <a:latin typeface="Open Sans"/>
+                </a:endParaRPr>
+              </a:p>
+            </p:txBody>
+          </p:sp>
+        </mc:Choice>
+        <mc:Fallback>
+          <p:sp>
+            <p:nvSpPr>
+              <p:cNvPr id="3" name="Объект 2">
+                <a:extLst>
+                  <a:ext uri="{FF2B5EF4-FFF2-40B4-BE49-F238E27FC236}">
+                    <a16:creationId xmlns:a16="http://schemas.microsoft.com/office/drawing/2014/main" id="{4CDB8E57-5CA8-497C-990E-C304F4FBE710}"/>
+                  </a:ext>
+                </a:extLst>
+              </p:cNvPr>
+              <p:cNvSpPr>
+                <a:spLocks noGrp="1" noRot="1" noChangeAspect="1" noMove="1" noResize="1" noEditPoints="1" noAdjustHandles="1" noChangeArrowheads="1" noChangeShapeType="1" noTextEdit="1"/>
+              </p:cNvSpPr>
+              <p:nvPr>
+                <p:ph idx="1"/>
+              </p:nvPr>
+            </p:nvSpPr>
+            <p:spPr>
+              <a:xfrm>
+                <a:off x="209550" y="1114427"/>
+                <a:ext cx="11525249" cy="5545789"/>
+              </a:xfrm>
+              <a:blipFill>
+                <a:blip r:embed="rId2"/>
+                <a:stretch>
+                  <a:fillRect l="-687"/>
+                </a:stretch>
+              </a:blipFill>
+            </p:spPr>
+            <p:txBody>
+              <a:bodyPr/>
+              <a:lstStyle/>
+              <a:p>
+                <a:r>
+                  <a:rPr lang="ru-RU">
+                    <a:noFill/>
+                  </a:rPr>
+                  <a:t> </a:t>
+                </a:r>
+              </a:p>
+            </p:txBody>
+          </p:sp>
+        </mc:Fallback>
+      </mc:AlternateContent>
       <p:sp>
         <p:nvSpPr>
           <p:cNvPr id="7" name="Номер слайда 6">
@@ -16748,6 +18017,635 @@
           </a:p>
         </p:txBody>
       </p:sp>
+      <p:sp>
+        <p:nvSpPr>
+          <p:cNvPr id="9" name="Прямоугольник 8"/>
+          <p:cNvSpPr/>
+          <p:nvPr/>
+        </p:nvSpPr>
+        <p:spPr>
+          <a:xfrm>
+            <a:off x="209550" y="6290884"/>
+            <a:ext cx="5065489" cy="369332"/>
+          </a:xfrm>
+          <a:prstGeom prst="rect">
+            <a:avLst/>
+          </a:prstGeom>
+        </p:spPr>
+        <p:txBody>
+          <a:bodyPr wrap="none">
+            <a:spAutoFit/>
+          </a:bodyPr>
+          <a:lstStyle/>
+          <a:p>
+            <a:r>
+              <a:rPr lang="ru-RU" dirty="0"/>
+              <a:t>https://openforecast.org/adam/tsComponents.html</a:t>
+            </a:r>
+          </a:p>
+        </p:txBody>
+      </p:sp>
+    </p:spTree>
+    <p:extLst>
+      <p:ext uri="{BB962C8B-B14F-4D97-AF65-F5344CB8AC3E}">
+        <p14:creationId xmlns:p14="http://schemas.microsoft.com/office/powerpoint/2010/main" val="2605955941"/>
+      </p:ext>
+    </p:extLst>
+  </p:cSld>
+  <p:clrMapOvr>
+    <a:masterClrMapping/>
+  </p:clrMapOvr>
+  <p:timing>
+    <p:tnLst>
+      <p:par>
+        <p:cTn id="1" dur="indefinite" restart="never" nodeType="tmRoot"/>
+      </p:par>
+    </p:tnLst>
+  </p:timing>
+</p:sld>
+</file>
+
+<file path=ppt/slides/slide4.xml><?xml version="1.0" encoding="utf-8"?>
+<p:sld xmlns:a="http://schemas.openxmlformats.org/drawingml/2006/main" xmlns:r="http://schemas.openxmlformats.org/officeDocument/2006/relationships" xmlns:p="http://schemas.openxmlformats.org/presentationml/2006/main" show="0">
+  <p:cSld>
+    <p:spTree>
+      <p:nvGrpSpPr>
+        <p:cNvPr id="1" name=""/>
+        <p:cNvGrpSpPr/>
+        <p:nvPr/>
+      </p:nvGrpSpPr>
+      <p:grpSpPr>
+        <a:xfrm>
+          <a:off x="0" y="0"/>
+          <a:ext cx="0" cy="0"/>
+          <a:chOff x="0" y="0"/>
+          <a:chExt cx="0" cy="0"/>
+        </a:xfrm>
+      </p:grpSpPr>
+      <p:sp>
+        <p:nvSpPr>
+          <p:cNvPr id="2" name="Заголовок 1">
+            <a:extLst>
+              <a:ext uri="{FF2B5EF4-FFF2-40B4-BE49-F238E27FC236}">
+                <a16:creationId xmlns:a16="http://schemas.microsoft.com/office/drawing/2014/main" id="{79B0BEDB-9774-4E17-9A6B-DBCF6A1F528F}"/>
+              </a:ext>
+            </a:extLst>
+          </p:cNvPr>
+          <p:cNvSpPr>
+            <a:spLocks noGrp="1"/>
+          </p:cNvSpPr>
+          <p:nvPr>
+            <p:ph type="title"/>
+          </p:nvPr>
+        </p:nvSpPr>
+        <p:spPr>
+          <a:xfrm>
+            <a:off x="1576070" y="197786"/>
+            <a:ext cx="9849485" cy="1325563"/>
+          </a:xfrm>
+        </p:spPr>
+        <p:txBody>
+          <a:bodyPr>
+            <a:normAutofit/>
+          </a:bodyPr>
+          <a:lstStyle/>
+          <a:p>
+            <a:r>
+              <a:rPr lang="en-US" b="1" dirty="0" smtClean="0"/>
+              <a:t>TS-</a:t>
+            </a:r>
+            <a:r>
+              <a:rPr lang="ru-RU" b="1" dirty="0" smtClean="0"/>
+              <a:t>Модели </a:t>
+            </a:r>
+            <a:r>
+              <a:rPr lang="ru-RU" b="1" dirty="0"/>
+              <a:t>временных </a:t>
+            </a:r>
+            <a:r>
+              <a:rPr lang="ru-RU" b="1" dirty="0" smtClean="0"/>
+              <a:t>рядов </a:t>
+            </a:r>
+            <a:r>
+              <a:rPr lang="en-US" b="1" dirty="0" smtClean="0"/>
+              <a:t>Mixing</a:t>
+            </a:r>
+            <a:endParaRPr lang="en-US" b="1" dirty="0"/>
+          </a:p>
+        </p:txBody>
+      </p:sp>
+      <p:sp>
+        <p:nvSpPr>
+          <p:cNvPr id="3" name="Объект 2">
+            <a:extLst>
+              <a:ext uri="{FF2B5EF4-FFF2-40B4-BE49-F238E27FC236}">
+                <a16:creationId xmlns:a16="http://schemas.microsoft.com/office/drawing/2014/main" id="{4CDB8E57-5CA8-497C-990E-C304F4FBE710}"/>
+              </a:ext>
+            </a:extLst>
+          </p:cNvPr>
+          <p:cNvSpPr>
+            <a:spLocks noGrp="1"/>
+          </p:cNvSpPr>
+          <p:nvPr>
+            <p:ph idx="1"/>
+          </p:nvPr>
+        </p:nvSpPr>
+        <p:spPr>
+          <a:xfrm>
+            <a:off x="209550" y="1114427"/>
+            <a:ext cx="11525249" cy="5545789"/>
+          </a:xfrm>
+        </p:spPr>
+        <p:txBody>
+          <a:bodyPr>
+            <a:normAutofit/>
+          </a:bodyPr>
+          <a:lstStyle/>
+          <a:p>
+            <a:pPr marL="0" indent="0" eaLnBrk="0" fontAlgn="base" hangingPunct="0">
+              <a:lnSpc>
+                <a:spcPct val="100000"/>
+              </a:lnSpc>
+              <a:spcBef>
+                <a:spcPct val="0"/>
+              </a:spcBef>
+              <a:spcAft>
+                <a:spcPct val="0"/>
+              </a:spcAft>
+              <a:buNone/>
+            </a:pPr>
+            <a:r>
+              <a:rPr lang="ru-RU" sz="2400" dirty="0" smtClean="0"/>
+              <a:t>ВР - </a:t>
+            </a:r>
+            <a:r>
+              <a:rPr lang="ru-RU" sz="2400" dirty="0"/>
+              <a:t>наблюдения не независимы (не </a:t>
+            </a:r>
+            <a:r>
+              <a:rPr lang="ru-RU" sz="2400" dirty="0" err="1"/>
+              <a:t>i.i.d</a:t>
+            </a:r>
+            <a:r>
+              <a:rPr lang="ru-RU" sz="2400" dirty="0"/>
+              <a:t>.). </a:t>
+            </a:r>
+            <a:endParaRPr lang="ru-RU" sz="2400" dirty="0" smtClean="0"/>
+          </a:p>
+          <a:p>
+            <a:pPr marL="0" indent="0" eaLnBrk="0" fontAlgn="base" hangingPunct="0">
+              <a:lnSpc>
+                <a:spcPct val="100000"/>
+              </a:lnSpc>
+              <a:spcBef>
+                <a:spcPct val="0"/>
+              </a:spcBef>
+              <a:spcAft>
+                <a:spcPct val="0"/>
+              </a:spcAft>
+              <a:buNone/>
+            </a:pPr>
+            <a:r>
+              <a:rPr lang="ru-RU" sz="2400" dirty="0"/>
+              <a:t>	</a:t>
+            </a:r>
+            <a:r>
+              <a:rPr lang="ru-RU" sz="2400" dirty="0" smtClean="0"/>
+              <a:t>Между </a:t>
+            </a:r>
+            <a:r>
+              <a:rPr lang="ru-RU" sz="2400" dirty="0"/>
+              <a:t>близкими по времени точками существует сильная зависимость. </a:t>
+            </a:r>
+            <a:endParaRPr lang="ru-RU" sz="2400" dirty="0" smtClean="0"/>
+          </a:p>
+          <a:p>
+            <a:pPr marL="0" indent="0" eaLnBrk="0" fontAlgn="base" hangingPunct="0">
+              <a:lnSpc>
+                <a:spcPct val="100000"/>
+              </a:lnSpc>
+              <a:spcBef>
+                <a:spcPct val="0"/>
+              </a:spcBef>
+              <a:spcAft>
+                <a:spcPct val="0"/>
+              </a:spcAft>
+              <a:buNone/>
+            </a:pPr>
+            <a:r>
+              <a:rPr lang="ru-RU" sz="2400" dirty="0" smtClean="0"/>
+              <a:t>Классическая </a:t>
+            </a:r>
+            <a:r>
+              <a:rPr lang="ru-RU" sz="2400" dirty="0"/>
+              <a:t>статистическая теория обучения </a:t>
+            </a:r>
+            <a:r>
+              <a:rPr lang="ru-RU" sz="2400" dirty="0" smtClean="0"/>
+              <a:t>для </a:t>
+            </a:r>
+            <a:r>
+              <a:rPr lang="en-US" sz="2400" dirty="0" smtClean="0"/>
+              <a:t>TS </a:t>
+            </a:r>
+            <a:r>
+              <a:rPr lang="ru-RU" sz="2400" dirty="0" smtClean="0"/>
+              <a:t>моделей часто </a:t>
+            </a:r>
+            <a:r>
+              <a:rPr lang="ru-RU" sz="2400" dirty="0"/>
+              <a:t>требует независимости, поэтому для зависимых данных вводят условия перемешивания (</a:t>
+            </a:r>
+            <a:r>
+              <a:rPr lang="ru-RU" sz="2400" dirty="0" err="1"/>
+              <a:t>mixing</a:t>
+            </a:r>
+            <a:r>
+              <a:rPr lang="ru-RU" sz="2400" dirty="0"/>
+              <a:t> </a:t>
+            </a:r>
+            <a:r>
+              <a:rPr lang="ru-RU" sz="2400" dirty="0" err="1"/>
+              <a:t>conditions</a:t>
+            </a:r>
+            <a:r>
+              <a:rPr lang="ru-RU" sz="2400" dirty="0"/>
+              <a:t>). </a:t>
+            </a:r>
+            <a:endParaRPr lang="ru-RU" sz="2400" dirty="0" smtClean="0"/>
+          </a:p>
+          <a:p>
+            <a:pPr marL="0" indent="0" eaLnBrk="0" fontAlgn="base" hangingPunct="0">
+              <a:lnSpc>
+                <a:spcPct val="100000"/>
+              </a:lnSpc>
+              <a:spcBef>
+                <a:spcPct val="0"/>
+              </a:spcBef>
+              <a:spcAft>
+                <a:spcPct val="0"/>
+              </a:spcAft>
+              <a:buNone/>
+            </a:pPr>
+            <a:r>
+              <a:rPr lang="ru-RU" sz="2400" dirty="0" smtClean="0"/>
+              <a:t>Они </a:t>
+            </a:r>
+            <a:r>
+              <a:rPr lang="ru-RU" sz="2400" dirty="0"/>
+              <a:t>измеряют, насколько быстро зависимость между прошлым и будущим ослабевает со временем.</a:t>
+            </a:r>
+          </a:p>
+          <a:p>
+            <a:pPr marL="0" indent="0" eaLnBrk="0" fontAlgn="base" hangingPunct="0">
+              <a:lnSpc>
+                <a:spcPct val="100000"/>
+              </a:lnSpc>
+              <a:spcBef>
+                <a:spcPct val="0"/>
+              </a:spcBef>
+              <a:spcAft>
+                <a:spcPct val="0"/>
+              </a:spcAft>
+              <a:buNone/>
+            </a:pPr>
+            <a:r>
+              <a:rPr lang="el-GR" sz="2400" b="1" dirty="0"/>
+              <a:t>α-</a:t>
+            </a:r>
+            <a:r>
+              <a:rPr lang="en-US" sz="2400" b="1" dirty="0" smtClean="0"/>
+              <a:t>mixing</a:t>
+            </a:r>
+            <a:r>
+              <a:rPr lang="ru-RU" sz="2400" b="1" dirty="0" smtClean="0"/>
+              <a:t> – быстрое затухание по экспоненциальном или полиномиальному закону (большинство наших процессов, полином на очень длинном горизонте)</a:t>
+            </a:r>
+            <a:r>
+              <a:rPr lang="ru-RU" sz="2400" dirty="0" smtClean="0"/>
+              <a:t/>
+            </a:r>
+            <a:br>
+              <a:rPr lang="ru-RU" sz="2400" dirty="0" smtClean="0"/>
+            </a:br>
+            <a:r>
+              <a:rPr lang="el-GR" sz="2400" dirty="0"/>
+              <a:t>β-</a:t>
+            </a:r>
+            <a:r>
+              <a:rPr lang="en-US" sz="2400" dirty="0" smtClean="0"/>
+              <a:t>mixing</a:t>
+            </a:r>
+            <a:r>
+              <a:rPr lang="ru-RU" sz="2400" dirty="0" smtClean="0"/>
+              <a:t> – текстовые данные (Марковские цепи, линейное затухание)</a:t>
+            </a:r>
+          </a:p>
+          <a:p>
+            <a:pPr marL="0" indent="0" eaLnBrk="0" fontAlgn="base" hangingPunct="0">
+              <a:lnSpc>
+                <a:spcPct val="100000"/>
+              </a:lnSpc>
+              <a:spcBef>
+                <a:spcPct val="0"/>
+              </a:spcBef>
+              <a:spcAft>
+                <a:spcPct val="0"/>
+              </a:spcAft>
+              <a:buNone/>
+            </a:pPr>
+            <a:r>
+              <a:rPr lang="el-GR" sz="2400" dirty="0"/>
+              <a:t>φ-</a:t>
+            </a:r>
+            <a:r>
+              <a:rPr lang="en-US" sz="2400" dirty="0" smtClean="0"/>
+              <a:t>mixing</a:t>
+            </a:r>
+            <a:r>
+              <a:rPr lang="ru-RU" sz="2400" dirty="0" smtClean="0"/>
+              <a:t> – без </a:t>
+            </a:r>
+            <a:r>
+              <a:rPr lang="en-US" sz="2400" dirty="0" smtClean="0"/>
+              <a:t> </a:t>
+            </a:r>
+            <a:r>
+              <a:rPr lang="ru-RU" sz="2400" dirty="0" smtClean="0"/>
+              <a:t>затухания (таблицы, изображения)</a:t>
+            </a:r>
+            <a:endParaRPr lang="en-US" sz="2400" dirty="0"/>
+          </a:p>
+          <a:p>
+            <a:pPr marL="0" indent="0" eaLnBrk="0" fontAlgn="base" hangingPunct="0">
+              <a:lnSpc>
+                <a:spcPct val="100000"/>
+              </a:lnSpc>
+              <a:spcBef>
+                <a:spcPct val="0"/>
+              </a:spcBef>
+              <a:spcAft>
+                <a:spcPct val="0"/>
+              </a:spcAft>
+              <a:buNone/>
+            </a:pPr>
+            <a:r>
+              <a:rPr lang="ru-RU" sz="2400" dirty="0" smtClean="0"/>
+              <a:t/>
+            </a:r>
+            <a:br>
+              <a:rPr lang="ru-RU" sz="2400" dirty="0" smtClean="0"/>
+            </a:br>
+            <a:endParaRPr lang="ru-RU" altLang="en-US" sz="2200" i="1" dirty="0" smtClean="0"/>
+          </a:p>
+        </p:txBody>
+      </p:sp>
+      <p:sp>
+        <p:nvSpPr>
+          <p:cNvPr id="7" name="Номер слайда 6">
+            <a:extLst>
+              <a:ext uri="{FF2B5EF4-FFF2-40B4-BE49-F238E27FC236}">
+                <a16:creationId xmlns:a16="http://schemas.microsoft.com/office/drawing/2014/main" id="{A07EF2B8-3D80-AB22-FA4B-F0655B9EAE6F}"/>
+              </a:ext>
+            </a:extLst>
+          </p:cNvPr>
+          <p:cNvSpPr>
+            <a:spLocks noGrp="1"/>
+          </p:cNvSpPr>
+          <p:nvPr>
+            <p:ph type="sldNum" sz="quarter" idx="12"/>
+          </p:nvPr>
+        </p:nvSpPr>
+        <p:spPr/>
+        <p:txBody>
+          <a:bodyPr/>
+          <a:lstStyle/>
+          <a:p>
+            <a:fld id="{45C3B737-A709-4ABC-AFE0-A6B067850C48}" type="slidenum">
+              <a:rPr lang="en-US" smtClean="0"/>
+              <a:t>4</a:t>
+            </a:fld>
+            <a:endParaRPr lang="en-US"/>
+          </a:p>
+        </p:txBody>
+      </p:sp>
+      <p:sp>
+        <p:nvSpPr>
+          <p:cNvPr id="5" name="Rectangle 231">
+            <a:extLst>
+              <a:ext uri="{FF2B5EF4-FFF2-40B4-BE49-F238E27FC236}">
+                <a16:creationId xmlns:a16="http://schemas.microsoft.com/office/drawing/2014/main" id="{57F50B8E-A23A-4154-9A0C-994DE115ACE6}"/>
+              </a:ext>
+            </a:extLst>
+          </p:cNvPr>
+          <p:cNvSpPr>
+            <a:spLocks noChangeArrowheads="1"/>
+          </p:cNvSpPr>
+          <p:nvPr/>
+        </p:nvSpPr>
+        <p:spPr bwMode="auto">
+          <a:xfrm>
+            <a:off x="6167756" y="4477386"/>
+            <a:ext cx="52071" cy="10795"/>
+          </a:xfrm>
+          <a:prstGeom prst="rect">
+            <a:avLst/>
+          </a:prstGeom>
+          <a:solidFill>
+            <a:srgbClr val="000000"/>
+          </a:solidFill>
+          <a:ln>
+            <a:noFill/>
+          </a:ln>
+          <a:extLst>
+            <a:ext uri="{91240B29-F687-4F45-9708-019B960494DF}">
+              <a14:hiddenLine xmlns:a14="http://schemas.microsoft.com/office/drawing/2010/main" w="9525">
+                <a:solidFill>
+                  <a:srgbClr val="000000"/>
+                </a:solidFill>
+                <a:miter lim="800000"/>
+                <a:headEnd/>
+                <a:tailEnd/>
+              </a14:hiddenLine>
+            </a:ext>
+          </a:extLst>
+        </p:spPr>
+        <p:txBody>
+          <a:bodyPr rot="0" vert="horz" wrap="square" lIns="91440" tIns="45720" rIns="91440" bIns="45720" anchor="t" anchorCtr="0" upright="1">
+            <a:noAutofit/>
+          </a:bodyPr>
+          <a:lstStyle/>
+          <a:p>
+            <a:endParaRPr lang="en-US" sz="1351"/>
+          </a:p>
+        </p:txBody>
+      </p:sp>
+      <p:sp>
+        <p:nvSpPr>
+          <p:cNvPr id="6" name="Rectangle 3">
+            <a:extLst>
+              <a:ext uri="{FF2B5EF4-FFF2-40B4-BE49-F238E27FC236}">
+                <a16:creationId xmlns:a16="http://schemas.microsoft.com/office/drawing/2014/main" id="{66C52228-8C94-4CF2-AD63-BA9617333BA2}"/>
+              </a:ext>
+            </a:extLst>
+          </p:cNvPr>
+          <p:cNvSpPr>
+            <a:spLocks noChangeArrowheads="1"/>
+          </p:cNvSpPr>
+          <p:nvPr/>
+        </p:nvSpPr>
+        <p:spPr bwMode="auto">
+          <a:xfrm>
+            <a:off x="-1523999" y="124999"/>
+            <a:ext cx="184731" cy="677108"/>
+          </a:xfrm>
+          <a:prstGeom prst="rect">
+            <a:avLst/>
+          </a:prstGeom>
+          <a:noFill/>
+          <a:ln>
+            <a:noFill/>
+          </a:ln>
+          <a:effectLst/>
+          <a:extLst>
+            <a:ext uri="{909E8E84-426E-40DD-AFC4-6F175D3DCCD1}">
+              <a14:hiddenFill xmlns:a14="http://schemas.microsoft.com/office/drawing/2010/main">
+                <a:solidFill>
+                  <a:schemeClr val="accent1"/>
+                </a:solidFill>
+              </a14:hiddenFill>
+            </a:ext>
+            <a:ext uri="{91240B29-F687-4F45-9708-019B960494DF}">
+              <a14:hiddenLine xmlns:a14="http://schemas.microsoft.com/office/drawing/2010/main" w="9525">
+                <a:solidFill>
+                  <a:schemeClr val="tx1"/>
+                </a:solidFill>
+                <a:miter lim="800000"/>
+                <a:headEnd/>
+                <a:tailEnd/>
+              </a14:hiddenLine>
+            </a:ext>
+            <a:ext uri="{AF507438-7753-43E0-B8FC-AC1667EBCBE1}">
+              <a14:hiddenEffects xmlns:a14="http://schemas.microsoft.com/office/drawing/2010/main">
+                <a:effectLst>
+                  <a:outerShdw dist="35921" dir="2700000" algn="ctr" rotWithShape="0">
+                    <a:schemeClr val="bg2"/>
+                  </a:outerShdw>
+                </a:effectLst>
+              </a14:hiddenEffects>
+            </a:ext>
+          </a:extLst>
+        </p:spPr>
+        <p:txBody>
+          <a:bodyPr vert="horz" wrap="none" lIns="91440" tIns="45720" rIns="91440" bIns="45720" numCol="1" anchor="ctr" anchorCtr="0" compatLnSpc="1">
+            <a:prstTxWarp prst="textNoShape">
+              <a:avLst/>
+            </a:prstTxWarp>
+            <a:spAutoFit/>
+          </a:bodyPr>
+          <a:lstStyle/>
+          <a:p>
+            <a:pPr eaLnBrk="0" fontAlgn="base" hangingPunct="0">
+              <a:spcBef>
+                <a:spcPct val="0"/>
+              </a:spcBef>
+              <a:spcAft>
+                <a:spcPct val="0"/>
+              </a:spcAft>
+            </a:pPr>
+            <a:r>
+              <a:rPr lang="en-US" altLang="en-US" sz="1400">
+                <a:latin typeface="Arial" panose="020B0604020202020204" pitchFamily="34" charset="0"/>
+                <a:ea typeface="Times New Roman" panose="02020603050405020304" pitchFamily="18" charset="0"/>
+              </a:rPr>
+              <a:t/>
+            </a:r>
+            <a:br>
+              <a:rPr lang="en-US" altLang="en-US" sz="1400">
+                <a:latin typeface="Arial" panose="020B0604020202020204" pitchFamily="34" charset="0"/>
+                <a:ea typeface="Times New Roman" panose="02020603050405020304" pitchFamily="18" charset="0"/>
+              </a:rPr>
+            </a:br>
+            <a:endParaRPr lang="en-US" altLang="en-US" sz="2400">
+              <a:latin typeface="Arial" panose="020B0604020202020204" pitchFamily="34" charset="0"/>
+            </a:endParaRPr>
+          </a:p>
+        </p:txBody>
+      </p:sp>
+      <p:sp>
+        <p:nvSpPr>
+          <p:cNvPr id="4" name="Rectangle 1">
+            <a:extLst>
+              <a:ext uri="{FF2B5EF4-FFF2-40B4-BE49-F238E27FC236}">
+                <a16:creationId xmlns:a16="http://schemas.microsoft.com/office/drawing/2014/main" id="{4ECA1DAD-475E-4D0B-A20A-17535DDD41A8}"/>
+              </a:ext>
+            </a:extLst>
+          </p:cNvPr>
+          <p:cNvSpPr>
+            <a:spLocks noChangeArrowheads="1"/>
+          </p:cNvSpPr>
+          <p:nvPr/>
+        </p:nvSpPr>
+        <p:spPr bwMode="auto">
+          <a:xfrm>
+            <a:off x="-1523999" y="43935"/>
+            <a:ext cx="65" cy="369332"/>
+          </a:xfrm>
+          <a:prstGeom prst="rect">
+            <a:avLst/>
+          </a:prstGeom>
+          <a:solidFill>
+            <a:srgbClr val="FFFFFF"/>
+          </a:solidFill>
+          <a:ln>
+            <a:noFill/>
+          </a:ln>
+          <a:effectLst/>
+          <a:extLst>
+            <a:ext uri="{91240B29-F687-4F45-9708-019B960494DF}">
+              <a14:hiddenLine xmlns:a14="http://schemas.microsoft.com/office/drawing/2010/main" w="9525">
+                <a:solidFill>
+                  <a:schemeClr val="tx1"/>
+                </a:solidFill>
+                <a:miter lim="800000"/>
+                <a:headEnd/>
+                <a:tailEnd/>
+              </a14:hiddenLine>
+            </a:ext>
+            <a:ext uri="{AF507438-7753-43E0-B8FC-AC1667EBCBE1}">
+              <a14:hiddenEffects xmlns:a14="http://schemas.microsoft.com/office/drawing/2010/main">
+                <a:effectLst>
+                  <a:outerShdw dist="35921" dir="2700000" algn="ctr" rotWithShape="0">
+                    <a:schemeClr val="bg2"/>
+                  </a:outerShdw>
+                </a:effectLst>
+              </a14:hiddenEffects>
+            </a:ext>
+          </a:extLst>
+        </p:spPr>
+        <p:txBody>
+          <a:bodyPr vert="horz" wrap="none" lIns="0" tIns="0" rIns="0" bIns="0" numCol="1" anchor="ctr" anchorCtr="0" compatLnSpc="1">
+            <a:prstTxWarp prst="textNoShape">
+              <a:avLst/>
+            </a:prstTxWarp>
+            <a:spAutoFit/>
+          </a:bodyPr>
+          <a:lstStyle/>
+          <a:p>
+            <a:pPr eaLnBrk="0" fontAlgn="base" hangingPunct="0">
+              <a:spcBef>
+                <a:spcPct val="0"/>
+              </a:spcBef>
+              <a:spcAft>
+                <a:spcPct val="0"/>
+              </a:spcAft>
+            </a:pPr>
+            <a:endParaRPr lang="en-US" altLang="en-US" sz="2400" dirty="0">
+              <a:latin typeface="Arial" panose="020B0604020202020204" pitchFamily="34" charset="0"/>
+            </a:endParaRPr>
+          </a:p>
+        </p:txBody>
+      </p:sp>
     </p:spTree>
     <p:extLst>
       <p:ext uri="{BB962C8B-B14F-4D97-AF65-F5344CB8AC3E}">
@@ -16758,11 +18656,11 @@
   <p:clrMapOvr>
     <a:masterClrMapping/>
   </p:clrMapOvr>
-  <mc:AlternateContent xmlns:mc="http://schemas.openxmlformats.org/markup-compatibility/2006">
-    <mc:Choice xmlns:p14="http://schemas.microsoft.com/office/powerpoint/2010/main" Requires="p14">
+  <mc:AlternateContent xmlns:mc="http://schemas.openxmlformats.org/markup-compatibility/2006" xmlns:p14="http://schemas.microsoft.com/office/powerpoint/2010/main">
+    <mc:Choice Requires="p14">
       <p:transition spd="slow" p14:dur="2000"/>
     </mc:Choice>
-    <mc:Fallback>
+    <mc:Fallback xmlns="">
       <p:transition spd="slow"/>
     </mc:Fallback>
   </mc:AlternateContent>
@@ -16776,7 +18674,7 @@
 </p:sld>
 </file>
 
-<file path=ppt/slides/slide4.xml><?xml version="1.0" encoding="utf-8"?>
+<file path=ppt/slides/slide5.xml><?xml version="1.0" encoding="utf-8"?>
 <p:sld xmlns:a="http://schemas.openxmlformats.org/drawingml/2006/main" xmlns:r="http://schemas.openxmlformats.org/officeDocument/2006/relationships" xmlns:p="http://schemas.openxmlformats.org/presentationml/2006/main">
   <p:cSld>
     <p:spTree>
@@ -17788,7 +19686,7 @@
         </p:blipFill>
         <p:spPr bwMode="auto">
           <a:xfrm>
-            <a:off x="5755840" y="3470739"/>
+            <a:off x="705547" y="3286103"/>
             <a:ext cx="5731311" cy="3048707"/>
           </a:xfrm>
           <a:prstGeom prst="rect">
@@ -17890,7 +19788,7 @@
         </p:blipFill>
         <p:spPr bwMode="auto">
           <a:xfrm>
-            <a:off x="5581650" y="3433327"/>
+            <a:off x="980621" y="3344159"/>
             <a:ext cx="1581846" cy="1637349"/>
           </a:xfrm>
           <a:prstGeom prst="rect">
@@ -17906,6 +19804,30 @@
               </a14:hiddenFill>
             </a:ext>
           </a:extLst>
+        </p:spPr>
+      </p:pic>
+      <p:pic>
+        <p:nvPicPr>
+          <p:cNvPr id="4" name="Рисунок 3"/>
+          <p:cNvPicPr>
+            <a:picLocks noChangeAspect="1"/>
+          </p:cNvPicPr>
+          <p:nvPr/>
+        </p:nvPicPr>
+        <p:blipFill>
+          <a:blip r:embed="rId5"/>
+          <a:stretch>
+            <a:fillRect/>
+          </a:stretch>
+        </p:blipFill>
+        <p:spPr>
+          <a:xfrm>
+            <a:off x="6894755" y="3344159"/>
+            <a:ext cx="5081637" cy="2563155"/>
+          </a:xfrm>
+          <a:prstGeom prst="rect">
+            <a:avLst/>
+          </a:prstGeom>
         </p:spPr>
       </p:pic>
     </p:spTree>
@@ -17928,7 +19850,7 @@
 </p:sld>
 </file>
 
-<file path=ppt/slides/slide5.xml><?xml version="1.0" encoding="utf-8"?>
+<file path=ppt/slides/slide6.xml><?xml version="1.0" encoding="utf-8"?>
 <p:sld xmlns:a="http://schemas.openxmlformats.org/drawingml/2006/main" xmlns:r="http://schemas.openxmlformats.org/officeDocument/2006/relationships" xmlns:p="http://schemas.openxmlformats.org/presentationml/2006/main">
   <p:cSld>
     <p:spTree>
@@ -18779,7 +20701,7 @@
 </p:sld>
 </file>
 
-<file path=ppt/slides/slide6.xml><?xml version="1.0" encoding="utf-8"?>
+<file path=ppt/slides/slide7.xml><?xml version="1.0" encoding="utf-8"?>
 <p:sld xmlns:a="http://schemas.openxmlformats.org/drawingml/2006/main" xmlns:r="http://schemas.openxmlformats.org/officeDocument/2006/relationships" xmlns:p="http://schemas.openxmlformats.org/presentationml/2006/main">
   <p:cSld>
     <p:spTree>
@@ -19494,7 +21416,7 @@
 </p:sld>
 </file>
 
-<file path=ppt/slides/slide7.xml><?xml version="1.0" encoding="utf-8"?>
+<file path=ppt/slides/slide8.xml><?xml version="1.0" encoding="utf-8"?>
 <p:sld xmlns:a="http://schemas.openxmlformats.org/drawingml/2006/main" xmlns:r="http://schemas.openxmlformats.org/officeDocument/2006/relationships" xmlns:p="http://schemas.openxmlformats.org/presentationml/2006/main">
   <p:cSld>
     <p:spTree>
@@ -19560,8 +21482,8 @@
           </a:p>
         </p:txBody>
       </p:sp>
-      <mc:AlternateContent xmlns:mc="http://schemas.openxmlformats.org/markup-compatibility/2006" xmlns:a14="http://schemas.microsoft.com/office/drawing/2010/main">
-        <mc:Choice Requires="a14">
+      <mc:AlternateContent xmlns:mc="http://schemas.openxmlformats.org/markup-compatibility/2006">
+        <mc:Choice xmlns:a14="http://schemas.microsoft.com/office/drawing/2010/main" Requires="a14">
           <p:sp>
             <p:nvSpPr>
               <p:cNvPr id="3" name="Объект 2">
@@ -19594,7 +21516,7 @@
                   <a:buNone/>
                 </a:pPr>
                 <a:r>
-                  <a:rPr lang="ru-RU" sz="2200" dirty="0"/>
+                  <a:rPr lang="ru-RU" sz="2200" dirty="0" smtClean="0"/>
                   <a:t>Пусть необходим прогноз на </a:t>
                 </a:r>
                 <a:r>
@@ -20159,6 +22081,48 @@
                                 <a:rPr lang="ru-RU" sz="2200" b="0" i="1" smtClean="0">
                                   <a:latin typeface="Cambria Math" panose="02040503050406030204" pitchFamily="18" charset="0"/>
                                 </a:rPr>
+                                <m:t> </m:t>
+                              </m:r>
+                              <m:r>
+                                <a:rPr lang="en-US" sz="2200" b="0" i="1" smtClean="0">
+                                  <a:latin typeface="Cambria Math" panose="02040503050406030204" pitchFamily="18" charset="0"/>
+                                </a:rPr>
+                                <m:t>|</m:t>
+                              </m:r>
+                              <m:r>
+                                <a:rPr lang="en-US" sz="2200" b="0" i="1" smtClean="0">
+                                  <a:latin typeface="Cambria Math" panose="02040503050406030204" pitchFamily="18" charset="0"/>
+                                </a:rPr>
+                                <m:t>𝑑𝑖𝑟𝑒𝑐𝑡𝑖𝑜𝑛</m:t>
+                              </m:r>
+                              <m:r>
+                                <a:rPr lang="en-US" sz="2200" b="0" i="1" smtClean="0">
+                                  <a:latin typeface="Cambria Math" panose="02040503050406030204" pitchFamily="18" charset="0"/>
+                                </a:rPr>
+                                <m:t> </m:t>
+                              </m:r>
+                              <m:r>
+                                <a:rPr lang="en-US" sz="2200" b="0" i="1" smtClean="0">
+                                  <a:latin typeface="Cambria Math" panose="02040503050406030204" pitchFamily="18" charset="0"/>
+                                </a:rPr>
+                                <m:t>𝑜𝑓</m:t>
+                              </m:r>
+                              <m:r>
+                                <a:rPr lang="en-US" sz="2200" b="0" i="1" smtClean="0">
+                                  <a:latin typeface="Cambria Math" panose="02040503050406030204" pitchFamily="18" charset="0"/>
+                                </a:rPr>
+                                <m:t> </m:t>
+                              </m:r>
+                              <m:r>
+                                <a:rPr lang="en-US" sz="2200" b="0" i="1" smtClean="0">
+                                  <a:latin typeface="Cambria Math" panose="02040503050406030204" pitchFamily="18" charset="0"/>
+                                </a:rPr>
+                                <m:t>𝑙𝑒𝑣𝑒𝑙</m:t>
+                              </m:r>
+                              <m:r>
+                                <a:rPr lang="ru-RU" sz="2200" b="0" i="1" smtClean="0">
+                                  <a:latin typeface="Cambria Math" panose="02040503050406030204" pitchFamily="18" charset="0"/>
+                                </a:rPr>
                                 <m:t>)</m:t>
                               </m:r>
                             </m:e>
@@ -20247,7 +22211,7 @@
             </p:txBody>
           </p:sp>
         </mc:Choice>
-        <mc:Fallback xmlns="">
+        <mc:Fallback>
           <p:sp>
             <p:nvSpPr>
               <p:cNvPr id="3" name="Объект 2">
@@ -20841,7 +22805,7 @@
 </p:sld>
 </file>
 
-<file path=ppt/slides/slide8.xml><?xml version="1.0" encoding="utf-8"?>
+<file path=ppt/slides/slide9.xml><?xml version="1.0" encoding="utf-8"?>
 <p:sld xmlns:a="http://schemas.openxmlformats.org/drawingml/2006/main" xmlns:r="http://schemas.openxmlformats.org/officeDocument/2006/relationships" xmlns:p="http://schemas.openxmlformats.org/presentationml/2006/main">
   <p:cSld>
     <p:spTree>
@@ -21715,1331 +23679,6 @@
     <p:extLst>
       <p:ext uri="{BB962C8B-B14F-4D97-AF65-F5344CB8AC3E}">
         <p14:creationId xmlns:p14="http://schemas.microsoft.com/office/powerpoint/2010/main" val="1411614552"/>
-      </p:ext>
-    </p:extLst>
-  </p:cSld>
-  <p:clrMapOvr>
-    <a:masterClrMapping/>
-  </p:clrMapOvr>
-  <p:timing>
-    <p:tnLst>
-      <p:par>
-        <p:cTn id="1" dur="indefinite" restart="never" nodeType="tmRoot"/>
-      </p:par>
-    </p:tnLst>
-  </p:timing>
-</p:sld>
-</file>
-
-<file path=ppt/slides/slide9.xml><?xml version="1.0" encoding="utf-8"?>
-<p:sld xmlns:a="http://schemas.openxmlformats.org/drawingml/2006/main" xmlns:r="http://schemas.openxmlformats.org/officeDocument/2006/relationships" xmlns:p="http://schemas.openxmlformats.org/presentationml/2006/main">
-  <p:cSld>
-    <p:spTree>
-      <p:nvGrpSpPr>
-        <p:cNvPr id="1" name=""/>
-        <p:cNvGrpSpPr/>
-        <p:nvPr/>
-      </p:nvGrpSpPr>
-      <p:grpSpPr>
-        <a:xfrm>
-          <a:off x="0" y="0"/>
-          <a:ext cx="0" cy="0"/>
-          <a:chOff x="0" y="0"/>
-          <a:chExt cx="0" cy="0"/>
-        </a:xfrm>
-      </p:grpSpPr>
-      <p:sp>
-        <p:nvSpPr>
-          <p:cNvPr id="2" name="Заголовок 1">
-            <a:extLst>
-              <a:ext uri="{FF2B5EF4-FFF2-40B4-BE49-F238E27FC236}">
-                <a16:creationId xmlns:a16="http://schemas.microsoft.com/office/drawing/2014/main" id="{3FB6B433-AB20-4BD4-8E77-84B856A5D608}"/>
-              </a:ext>
-            </a:extLst>
-          </p:cNvPr>
-          <p:cNvSpPr>
-            <a:spLocks noGrp="1"/>
-          </p:cNvSpPr>
-          <p:nvPr>
-            <p:ph type="title"/>
-          </p:nvPr>
-        </p:nvSpPr>
-        <p:spPr>
-          <a:xfrm>
-            <a:off x="226957" y="93605"/>
-            <a:ext cx="11802295" cy="933115"/>
-          </a:xfrm>
-        </p:spPr>
-        <p:txBody>
-          <a:bodyPr>
-            <a:normAutofit/>
-          </a:bodyPr>
-          <a:lstStyle/>
-          <a:p>
-            <a:pPr algn="ctr"/>
-            <a:r>
-              <a:rPr lang="ru-RU" sz="3200" b="1" dirty="0"/>
-              <a:t>Модель </a:t>
-            </a:r>
-            <a:r>
-              <a:rPr lang="en-US" sz="3200" b="1" dirty="0"/>
-              <a:t>Holt</a:t>
-            </a:r>
-            <a:r>
-              <a:rPr lang="ru-RU" sz="3200" b="1" dirty="0"/>
-              <a:t>-</a:t>
-            </a:r>
-            <a:r>
-              <a:rPr lang="en-US" sz="3200" b="1" dirty="0"/>
-              <a:t>Winters </a:t>
-            </a:r>
-            <a:r>
-              <a:rPr lang="ru-RU" sz="3200" b="1" dirty="0"/>
-              <a:t> - тройное экспоненциальное сглаживание</a:t>
-            </a:r>
-            <a:endParaRPr lang="ru-RU" sz="3600" b="1" dirty="0"/>
-          </a:p>
-        </p:txBody>
-      </p:sp>
-      <mc:AlternateContent xmlns:mc="http://schemas.openxmlformats.org/markup-compatibility/2006" xmlns:a14="http://schemas.microsoft.com/office/drawing/2010/main">
-        <mc:Choice Requires="a14">
-          <p:sp>
-            <p:nvSpPr>
-              <p:cNvPr id="3" name="Объект 2">
-                <a:extLst>
-                  <a:ext uri="{FF2B5EF4-FFF2-40B4-BE49-F238E27FC236}">
-                    <a16:creationId xmlns:a16="http://schemas.microsoft.com/office/drawing/2014/main" id="{9CFDC76D-90F0-4FD7-8BA6-954D6D2E6FFD}"/>
-                  </a:ext>
-                </a:extLst>
-              </p:cNvPr>
-              <p:cNvSpPr>
-                <a:spLocks noGrp="1"/>
-              </p:cNvSpPr>
-              <p:nvPr>
-                <p:ph idx="1"/>
-              </p:nvPr>
-            </p:nvSpPr>
-            <p:spPr>
-              <a:xfrm>
-                <a:off x="226957" y="817117"/>
-                <a:ext cx="11791949" cy="5502274"/>
-              </a:xfrm>
-            </p:spPr>
-            <p:txBody>
-              <a:bodyPr>
-                <a:normAutofit/>
-              </a:bodyPr>
-              <a:lstStyle/>
-              <a:p>
-                <a:pPr marL="0" indent="0">
-                  <a:buNone/>
-                </a:pPr>
-                <a:r>
-                  <a:rPr lang="ru-RU" sz="2200" dirty="0"/>
-                  <a:t>Пусть существуют быстрые изменения с известным периодом </a:t>
-                </a:r>
-                <a14:m>
-                  <m:oMath xmlns:m="http://schemas.openxmlformats.org/officeDocument/2006/math">
-                    <m:r>
-                      <a:rPr lang="en-US" sz="2200" b="0" i="1" dirty="0" smtClean="0">
-                        <a:latin typeface="Cambria Math" panose="02040503050406030204" pitchFamily="18" charset="0"/>
-                      </a:rPr>
-                      <m:t>𝑚</m:t>
-                    </m:r>
-                  </m:oMath>
-                </a14:m>
-                <a:r>
-                  <a:rPr lang="en-US" sz="2200" dirty="0"/>
-                  <a:t> </a:t>
-                </a:r>
-                <a:r>
-                  <a:rPr lang="ru-RU" sz="2200" dirty="0"/>
-                  <a:t>(сезонность). Тогда для точек одной фазы (удаленных на </a:t>
-                </a:r>
-                <a14:m>
-                  <m:oMath xmlns:m="http://schemas.openxmlformats.org/officeDocument/2006/math">
-                    <m:r>
-                      <a:rPr lang="en-US" sz="2200" b="0" i="1" dirty="0" smtClean="0">
-                        <a:latin typeface="Cambria Math" panose="02040503050406030204" pitchFamily="18" charset="0"/>
-                      </a:rPr>
-                      <m:t>𝑚</m:t>
-                    </m:r>
-                  </m:oMath>
-                </a14:m>
-                <a:r>
-                  <a:rPr lang="en-US" sz="2200" dirty="0"/>
-                  <a:t>) </a:t>
-                </a:r>
-                <a:r>
-                  <a:rPr lang="ru-RU" sz="2200" dirty="0"/>
-                  <a:t>введем компоненты сглаживания.</a:t>
-                </a:r>
-                <a:endParaRPr lang="en-US" sz="2200" dirty="0"/>
-              </a:p>
-              <a:p>
-                <a:pPr marL="0" indent="0">
-                  <a:buNone/>
-                </a:pPr>
-                <a14:m>
-                  <m:oMathPara xmlns:m="http://schemas.openxmlformats.org/officeDocument/2006/math">
-                    <m:oMathParaPr>
-                      <m:jc m:val="centerGroup"/>
-                    </m:oMathParaPr>
-                    <m:oMath xmlns:m="http://schemas.openxmlformats.org/officeDocument/2006/math">
-                      <m:d>
-                        <m:dPr>
-                          <m:begChr m:val="{"/>
-                          <m:endChr m:val=""/>
-                          <m:ctrlPr>
-                            <a:rPr lang="en-US" sz="2200" i="1" smtClean="0">
-                              <a:latin typeface="Cambria Math" panose="02040503050406030204" pitchFamily="18" charset="0"/>
-                            </a:rPr>
-                          </m:ctrlPr>
-                        </m:dPr>
-                        <m:e>
-                          <m:eqArr>
-                            <m:eqArrPr>
-                              <m:ctrlPr>
-                                <a:rPr lang="en-US" sz="2200" i="1" smtClean="0">
-                                  <a:latin typeface="Cambria Math" panose="02040503050406030204" pitchFamily="18" charset="0"/>
-                                </a:rPr>
-                              </m:ctrlPr>
-                            </m:eqArrPr>
-                            <m:e>
-                              <m:sSub>
-                                <m:sSubPr>
-                                  <m:ctrlPr>
-                                    <a:rPr lang="en-US" sz="2200" i="1">
-                                      <a:latin typeface="Cambria Math" panose="02040503050406030204" pitchFamily="18" charset="0"/>
-                                    </a:rPr>
-                                  </m:ctrlPr>
-                                </m:sSubPr>
-                                <m:e>
-                                  <m:acc>
-                                    <m:accPr>
-                                      <m:chr m:val="̂"/>
-                                      <m:ctrlPr>
-                                        <a:rPr lang="en-US" sz="2200" i="1">
-                                          <a:latin typeface="Cambria Math" panose="02040503050406030204" pitchFamily="18" charset="0"/>
-                                        </a:rPr>
-                                      </m:ctrlPr>
-                                    </m:accPr>
-                                    <m:e>
-                                      <m:r>
-                                        <a:rPr lang="en-US" sz="2200" i="1">
-                                          <a:latin typeface="Cambria Math" panose="02040503050406030204" pitchFamily="18" charset="0"/>
-                                        </a:rPr>
-                                        <m:t>𝑦</m:t>
-                                      </m:r>
-                                    </m:e>
-                                  </m:acc>
-                                </m:e>
-                                <m:sub>
-                                  <m:r>
-                                    <a:rPr lang="en-US" sz="2200" i="1">
-                                      <a:latin typeface="Cambria Math" panose="02040503050406030204" pitchFamily="18" charset="0"/>
-                                    </a:rPr>
-                                    <m:t>𝑛</m:t>
-                                  </m:r>
-                                  <m:r>
-                                    <a:rPr lang="en-US" sz="2200" i="1">
-                                      <a:latin typeface="Cambria Math" panose="02040503050406030204" pitchFamily="18" charset="0"/>
-                                    </a:rPr>
-                                    <m:t>+</m:t>
-                                  </m:r>
-                                  <m:r>
-                                    <a:rPr lang="en-US" sz="2200" b="0" i="1" smtClean="0">
-                                      <a:latin typeface="Cambria Math" panose="02040503050406030204" pitchFamily="18" charset="0"/>
-                                    </a:rPr>
-                                    <m:t>h</m:t>
-                                  </m:r>
-                                </m:sub>
-                              </m:sSub>
-                              <m:r>
-                                <a:rPr lang="en-US" sz="2200" i="1">
-                                  <a:latin typeface="Cambria Math" panose="02040503050406030204" pitchFamily="18" charset="0"/>
-                                </a:rPr>
-                                <m:t>=</m:t>
-                              </m:r>
-                              <m:sSub>
-                                <m:sSubPr>
-                                  <m:ctrlPr>
-                                    <a:rPr lang="en-US" sz="2200" i="1">
-                                      <a:latin typeface="Cambria Math" panose="02040503050406030204" pitchFamily="18" charset="0"/>
-                                    </a:rPr>
-                                  </m:ctrlPr>
-                                </m:sSubPr>
-                                <m:e>
-                                  <m:r>
-                                    <a:rPr lang="en-US" sz="2200" i="1">
-                                      <a:latin typeface="Cambria Math" panose="02040503050406030204" pitchFamily="18" charset="0"/>
-                                    </a:rPr>
-                                    <m:t>𝑙</m:t>
-                                  </m:r>
-                                </m:e>
-                                <m:sub>
-                                  <m:r>
-                                    <a:rPr lang="en-US" sz="2200" i="1">
-                                      <a:latin typeface="Cambria Math" panose="02040503050406030204" pitchFamily="18" charset="0"/>
-                                    </a:rPr>
-                                    <m:t>𝑛</m:t>
-                                  </m:r>
-                                </m:sub>
-                              </m:sSub>
-                              <m:r>
-                                <a:rPr lang="en-US" sz="2200" i="1">
-                                  <a:latin typeface="Cambria Math" panose="02040503050406030204" pitchFamily="18" charset="0"/>
-                                </a:rPr>
-                                <m:t>+</m:t>
-                              </m:r>
-                              <m:r>
-                                <a:rPr lang="en-US" sz="2200" b="0" i="1" smtClean="0">
-                                  <a:latin typeface="Cambria Math" panose="02040503050406030204" pitchFamily="18" charset="0"/>
-                                </a:rPr>
-                                <m:t>h</m:t>
-                              </m:r>
-                              <m:r>
-                                <a:rPr lang="en-US" sz="2200" b="0" i="1" smtClean="0">
-                                  <a:latin typeface="Cambria Math" panose="02040503050406030204" pitchFamily="18" charset="0"/>
-                                </a:rPr>
-                                <m:t>⋅</m:t>
-                              </m:r>
-                              <m:sSub>
-                                <m:sSubPr>
-                                  <m:ctrlPr>
-                                    <a:rPr lang="en-US" sz="2200" i="1">
-                                      <a:latin typeface="Cambria Math" panose="02040503050406030204" pitchFamily="18" charset="0"/>
-                                    </a:rPr>
-                                  </m:ctrlPr>
-                                </m:sSubPr>
-                                <m:e>
-                                  <m:r>
-                                    <a:rPr lang="en-US" sz="2200" i="1">
-                                      <a:latin typeface="Cambria Math" panose="02040503050406030204" pitchFamily="18" charset="0"/>
-                                    </a:rPr>
-                                    <m:t>𝑏</m:t>
-                                  </m:r>
-                                </m:e>
-                                <m:sub>
-                                  <m:r>
-                                    <a:rPr lang="en-US" sz="2200" i="1">
-                                      <a:latin typeface="Cambria Math" panose="02040503050406030204" pitchFamily="18" charset="0"/>
-                                    </a:rPr>
-                                    <m:t>𝑛</m:t>
-                                  </m:r>
-                                </m:sub>
-                              </m:sSub>
-                              <m:r>
-                                <a:rPr lang="ru-RU" sz="2200" b="0" i="1" smtClean="0">
-                                  <a:latin typeface="Cambria Math" panose="02040503050406030204" pitchFamily="18" charset="0"/>
-                                </a:rPr>
-                                <m:t>+</m:t>
-                              </m:r>
-                              <m:sSub>
-                                <m:sSubPr>
-                                  <m:ctrlPr>
-                                    <a:rPr lang="en-US" sz="2200" i="1">
-                                      <a:latin typeface="Cambria Math" panose="02040503050406030204" pitchFamily="18" charset="0"/>
-                                    </a:rPr>
-                                  </m:ctrlPr>
-                                </m:sSubPr>
-                                <m:e>
-                                  <m:r>
-                                    <a:rPr lang="en-US" sz="2200" i="1">
-                                      <a:latin typeface="Cambria Math" panose="02040503050406030204" pitchFamily="18" charset="0"/>
-                                    </a:rPr>
-                                    <m:t>𝑠</m:t>
-                                  </m:r>
-                                </m:e>
-                                <m:sub>
-                                  <m:r>
-                                    <a:rPr lang="en-US" sz="2200" i="1">
-                                      <a:latin typeface="Cambria Math" panose="02040503050406030204" pitchFamily="18" charset="0"/>
-                                    </a:rPr>
-                                    <m:t>𝑛</m:t>
-                                  </m:r>
-                                  <m:r>
-                                    <a:rPr lang="en-US" sz="2200" i="1">
-                                      <a:latin typeface="Cambria Math" panose="02040503050406030204" pitchFamily="18" charset="0"/>
-                                    </a:rPr>
-                                    <m:t>−</m:t>
-                                  </m:r>
-                                  <m:r>
-                                    <a:rPr lang="en-US" sz="2200" b="0" i="1" smtClean="0">
-                                      <a:latin typeface="Cambria Math" panose="02040503050406030204" pitchFamily="18" charset="0"/>
-                                    </a:rPr>
-                                    <m:t>𝑚</m:t>
-                                  </m:r>
-                                  <m:r>
-                                    <a:rPr lang="en-US" sz="2200" i="1">
-                                      <a:latin typeface="Cambria Math" panose="02040503050406030204" pitchFamily="18" charset="0"/>
-                                    </a:rPr>
-                                    <m:t>+</m:t>
-                                  </m:r>
-                                  <m:r>
-                                    <a:rPr lang="en-US" sz="2200" b="0" i="1" smtClean="0">
-                                      <a:latin typeface="Cambria Math" panose="02040503050406030204" pitchFamily="18" charset="0"/>
-                                    </a:rPr>
-                                    <m:t>∆</m:t>
-                                  </m:r>
-                                </m:sub>
-                              </m:sSub>
-                              <m:r>
-                                <a:rPr lang="en-US" sz="2200" i="1">
-                                  <a:latin typeface="Cambria Math" panose="02040503050406030204" pitchFamily="18" charset="0"/>
-                                </a:rPr>
-                                <m:t>;</m:t>
-                              </m:r>
-                              <m:r>
-                                <m:rPr>
-                                  <m:nor/>
-                                </m:rPr>
-                                <a:rPr lang="en-US" sz="2200" dirty="0"/>
-                                <m:t> </m:t>
-                              </m:r>
-                            </m:e>
-                            <m:e>
-                              <m:sSub>
-                                <m:sSubPr>
-                                  <m:ctrlPr>
-                                    <a:rPr lang="en-US" sz="2200" i="1">
-                                      <a:latin typeface="Cambria Math" panose="02040503050406030204" pitchFamily="18" charset="0"/>
-                                    </a:rPr>
-                                  </m:ctrlPr>
-                                </m:sSubPr>
-                                <m:e>
-                                  <m:r>
-                                    <a:rPr lang="en-US" sz="2200" i="1">
-                                      <a:latin typeface="Cambria Math" panose="02040503050406030204" pitchFamily="18" charset="0"/>
-                                    </a:rPr>
-                                    <m:t>𝑙</m:t>
-                                  </m:r>
-                                </m:e>
-                                <m:sub>
-                                  <m:r>
-                                    <a:rPr lang="en-US" sz="2200" i="1">
-                                      <a:latin typeface="Cambria Math" panose="02040503050406030204" pitchFamily="18" charset="0"/>
-                                    </a:rPr>
-                                    <m:t>𝑛</m:t>
-                                  </m:r>
-                                </m:sub>
-                              </m:sSub>
-                              <m:r>
-                                <a:rPr lang="en-US" sz="2200" i="1">
-                                  <a:latin typeface="Cambria Math" panose="02040503050406030204" pitchFamily="18" charset="0"/>
-                                </a:rPr>
-                                <m:t>=</m:t>
-                              </m:r>
-                              <m:r>
-                                <a:rPr lang="en-US" sz="2200" i="1">
-                                  <a:latin typeface="Cambria Math" panose="02040503050406030204" pitchFamily="18" charset="0"/>
-                                </a:rPr>
-                                <m:t>𝛼</m:t>
-                              </m:r>
-                              <m:sSub>
-                                <m:sSubPr>
-                                  <m:ctrlPr>
-                                    <a:rPr lang="en-US" sz="2200" i="1">
-                                      <a:latin typeface="Cambria Math" panose="02040503050406030204" pitchFamily="18" charset="0"/>
-                                    </a:rPr>
-                                  </m:ctrlPr>
-                                </m:sSubPr>
-                                <m:e>
-                                  <m:r>
-                                    <a:rPr lang="en-US" sz="2200" i="1">
-                                      <a:latin typeface="Cambria Math" panose="02040503050406030204" pitchFamily="18" charset="0"/>
-                                    </a:rPr>
-                                    <m:t>𝑦</m:t>
-                                  </m:r>
-                                </m:e>
-                                <m:sub>
-                                  <m:r>
-                                    <a:rPr lang="en-US" sz="2200" i="1">
-                                      <a:latin typeface="Cambria Math" panose="02040503050406030204" pitchFamily="18" charset="0"/>
-                                    </a:rPr>
-                                    <m:t>𝑛</m:t>
-                                  </m:r>
-                                </m:sub>
-                              </m:sSub>
-                              <m:r>
-                                <a:rPr lang="en-US" sz="2200" i="1">
-                                  <a:latin typeface="Cambria Math" panose="02040503050406030204" pitchFamily="18" charset="0"/>
-                                </a:rPr>
-                                <m:t>+</m:t>
-                              </m:r>
-                              <m:d>
-                                <m:dPr>
-                                  <m:ctrlPr>
-                                    <a:rPr lang="en-US" sz="2200" i="1">
-                                      <a:latin typeface="Cambria Math" panose="02040503050406030204" pitchFamily="18" charset="0"/>
-                                    </a:rPr>
-                                  </m:ctrlPr>
-                                </m:dPr>
-                                <m:e>
-                                  <m:r>
-                                    <a:rPr lang="en-US" sz="2200" i="1">
-                                      <a:latin typeface="Cambria Math" panose="02040503050406030204" pitchFamily="18" charset="0"/>
-                                    </a:rPr>
-                                    <m:t>1−</m:t>
-                                  </m:r>
-                                  <m:r>
-                                    <a:rPr lang="en-US" sz="2200" i="1">
-                                      <a:latin typeface="Cambria Math" panose="02040503050406030204" pitchFamily="18" charset="0"/>
-                                    </a:rPr>
-                                    <m:t>𝛼</m:t>
-                                  </m:r>
-                                </m:e>
-                              </m:d>
-                              <m:d>
-                                <m:dPr>
-                                  <m:ctrlPr>
-                                    <a:rPr lang="en-US" sz="2200" i="1">
-                                      <a:latin typeface="Cambria Math" panose="02040503050406030204" pitchFamily="18" charset="0"/>
-                                    </a:rPr>
-                                  </m:ctrlPr>
-                                </m:dPr>
-                                <m:e>
-                                  <m:sSub>
-                                    <m:sSubPr>
-                                      <m:ctrlPr>
-                                        <a:rPr lang="en-US" sz="2200" i="1">
-                                          <a:latin typeface="Cambria Math" panose="02040503050406030204" pitchFamily="18" charset="0"/>
-                                        </a:rPr>
-                                      </m:ctrlPr>
-                                    </m:sSubPr>
-                                    <m:e>
-                                      <m:r>
-                                        <a:rPr lang="en-US" sz="2200" i="1">
-                                          <a:latin typeface="Cambria Math" panose="02040503050406030204" pitchFamily="18" charset="0"/>
-                                        </a:rPr>
-                                        <m:t>𝑙</m:t>
-                                      </m:r>
-                                    </m:e>
-                                    <m:sub>
-                                      <m:r>
-                                        <a:rPr lang="en-US" sz="2200" i="1">
-                                          <a:latin typeface="Cambria Math" panose="02040503050406030204" pitchFamily="18" charset="0"/>
-                                        </a:rPr>
-                                        <m:t>𝑛</m:t>
-                                      </m:r>
-                                      <m:r>
-                                        <a:rPr lang="en-US" sz="2200" i="1">
-                                          <a:latin typeface="Cambria Math" panose="02040503050406030204" pitchFamily="18" charset="0"/>
-                                        </a:rPr>
-                                        <m:t>−1</m:t>
-                                      </m:r>
-                                    </m:sub>
-                                  </m:sSub>
-                                  <m:r>
-                                    <a:rPr lang="en-US" sz="2200" i="1">
-                                      <a:latin typeface="Cambria Math" panose="02040503050406030204" pitchFamily="18" charset="0"/>
-                                    </a:rPr>
-                                    <m:t>+</m:t>
-                                  </m:r>
-                                  <m:sSub>
-                                    <m:sSubPr>
-                                      <m:ctrlPr>
-                                        <a:rPr lang="en-US" sz="2200" i="1">
-                                          <a:latin typeface="Cambria Math" panose="02040503050406030204" pitchFamily="18" charset="0"/>
-                                        </a:rPr>
-                                      </m:ctrlPr>
-                                    </m:sSubPr>
-                                    <m:e>
-                                      <m:r>
-                                        <a:rPr lang="en-US" sz="2200" i="1">
-                                          <a:latin typeface="Cambria Math" panose="02040503050406030204" pitchFamily="18" charset="0"/>
-                                        </a:rPr>
-                                        <m:t>𝑏</m:t>
-                                      </m:r>
-                                    </m:e>
-                                    <m:sub>
-                                      <m:r>
-                                        <a:rPr lang="en-US" sz="2200" i="1">
-                                          <a:latin typeface="Cambria Math" panose="02040503050406030204" pitchFamily="18" charset="0"/>
-                                        </a:rPr>
-                                        <m:t>𝑛</m:t>
-                                      </m:r>
-                                      <m:r>
-                                        <a:rPr lang="en-US" sz="2200" i="1">
-                                          <a:latin typeface="Cambria Math" panose="02040503050406030204" pitchFamily="18" charset="0"/>
-                                        </a:rPr>
-                                        <m:t>−1</m:t>
-                                      </m:r>
-                                    </m:sub>
-                                  </m:sSub>
-                                </m:e>
-                              </m:d>
-                              <m:r>
-                                <a:rPr lang="ru-RU" sz="2200" b="0" i="1" smtClean="0">
-                                  <a:latin typeface="Cambria Math" panose="02040503050406030204" pitchFamily="18" charset="0"/>
-                                </a:rPr>
-                                <m:t>   (</m:t>
-                              </m:r>
-                              <m:r>
-                                <a:rPr lang="en-US" sz="2200" i="1">
-                                  <a:latin typeface="Cambria Math" panose="02040503050406030204" pitchFamily="18" charset="0"/>
-                                </a:rPr>
-                                <m:t>𝑙𝑒𝑣𝑒𝑙</m:t>
-                              </m:r>
-                              <m:r>
-                                <a:rPr lang="ru-RU" sz="2200" b="0" i="1" smtClean="0">
-                                  <a:latin typeface="Cambria Math" panose="02040503050406030204" pitchFamily="18" charset="0"/>
-                                </a:rPr>
-                                <m:t>)</m:t>
-                              </m:r>
-                            </m:e>
-                            <m:e>
-                              <m:sSub>
-                                <m:sSubPr>
-                                  <m:ctrlPr>
-                                    <a:rPr lang="en-US" sz="2200" i="1">
-                                      <a:latin typeface="Cambria Math" panose="02040503050406030204" pitchFamily="18" charset="0"/>
-                                    </a:rPr>
-                                  </m:ctrlPr>
-                                </m:sSubPr>
-                                <m:e>
-                                  <m:r>
-                                    <a:rPr lang="en-US" sz="2200" i="1">
-                                      <a:latin typeface="Cambria Math" panose="02040503050406030204" pitchFamily="18" charset="0"/>
-                                    </a:rPr>
-                                    <m:t>𝑏</m:t>
-                                  </m:r>
-                                </m:e>
-                                <m:sub>
-                                  <m:r>
-                                    <a:rPr lang="en-US" sz="2200" i="1">
-                                      <a:latin typeface="Cambria Math" panose="02040503050406030204" pitchFamily="18" charset="0"/>
-                                    </a:rPr>
-                                    <m:t>𝑛</m:t>
-                                  </m:r>
-                                </m:sub>
-                              </m:sSub>
-                              <m:r>
-                                <a:rPr lang="en-US" sz="2200" i="1">
-                                  <a:latin typeface="Cambria Math" panose="02040503050406030204" pitchFamily="18" charset="0"/>
-                                </a:rPr>
-                                <m:t>=</m:t>
-                              </m:r>
-                              <m:r>
-                                <a:rPr lang="en-US" sz="2200" i="1">
-                                  <a:latin typeface="Cambria Math" panose="02040503050406030204" pitchFamily="18" charset="0"/>
-                                </a:rPr>
-                                <m:t>𝛽</m:t>
-                              </m:r>
-                              <m:d>
-                                <m:dPr>
-                                  <m:ctrlPr>
-                                    <a:rPr lang="en-US" sz="2200" i="1">
-                                      <a:latin typeface="Cambria Math" panose="02040503050406030204" pitchFamily="18" charset="0"/>
-                                    </a:rPr>
-                                  </m:ctrlPr>
-                                </m:dPr>
-                                <m:e>
-                                  <m:sSub>
-                                    <m:sSubPr>
-                                      <m:ctrlPr>
-                                        <a:rPr lang="en-US" sz="2200" i="1">
-                                          <a:latin typeface="Cambria Math" panose="02040503050406030204" pitchFamily="18" charset="0"/>
-                                        </a:rPr>
-                                      </m:ctrlPr>
-                                    </m:sSubPr>
-                                    <m:e>
-                                      <m:r>
-                                        <a:rPr lang="en-US" sz="2200" i="1">
-                                          <a:latin typeface="Cambria Math" panose="02040503050406030204" pitchFamily="18" charset="0"/>
-                                        </a:rPr>
-                                        <m:t>𝑙</m:t>
-                                      </m:r>
-                                    </m:e>
-                                    <m:sub>
-                                      <m:r>
-                                        <a:rPr lang="en-US" sz="2200" i="1">
-                                          <a:latin typeface="Cambria Math" panose="02040503050406030204" pitchFamily="18" charset="0"/>
-                                        </a:rPr>
-                                        <m:t>𝑛</m:t>
-                                      </m:r>
-                                    </m:sub>
-                                  </m:sSub>
-                                  <m:r>
-                                    <a:rPr lang="en-US" sz="2200" i="1">
-                                      <a:latin typeface="Cambria Math" panose="02040503050406030204" pitchFamily="18" charset="0"/>
-                                    </a:rPr>
-                                    <m:t>−</m:t>
-                                  </m:r>
-                                  <m:sSub>
-                                    <m:sSubPr>
-                                      <m:ctrlPr>
-                                        <a:rPr lang="en-US" sz="2200" i="1">
-                                          <a:latin typeface="Cambria Math" panose="02040503050406030204" pitchFamily="18" charset="0"/>
-                                        </a:rPr>
-                                      </m:ctrlPr>
-                                    </m:sSubPr>
-                                    <m:e>
-                                      <m:r>
-                                        <a:rPr lang="en-US" sz="2200" i="1">
-                                          <a:latin typeface="Cambria Math" panose="02040503050406030204" pitchFamily="18" charset="0"/>
-                                        </a:rPr>
-                                        <m:t>𝑙</m:t>
-                                      </m:r>
-                                    </m:e>
-                                    <m:sub>
-                                      <m:r>
-                                        <a:rPr lang="en-US" sz="2200" i="1">
-                                          <a:latin typeface="Cambria Math" panose="02040503050406030204" pitchFamily="18" charset="0"/>
-                                        </a:rPr>
-                                        <m:t>𝑛</m:t>
-                                      </m:r>
-                                      <m:r>
-                                        <a:rPr lang="en-US" sz="2200" i="1">
-                                          <a:latin typeface="Cambria Math" panose="02040503050406030204" pitchFamily="18" charset="0"/>
-                                        </a:rPr>
-                                        <m:t>−1</m:t>
-                                      </m:r>
-                                    </m:sub>
-                                  </m:sSub>
-                                </m:e>
-                              </m:d>
-                              <m:r>
-                                <a:rPr lang="en-US" sz="2200" i="1">
-                                  <a:latin typeface="Cambria Math" panose="02040503050406030204" pitchFamily="18" charset="0"/>
-                                </a:rPr>
-                                <m:t>+</m:t>
-                              </m:r>
-                              <m:d>
-                                <m:dPr>
-                                  <m:ctrlPr>
-                                    <a:rPr lang="en-US" sz="2200" i="1">
-                                      <a:latin typeface="Cambria Math" panose="02040503050406030204" pitchFamily="18" charset="0"/>
-                                    </a:rPr>
-                                  </m:ctrlPr>
-                                </m:dPr>
-                                <m:e>
-                                  <m:r>
-                                    <a:rPr lang="en-US" sz="2200" i="1">
-                                      <a:latin typeface="Cambria Math" panose="02040503050406030204" pitchFamily="18" charset="0"/>
-                                    </a:rPr>
-                                    <m:t>1−</m:t>
-                                  </m:r>
-                                  <m:r>
-                                    <a:rPr lang="en-US" sz="2200" i="1">
-                                      <a:latin typeface="Cambria Math" panose="02040503050406030204" pitchFamily="18" charset="0"/>
-                                    </a:rPr>
-                                    <m:t>𝛽</m:t>
-                                  </m:r>
-                                </m:e>
-                              </m:d>
-                              <m:sSub>
-                                <m:sSubPr>
-                                  <m:ctrlPr>
-                                    <a:rPr lang="en-US" sz="2200" i="1">
-                                      <a:latin typeface="Cambria Math" panose="02040503050406030204" pitchFamily="18" charset="0"/>
-                                    </a:rPr>
-                                  </m:ctrlPr>
-                                </m:sSubPr>
-                                <m:e>
-                                  <m:r>
-                                    <a:rPr lang="en-US" sz="2200" i="1">
-                                      <a:latin typeface="Cambria Math" panose="02040503050406030204" pitchFamily="18" charset="0"/>
-                                    </a:rPr>
-                                    <m:t>𝑏</m:t>
-                                  </m:r>
-                                </m:e>
-                                <m:sub>
-                                  <m:r>
-                                    <a:rPr lang="en-US" sz="2200" i="1">
-                                      <a:latin typeface="Cambria Math" panose="02040503050406030204" pitchFamily="18" charset="0"/>
-                                    </a:rPr>
-                                    <m:t>𝑛</m:t>
-                                  </m:r>
-                                  <m:r>
-                                    <a:rPr lang="en-US" sz="2200" i="1">
-                                      <a:latin typeface="Cambria Math" panose="02040503050406030204" pitchFamily="18" charset="0"/>
-                                    </a:rPr>
-                                    <m:t>−1</m:t>
-                                  </m:r>
-                                </m:sub>
-                              </m:sSub>
-                              <m:r>
-                                <a:rPr lang="ru-RU" sz="2200" b="0" i="1" smtClean="0">
-                                  <a:latin typeface="Cambria Math" panose="02040503050406030204" pitchFamily="18" charset="0"/>
-                                </a:rPr>
-                                <m:t>  (</m:t>
-                              </m:r>
-                              <m:r>
-                                <a:rPr lang="en-US" sz="2200" i="1">
-                                  <a:latin typeface="Cambria Math" panose="02040503050406030204" pitchFamily="18" charset="0"/>
-                                </a:rPr>
-                                <m:t>𝑡𝑟𝑒𝑛𝑑</m:t>
-                              </m:r>
-                              <m:r>
-                                <a:rPr lang="ru-RU" sz="2200" b="0" i="1" smtClean="0">
-                                  <a:latin typeface="Cambria Math" panose="02040503050406030204" pitchFamily="18" charset="0"/>
-                                </a:rPr>
-                                <m:t>)</m:t>
-                              </m:r>
-                            </m:e>
-                            <m:e>
-                              <m:sSub>
-                                <m:sSubPr>
-                                  <m:ctrlPr>
-                                    <a:rPr lang="en-US" sz="2200" b="0" i="1" smtClean="0">
-                                      <a:latin typeface="Cambria Math" panose="02040503050406030204" pitchFamily="18" charset="0"/>
-                                    </a:rPr>
-                                  </m:ctrlPr>
-                                </m:sSubPr>
-                                <m:e>
-                                  <m:r>
-                                    <a:rPr lang="en-US" sz="2200" b="0" i="1" smtClean="0">
-                                      <a:latin typeface="Cambria Math" panose="02040503050406030204" pitchFamily="18" charset="0"/>
-                                    </a:rPr>
-                                    <m:t>𝑠</m:t>
-                                  </m:r>
-                                </m:e>
-                                <m:sub>
-                                  <m:r>
-                                    <a:rPr lang="en-US" sz="2200" b="0" i="1" smtClean="0">
-                                      <a:latin typeface="Cambria Math" panose="02040503050406030204" pitchFamily="18" charset="0"/>
-                                    </a:rPr>
-                                    <m:t>𝑛</m:t>
-                                  </m:r>
-                                </m:sub>
-                              </m:sSub>
-                              <m:r>
-                                <a:rPr lang="en-US" sz="2200" b="0" i="1" smtClean="0">
-                                  <a:latin typeface="Cambria Math" panose="02040503050406030204" pitchFamily="18" charset="0"/>
-                                </a:rPr>
-                                <m:t>=</m:t>
-                              </m:r>
-                              <m:r>
-                                <a:rPr lang="en-US" sz="2200" b="0" i="1" smtClean="0">
-                                  <a:latin typeface="Cambria Math" panose="02040503050406030204" pitchFamily="18" charset="0"/>
-                                </a:rPr>
-                                <m:t>𝛾</m:t>
-                              </m:r>
-                              <m:d>
-                                <m:dPr>
-                                  <m:ctrlPr>
-                                    <a:rPr lang="en-US" sz="2200" b="0" i="1" smtClean="0">
-                                      <a:latin typeface="Cambria Math" panose="02040503050406030204" pitchFamily="18" charset="0"/>
-                                    </a:rPr>
-                                  </m:ctrlPr>
-                                </m:dPr>
-                                <m:e>
-                                  <m:sSub>
-                                    <m:sSubPr>
-                                      <m:ctrlPr>
-                                        <a:rPr lang="en-US" sz="2200" b="0" i="1" smtClean="0">
-                                          <a:latin typeface="Cambria Math" panose="02040503050406030204" pitchFamily="18" charset="0"/>
-                                        </a:rPr>
-                                      </m:ctrlPr>
-                                    </m:sSubPr>
-                                    <m:e>
-                                      <m:r>
-                                        <a:rPr lang="en-US" sz="2200" b="0" i="1" smtClean="0">
-                                          <a:latin typeface="Cambria Math" panose="02040503050406030204" pitchFamily="18" charset="0"/>
-                                        </a:rPr>
-                                        <m:t>𝑦</m:t>
-                                      </m:r>
-                                    </m:e>
-                                    <m:sub>
-                                      <m:r>
-                                        <a:rPr lang="en-US" sz="2200" b="0" i="1" smtClean="0">
-                                          <a:latin typeface="Cambria Math" panose="02040503050406030204" pitchFamily="18" charset="0"/>
-                                        </a:rPr>
-                                        <m:t>𝑛</m:t>
-                                      </m:r>
-                                    </m:sub>
-                                  </m:sSub>
-                                  <m:r>
-                                    <a:rPr lang="en-US" sz="2200" b="0" i="1" smtClean="0">
-                                      <a:latin typeface="Cambria Math" panose="02040503050406030204" pitchFamily="18" charset="0"/>
-                                    </a:rPr>
-                                    <m:t>−</m:t>
-                                  </m:r>
-                                  <m:sSub>
-                                    <m:sSubPr>
-                                      <m:ctrlPr>
-                                        <a:rPr lang="en-US" sz="2200" b="0" i="1" smtClean="0">
-                                          <a:latin typeface="Cambria Math" panose="02040503050406030204" pitchFamily="18" charset="0"/>
-                                        </a:rPr>
-                                      </m:ctrlPr>
-                                    </m:sSubPr>
-                                    <m:e>
-                                      <m:r>
-                                        <a:rPr lang="en-US" sz="2200" b="0" i="1" smtClean="0">
-                                          <a:latin typeface="Cambria Math" panose="02040503050406030204" pitchFamily="18" charset="0"/>
-                                        </a:rPr>
-                                        <m:t>𝑙</m:t>
-                                      </m:r>
-                                    </m:e>
-                                    <m:sub>
-                                      <m:r>
-                                        <a:rPr lang="en-US" sz="2200" b="0" i="1" smtClean="0">
-                                          <a:latin typeface="Cambria Math" panose="02040503050406030204" pitchFamily="18" charset="0"/>
-                                        </a:rPr>
-                                        <m:t>𝑛</m:t>
-                                      </m:r>
-                                    </m:sub>
-                                  </m:sSub>
-                                </m:e>
-                              </m:d>
-                              <m:r>
-                                <a:rPr lang="en-US" sz="2200" b="0" i="1" smtClean="0">
-                                  <a:latin typeface="Cambria Math" panose="02040503050406030204" pitchFamily="18" charset="0"/>
-                                </a:rPr>
-                                <m:t>+</m:t>
-                              </m:r>
-                              <m:d>
-                                <m:dPr>
-                                  <m:ctrlPr>
-                                    <a:rPr lang="en-US" sz="2200" b="0" i="1" smtClean="0">
-                                      <a:latin typeface="Cambria Math" panose="02040503050406030204" pitchFamily="18" charset="0"/>
-                                    </a:rPr>
-                                  </m:ctrlPr>
-                                </m:dPr>
-                                <m:e>
-                                  <m:r>
-                                    <a:rPr lang="en-US" sz="2200" b="0" i="1" smtClean="0">
-                                      <a:latin typeface="Cambria Math" panose="02040503050406030204" pitchFamily="18" charset="0"/>
-                                    </a:rPr>
-                                    <m:t>1−</m:t>
-                                  </m:r>
-                                  <m:r>
-                                    <a:rPr lang="en-US" sz="2200" b="0" i="1" smtClean="0">
-                                      <a:latin typeface="Cambria Math" panose="02040503050406030204" pitchFamily="18" charset="0"/>
-                                    </a:rPr>
-                                    <m:t>𝛾</m:t>
-                                  </m:r>
-                                </m:e>
-                              </m:d>
-                              <m:sSub>
-                                <m:sSubPr>
-                                  <m:ctrlPr>
-                                    <a:rPr lang="en-US" sz="2200" b="0" i="1" smtClean="0">
-                                      <a:latin typeface="Cambria Math" panose="02040503050406030204" pitchFamily="18" charset="0"/>
-                                    </a:rPr>
-                                  </m:ctrlPr>
-                                </m:sSubPr>
-                                <m:e>
-                                  <m:r>
-                                    <a:rPr lang="en-US" sz="2200" b="0" i="1" smtClean="0">
-                                      <a:latin typeface="Cambria Math" panose="02040503050406030204" pitchFamily="18" charset="0"/>
-                                    </a:rPr>
-                                    <m:t>𝑠</m:t>
-                                  </m:r>
-                                </m:e>
-                                <m:sub>
-                                  <m:r>
-                                    <a:rPr lang="en-US" sz="2200" b="0" i="1" smtClean="0">
-                                      <a:latin typeface="Cambria Math" panose="02040503050406030204" pitchFamily="18" charset="0"/>
-                                    </a:rPr>
-                                    <m:t>𝑛</m:t>
-                                  </m:r>
-                                  <m:r>
-                                    <a:rPr lang="en-US" sz="2200" b="0" i="1" smtClean="0">
-                                      <a:latin typeface="Cambria Math" panose="02040503050406030204" pitchFamily="18" charset="0"/>
-                                    </a:rPr>
-                                    <m:t>−</m:t>
-                                  </m:r>
-                                  <m:r>
-                                    <a:rPr lang="en-US" sz="2200" b="0" i="1" smtClean="0">
-                                      <a:latin typeface="Cambria Math" panose="02040503050406030204" pitchFamily="18" charset="0"/>
-                                    </a:rPr>
-                                    <m:t>𝑚</m:t>
-                                  </m:r>
-                                </m:sub>
-                              </m:sSub>
-                            </m:e>
-                          </m:eqArr>
-                        </m:e>
-                      </m:d>
-                    </m:oMath>
-                  </m:oMathPara>
-                </a14:m>
-                <a:endParaRPr lang="en-US" sz="2200" dirty="0"/>
-              </a:p>
-              <a:p>
-                <a:pPr marL="0" indent="0">
-                  <a:buNone/>
-                </a:pPr>
-                <a:r>
-                  <a:rPr lang="ru-RU" sz="2000" dirty="0"/>
-                  <a:t>где </a:t>
-                </a:r>
-                <a14:m>
-                  <m:oMath xmlns:m="http://schemas.openxmlformats.org/officeDocument/2006/math">
-                    <m:r>
-                      <a:rPr lang="en-US" sz="2000" i="1">
-                        <a:latin typeface="Cambria Math" panose="02040503050406030204" pitchFamily="18" charset="0"/>
-                      </a:rPr>
-                      <m:t>𝛾</m:t>
-                    </m:r>
-                  </m:oMath>
-                </a14:m>
-                <a:r>
-                  <a:rPr lang="ru-RU" sz="2000" dirty="0"/>
-                  <a:t> – коэффициент сезонного сглаживания,</a:t>
-                </a:r>
-                <a:r>
-                  <a:rPr lang="en-US" sz="2000" dirty="0"/>
-                  <a:t> </a:t>
-                </a:r>
-                <a14:m>
-                  <m:oMath xmlns:m="http://schemas.openxmlformats.org/officeDocument/2006/math">
-                    <m:r>
-                      <a:rPr lang="en-US" sz="2000" i="1">
-                        <a:latin typeface="Cambria Math" panose="02040503050406030204" pitchFamily="18" charset="0"/>
-                      </a:rPr>
-                      <m:t>𝑚</m:t>
-                    </m:r>
-                  </m:oMath>
-                </a14:m>
-                <a:r>
-                  <a:rPr lang="en-US" sz="2000" dirty="0"/>
-                  <a:t> – </a:t>
-                </a:r>
-                <a:r>
-                  <a:rPr lang="ru-RU" sz="2000" dirty="0"/>
-                  <a:t>период сезонность,</a:t>
-                </a:r>
-                <a14:m>
-                  <m:oMath xmlns:m="http://schemas.openxmlformats.org/officeDocument/2006/math">
-                    <m:r>
-                      <a:rPr lang="en-US" sz="2000" i="1">
-                        <a:latin typeface="Cambria Math" panose="02040503050406030204" pitchFamily="18" charset="0"/>
-                      </a:rPr>
-                      <m:t>∆</m:t>
-                    </m:r>
-                    <m:r>
-                      <a:rPr lang="en-US" sz="2000" b="0" i="1" smtClean="0">
-                        <a:latin typeface="Cambria Math" panose="02040503050406030204" pitchFamily="18" charset="0"/>
-                      </a:rPr>
-                      <m:t>=</m:t>
-                    </m:r>
-                    <m:r>
-                      <a:rPr lang="en-US" sz="2000" i="1">
-                        <a:latin typeface="Cambria Math" panose="02040503050406030204" pitchFamily="18" charset="0"/>
-                      </a:rPr>
-                      <m:t>𝑑</m:t>
-                    </m:r>
-                    <m:r>
-                      <a:rPr lang="en-US" sz="2000" i="1">
-                        <a:latin typeface="Cambria Math" panose="02040503050406030204" pitchFamily="18" charset="0"/>
-                      </a:rPr>
-                      <m:t> </m:t>
-                    </m:r>
-                    <m:r>
-                      <a:rPr lang="en-US" sz="2000" i="1">
-                        <a:latin typeface="Cambria Math" panose="02040503050406030204" pitchFamily="18" charset="0"/>
-                      </a:rPr>
-                      <m:t>𝑚𝑜𝑑</m:t>
-                    </m:r>
-                    <m:r>
-                      <a:rPr lang="en-US" sz="2000" i="1">
-                        <a:latin typeface="Cambria Math" panose="02040503050406030204" pitchFamily="18" charset="0"/>
-                      </a:rPr>
-                      <m:t> </m:t>
-                    </m:r>
-                    <m:r>
-                      <a:rPr lang="en-US" sz="2000" i="1">
-                        <a:latin typeface="Cambria Math" panose="02040503050406030204" pitchFamily="18" charset="0"/>
-                      </a:rPr>
-                      <m:t>𝑚</m:t>
-                    </m:r>
-                  </m:oMath>
-                </a14:m>
-                <a:r>
-                  <a:rPr lang="ru-RU" sz="2000" dirty="0"/>
-                  <a:t> – смещение относительного последнего полного сезона в данных</a:t>
-                </a:r>
-                <a:endParaRPr lang="en-US" sz="2000" dirty="0"/>
-              </a:p>
-              <a:p>
-                <a:pPr marL="0" indent="0">
-                  <a:buNone/>
-                </a:pPr>
-                <a:endParaRPr lang="en-US" sz="2000" i="1" dirty="0">
-                  <a:latin typeface="Cambria Math" panose="02040503050406030204" pitchFamily="18" charset="0"/>
-                </a:endParaRPr>
-              </a:p>
-              <a:p>
-                <a:pPr marL="0" indent="0">
-                  <a:buNone/>
-                </a:pPr>
-                <a:endParaRPr lang="ru-RU" sz="2000" dirty="0"/>
-              </a:p>
-            </p:txBody>
-          </p:sp>
-        </mc:Choice>
-        <mc:Fallback xmlns="">
-          <p:sp>
-            <p:nvSpPr>
-              <p:cNvPr id="3" name="Объект 2">
-                <a:extLst>
-                  <a:ext uri="{FF2B5EF4-FFF2-40B4-BE49-F238E27FC236}">
-                    <a16:creationId xmlns:a16="http://schemas.microsoft.com/office/drawing/2014/main" id="{9CFDC76D-90F0-4FD7-8BA6-954D6D2E6FFD}"/>
-                  </a:ext>
-                </a:extLst>
-              </p:cNvPr>
-              <p:cNvSpPr>
-                <a:spLocks noGrp="1" noRot="1" noChangeAspect="1" noMove="1" noResize="1" noEditPoints="1" noAdjustHandles="1" noChangeArrowheads="1" noChangeShapeType="1" noTextEdit="1"/>
-              </p:cNvSpPr>
-              <p:nvPr>
-                <p:ph idx="1"/>
-              </p:nvPr>
-            </p:nvSpPr>
-            <p:spPr>
-              <a:xfrm>
-                <a:off x="226957" y="817117"/>
-                <a:ext cx="11791949" cy="5502274"/>
-              </a:xfrm>
-              <a:blipFill>
-                <a:blip r:embed="rId3"/>
-                <a:stretch>
-                  <a:fillRect l="-672" t="-1329"/>
-                </a:stretch>
-              </a:blipFill>
-            </p:spPr>
-            <p:txBody>
-              <a:bodyPr/>
-              <a:lstStyle/>
-              <a:p>
-                <a:r>
-                  <a:rPr lang="ru-RU">
-                    <a:noFill/>
-                  </a:rPr>
-                  <a:t> </a:t>
-                </a:r>
-              </a:p>
-            </p:txBody>
-          </p:sp>
-        </mc:Fallback>
-      </mc:AlternateContent>
-      <p:sp>
-        <p:nvSpPr>
-          <p:cNvPr id="5" name="Прямоугольник 4"/>
-          <p:cNvSpPr/>
-          <p:nvPr/>
-        </p:nvSpPr>
-        <p:spPr>
-          <a:xfrm>
-            <a:off x="504825" y="6488668"/>
-            <a:ext cx="9077325" cy="338554"/>
-          </a:xfrm>
-          <a:prstGeom prst="rect">
-            <a:avLst/>
-          </a:prstGeom>
-        </p:spPr>
-        <p:txBody>
-          <a:bodyPr wrap="square">
-            <a:spAutoFit/>
-          </a:bodyPr>
-          <a:lstStyle/>
-          <a:p>
-            <a:r>
-              <a:rPr lang="ru-RU" sz="1600" dirty="0"/>
-              <a:t>https://education.yandex.ru/handbook/ml/article/analitika-vremennyh-ryadov</a:t>
-            </a:r>
-          </a:p>
-        </p:txBody>
-      </p:sp>
-      <p:sp>
-        <p:nvSpPr>
-          <p:cNvPr id="6" name="Прямоугольник 5"/>
-          <p:cNvSpPr/>
-          <p:nvPr/>
-        </p:nvSpPr>
-        <p:spPr>
-          <a:xfrm>
-            <a:off x="7331127" y="6488668"/>
-            <a:ext cx="3727624" cy="338554"/>
-          </a:xfrm>
-          <a:prstGeom prst="rect">
-            <a:avLst/>
-          </a:prstGeom>
-        </p:spPr>
-        <p:txBody>
-          <a:bodyPr wrap="none">
-            <a:spAutoFit/>
-          </a:bodyPr>
-          <a:lstStyle/>
-          <a:p>
-            <a:r>
-              <a:rPr lang="ru-RU" sz="1600" dirty="0"/>
-              <a:t>https://otexts.com/fpp2/holt-winters.html</a:t>
-            </a:r>
-          </a:p>
-        </p:txBody>
-      </p:sp>
-      <p:sp>
-        <p:nvSpPr>
-          <p:cNvPr id="10" name="Прямоугольник 9"/>
-          <p:cNvSpPr/>
-          <p:nvPr/>
-        </p:nvSpPr>
-        <p:spPr>
-          <a:xfrm>
-            <a:off x="346840" y="3826401"/>
-            <a:ext cx="5666554" cy="2800767"/>
-          </a:xfrm>
-          <a:prstGeom prst="rect">
-            <a:avLst/>
-          </a:prstGeom>
-        </p:spPr>
-        <p:txBody>
-          <a:bodyPr wrap="square">
-            <a:spAutoFit/>
-          </a:bodyPr>
-          <a:lstStyle/>
-          <a:p>
-            <a:pPr algn="just"/>
-            <a:r>
-              <a:rPr lang="ru-RU" sz="2000" dirty="0"/>
-              <a:t>В модели Сезонная компонента – это текущее значение без уровня и предыдущая сезонная компонента</a:t>
-            </a:r>
-          </a:p>
-          <a:p>
-            <a:pPr marL="285750" indent="-285750" algn="just">
-              <a:buFont typeface="Arial" panose="020B0604020202020204" pitchFamily="34" charset="0"/>
-              <a:buChar char="•"/>
-            </a:pPr>
-            <a:r>
-              <a:rPr lang="ru-RU" sz="2000" dirty="0"/>
-              <a:t>Сезон – сравнительно быстрые изменения с одинаковым периодом!</a:t>
-            </a:r>
-            <a:endParaRPr lang="en-US" sz="2000" dirty="0"/>
-          </a:p>
-          <a:p>
-            <a:pPr marL="342900" indent="-342900" algn="just">
-              <a:buFont typeface="Arial" panose="020B0604020202020204" pitchFamily="34" charset="0"/>
-              <a:buChar char="•"/>
-            </a:pPr>
-            <a:r>
-              <a:rPr lang="ru-RU" sz="2000" dirty="0"/>
-              <a:t>Могут быть также мультипликативная и затухающая модели тренда и сезонности.</a:t>
-            </a:r>
-          </a:p>
-          <a:p>
-            <a:pPr algn="just"/>
-            <a:r>
-              <a:rPr lang="ru-RU" sz="2000" dirty="0"/>
-              <a:t>	напр. спрос на </a:t>
-            </a:r>
-            <a:r>
-              <a:rPr lang="ru-RU" sz="2000" dirty="0" err="1"/>
-              <a:t>электроэенерги</a:t>
-            </a:r>
-            <a:r>
-              <a:rPr lang="ru-RU" sz="2000" dirty="0"/>
-              <a:t>.</a:t>
-            </a:r>
-          </a:p>
-          <a:p>
-            <a:pPr algn="just"/>
-            <a:endParaRPr lang="ru-RU" sz="1600" b="0" i="1" dirty="0">
-              <a:solidFill>
-                <a:schemeClr val="tx1"/>
-              </a:solidFill>
-              <a:effectLst/>
-              <a:latin typeface="__YSText_8fb396"/>
-            </a:endParaRPr>
-          </a:p>
-        </p:txBody>
-      </p:sp>
-      <p:pic>
-        <p:nvPicPr>
-          <p:cNvPr id="14" name="Picture 2" descr="image.png">
-            <a:extLst>
-              <a:ext uri="{FF2B5EF4-FFF2-40B4-BE49-F238E27FC236}">
-                <a16:creationId xmlns:a16="http://schemas.microsoft.com/office/drawing/2014/main" id="{02A694C1-DCCF-4974-B57F-8BFBFBCC1DE6}"/>
-              </a:ext>
-            </a:extLst>
-          </p:cNvPr>
-          <p:cNvPicPr>
-            <a:picLocks noChangeAspect="1" noChangeArrowheads="1"/>
-          </p:cNvPicPr>
-          <p:nvPr/>
-        </p:nvPicPr>
-        <p:blipFill rotWithShape="1">
-          <a:blip r:embed="rId4">
-            <a:extLst>
-              <a:ext uri="{28A0092B-C50C-407E-A947-70E740481C1C}">
-                <a14:useLocalDpi xmlns:a14="http://schemas.microsoft.com/office/drawing/2010/main" val="0"/>
-              </a:ext>
-            </a:extLst>
-          </a:blip>
-          <a:srcRect l="8887" t="8532" r="8717" b="6336"/>
-          <a:stretch/>
-        </p:blipFill>
-        <p:spPr bwMode="auto">
-          <a:xfrm>
-            <a:off x="6133277" y="3416074"/>
-            <a:ext cx="5734050" cy="2962275"/>
-          </a:xfrm>
-          <a:prstGeom prst="rect">
-            <a:avLst/>
-          </a:prstGeom>
-          <a:noFill/>
-          <a:extLst>
-            <a:ext uri="{909E8E84-426E-40DD-AFC4-6F175D3DCCD1}">
-              <a14:hiddenFill xmlns:a14="http://schemas.microsoft.com/office/drawing/2010/main">
-                <a:solidFill>
-                  <a:srgbClr val="FFFFFF"/>
-                </a:solidFill>
-              </a14:hiddenFill>
-            </a:ext>
-          </a:extLst>
-        </p:spPr>
-      </p:pic>
-      <p:pic>
-        <p:nvPicPr>
-          <p:cNvPr id="8" name="Picture 2" descr="image.png">
-            <a:extLst>
-              <a:ext uri="{FF2B5EF4-FFF2-40B4-BE49-F238E27FC236}">
-                <a16:creationId xmlns:a16="http://schemas.microsoft.com/office/drawing/2014/main" id="{02A694C1-DCCF-4974-B57F-8BFBFBCC1DE6}"/>
-              </a:ext>
-            </a:extLst>
-          </p:cNvPr>
-          <p:cNvPicPr>
-            <a:picLocks noChangeAspect="1" noChangeArrowheads="1"/>
-          </p:cNvPicPr>
-          <p:nvPr/>
-        </p:nvPicPr>
-        <p:blipFill rotWithShape="1">
-          <a:blip r:embed="rId4">
-            <a:extLst>
-              <a:ext uri="{28A0092B-C50C-407E-A947-70E740481C1C}">
-                <a14:useLocalDpi xmlns:a14="http://schemas.microsoft.com/office/drawing/2010/main" val="0"/>
-              </a:ext>
-            </a:extLst>
-          </a:blip>
-          <a:srcRect l="78976" t="11915" r="10074" b="77683"/>
-          <a:stretch/>
-        </p:blipFill>
-        <p:spPr bwMode="auto">
-          <a:xfrm>
-            <a:off x="9284584" y="3416073"/>
-            <a:ext cx="2734322" cy="1298801"/>
-          </a:xfrm>
-          <a:prstGeom prst="rect">
-            <a:avLst/>
-          </a:prstGeom>
-          <a:noFill/>
-          <a:extLst>
-            <a:ext uri="{909E8E84-426E-40DD-AFC4-6F175D3DCCD1}">
-              <a14:hiddenFill xmlns:a14="http://schemas.microsoft.com/office/drawing/2010/main">
-                <a:solidFill>
-                  <a:srgbClr val="FFFFFF"/>
-                </a:solidFill>
-              </a14:hiddenFill>
-            </a:ext>
-          </a:extLst>
-        </p:spPr>
-      </p:pic>
-    </p:spTree>
-    <p:extLst>
-      <p:ext uri="{BB962C8B-B14F-4D97-AF65-F5344CB8AC3E}">
-        <p14:creationId xmlns:p14="http://schemas.microsoft.com/office/powerpoint/2010/main" val="1301338103"/>
       </p:ext>
     </p:extLst>
   </p:cSld>
